--- a/S1-CL1-Cloud-Design-Build/delivery/topic_02/Topic_02_Slides.pptx
+++ b/S1-CL1-Cloud-Design-Build/delivery/topic_02/Topic_02_Slides.pptx
@@ -4,35 +4,32 @@
   <p:sldMasterIdLst>
     <p:sldMasterId id="2147483648" r:id="rId1"/>
   </p:sldMasterIdLst>
-  <p:notesMasterIdLst>
-    <p:notesMasterId r:id="rId25"/>
-  </p:notesMasterIdLst>
   <p:sldIdLst>
-    <p:sldId id="256" r:id="rId2"/>
-    <p:sldId id="257" r:id="rId3"/>
-    <p:sldId id="258" r:id="rId4"/>
-    <p:sldId id="259" r:id="rId5"/>
-    <p:sldId id="260" r:id="rId6"/>
-    <p:sldId id="261" r:id="rId7"/>
-    <p:sldId id="262" r:id="rId8"/>
-    <p:sldId id="263" r:id="rId9"/>
-    <p:sldId id="264" r:id="rId10"/>
-    <p:sldId id="265" r:id="rId11"/>
-    <p:sldId id="266" r:id="rId12"/>
-    <p:sldId id="267" r:id="rId13"/>
-    <p:sldId id="268" r:id="rId14"/>
-    <p:sldId id="269" r:id="rId15"/>
-    <p:sldId id="270" r:id="rId16"/>
-    <p:sldId id="271" r:id="rId17"/>
-    <p:sldId id="272" r:id="rId18"/>
-    <p:sldId id="273" r:id="rId19"/>
-    <p:sldId id="274" r:id="rId20"/>
-    <p:sldId id="275" r:id="rId21"/>
-    <p:sldId id="276" r:id="rId22"/>
-    <p:sldId id="277" r:id="rId23"/>
-    <p:sldId id="278" r:id="rId24"/>
+    <p:sldId id="256" r:id="rId7"/>
+    <p:sldId id="257" r:id="rId8"/>
+    <p:sldId id="258" r:id="rId10"/>
+    <p:sldId id="259" r:id="rId11"/>
+    <p:sldId id="260" r:id="rId12"/>
+    <p:sldId id="261" r:id="rId13"/>
+    <p:sldId id="262" r:id="rId14"/>
+    <p:sldId id="263" r:id="rId15"/>
+    <p:sldId id="264" r:id="rId16"/>
+    <p:sldId id="265" r:id="rId17"/>
+    <p:sldId id="266" r:id="rId18"/>
+    <p:sldId id="267" r:id="rId19"/>
+    <p:sldId id="268" r:id="rId20"/>
+    <p:sldId id="269" r:id="rId21"/>
+    <p:sldId id="270" r:id="rId22"/>
+    <p:sldId id="271" r:id="rId23"/>
+    <p:sldId id="272" r:id="rId24"/>
+    <p:sldId id="273" r:id="rId25"/>
+    <p:sldId id="274" r:id="rId26"/>
+    <p:sldId id="275" r:id="rId27"/>
+    <p:sldId id="276" r:id="rId28"/>
+    <p:sldId id="277" r:id="rId29"/>
+    <p:sldId id="278" r:id="rId30"/>
   </p:sldIdLst>
-  <p:sldSz cx="12192000" cy="6858000"/>
+  <p:sldSz cx="12191695" cy="6858000" type="screen4x3"/>
   <p:notesSz cx="6858000" cy="9144000"/>
   <p:defaultTextStyle>
     <a:defPPr>
@@ -129,27 +126,11 @@
       </a:defRPr>
     </a:lvl9pPr>
   </p:defaultTextStyle>
-  <p:extLst>
-    <p:ext uri="{EFAFB233-063F-42B5-8137-9DF3F51BA10A}">
-      <p15:sldGuideLst xmlns:p15="http://schemas.microsoft.com/office/powerpoint/2012/main">
-        <p15:guide id="1" orient="horz" pos="2160">
-          <p15:clr>
-            <a:srgbClr val="A4A3A4"/>
-          </p15:clr>
-        </p15:guide>
-        <p15:guide id="2" pos="2880">
-          <p15:clr>
-            <a:srgbClr val="A4A3A4"/>
-          </p15:clr>
-        </p15:guide>
-      </p15:sldGuideLst>
-    </p:ext>
-  </p:extLst>
 </p:presentation>
 </file>
 
 <file path=ppt/notesMasters/notesMaster1.xml><?xml version="1.0" encoding="utf-8"?>
-<p:notesMaster xmlns:a="http://schemas.openxmlformats.org/drawingml/2006/main" xmlns:r="http://schemas.openxmlformats.org/officeDocument/2006/relationships" xmlns:p="http://schemas.openxmlformats.org/presentationml/2006/main">
+<p:notesMaster xmlns:a="http://schemas.openxmlformats.org/drawingml/2006/main" xmlns:p="http://schemas.openxmlformats.org/presentationml/2006/main" xmlns:r="http://schemas.openxmlformats.org/officeDocument/2006/relationships">
   <p:cSld>
     <p:bg>
       <p:bgRef idx="1001">
@@ -183,7 +164,7 @@
         <p:spPr>
           <a:xfrm>
             <a:off x="0" y="0"/>
-            <a:ext cx="2971800" cy="458788"/>
+            <a:ext cx="2971800" cy="457200"/>
           </a:xfrm>
           <a:prstGeom prst="rect">
             <a:avLst/>
@@ -214,7 +195,7 @@
         <p:spPr>
           <a:xfrm>
             <a:off x="3884613" y="0"/>
-            <a:ext cx="2971800" cy="458788"/>
+            <a:ext cx="2971800" cy="457200"/>
           </a:xfrm>
           <a:prstGeom prst="rect">
             <a:avLst/>
@@ -228,9 +209,9 @@
             </a:lvl1pPr>
           </a:lstStyle>
           <a:p>
-            <a:fld id="{576A9CB0-9823-8548-803F-A18C20625C56}" type="datetimeFigureOut">
+            <a:fld id="{0F89C1C7-3DCD-1040-A9CF-14679D8B5DDD}" type="datetimeFigureOut">
               <a:rPr lang="en-US" smtClean="0"/>
-              <a:t>7/15/26</a:t>
+              <a:t>10/17/16</a:t>
             </a:fld>
             <a:endParaRPr lang="en-US"/>
           </a:p>
@@ -248,8 +229,8 @@
         </p:nvSpPr>
         <p:spPr>
           <a:xfrm>
-            <a:off x="685800" y="1143000"/>
-            <a:ext cx="5486400" cy="3086100"/>
+            <a:off x="1143000" y="685800"/>
+            <a:ext cx="4572000" cy="3429000"/>
           </a:xfrm>
           <a:prstGeom prst="rect">
             <a:avLst/>
@@ -281,8 +262,8 @@
         </p:nvSpPr>
         <p:spPr>
           <a:xfrm>
-            <a:off x="685800" y="4400550"/>
-            <a:ext cx="5486400" cy="3600450"/>
+            <a:off x="685800" y="4343400"/>
+            <a:ext cx="5486400" cy="4114800"/>
           </a:xfrm>
           <a:prstGeom prst="rect">
             <a:avLst/>
@@ -294,35 +275,35 @@
           <a:p>
             <a:pPr lvl="0"/>
             <a:r>
-              <a:rPr lang="en-GB"/>
+              <a:rPr lang="en-US" smtClean="0"/>
               <a:t>Click to edit Master text styles</a:t>
             </a:r>
           </a:p>
           <a:p>
             <a:pPr lvl="1"/>
             <a:r>
-              <a:rPr lang="en-GB"/>
+              <a:rPr lang="en-US" smtClean="0"/>
               <a:t>Second level</a:t>
             </a:r>
           </a:p>
           <a:p>
             <a:pPr lvl="2"/>
             <a:r>
-              <a:rPr lang="en-GB"/>
+              <a:rPr lang="en-US" smtClean="0"/>
               <a:t>Third level</a:t>
             </a:r>
           </a:p>
           <a:p>
             <a:pPr lvl="3"/>
             <a:r>
-              <a:rPr lang="en-GB"/>
+              <a:rPr lang="en-US" smtClean="0"/>
               <a:t>Fourth level</a:t>
             </a:r>
           </a:p>
           <a:p>
             <a:pPr lvl="4"/>
             <a:r>
-              <a:rPr lang="en-GB"/>
+              <a:rPr lang="en-US" smtClean="0"/>
               <a:t>Fifth level</a:t>
             </a:r>
             <a:endParaRPr lang="en-US"/>
@@ -342,7 +323,7 @@
         <p:spPr>
           <a:xfrm>
             <a:off x="0" y="8685213"/>
-            <a:ext cx="2971800" cy="458787"/>
+            <a:ext cx="2971800" cy="457200"/>
           </a:xfrm>
           <a:prstGeom prst="rect">
             <a:avLst/>
@@ -373,7 +354,7 @@
         <p:spPr>
           <a:xfrm>
             <a:off x="3884613" y="8685213"/>
-            <a:ext cx="2971800" cy="458787"/>
+            <a:ext cx="2971800" cy="457200"/>
           </a:xfrm>
           <a:prstGeom prst="rect">
             <a:avLst/>
@@ -387,7 +368,7 @@
             </a:lvl1pPr>
           </a:lstStyle>
           <a:p>
-            <a:fld id="{EAC5F82F-9142-2245-A565-13693B690C17}" type="slidenum">
+            <a:fld id="{BB5E49A5-4136-284D-997B-48E1D791AD67}" type="slidenum">
               <a:rPr lang="en-US" smtClean="0"/>
               <a:t>‹#›</a:t>
             </a:fld>
@@ -398,13 +379,13 @@
     </p:spTree>
     <p:extLst>
       <p:ext uri="{BB962C8B-B14F-4D97-AF65-F5344CB8AC3E}">
-        <p14:creationId xmlns:p14="http://schemas.microsoft.com/office/powerpoint/2010/main" val="2879383561"/>
+        <p14:creationId xmlns:p14="http://schemas.microsoft.com/office/powerpoint/2010/main" val="2623252185"/>
       </p:ext>
     </p:extLst>
   </p:cSld>
   <p:clrMap bg1="lt1" tx1="dk1" bg2="lt2" tx2="dk2" accent1="accent1" accent2="accent2" accent3="accent3" accent4="accent4" accent5="accent5" accent6="accent6" hlink="hlink" folHlink="folHlink"/>
   <p:notesStyle>
-    <a:lvl1pPr marL="0" algn="l" defTabSz="914400" rtl="0" eaLnBrk="1" latinLnBrk="0" hangingPunct="1">
+    <a:lvl1pPr marL="0" algn="l" defTabSz="457200" rtl="0" eaLnBrk="1" latinLnBrk="0" hangingPunct="1">
       <a:defRPr sz="1200" kern="1200">
         <a:solidFill>
           <a:schemeClr val="tx1"/>
@@ -414,7 +395,7 @@
         <a:cs typeface="+mn-cs"/>
       </a:defRPr>
     </a:lvl1pPr>
-    <a:lvl2pPr marL="457200" algn="l" defTabSz="914400" rtl="0" eaLnBrk="1" latinLnBrk="0" hangingPunct="1">
+    <a:lvl2pPr marL="457200" algn="l" defTabSz="457200" rtl="0" eaLnBrk="1" latinLnBrk="0" hangingPunct="1">
       <a:defRPr sz="1200" kern="1200">
         <a:solidFill>
           <a:schemeClr val="tx1"/>
@@ -424,7 +405,7 @@
         <a:cs typeface="+mn-cs"/>
       </a:defRPr>
     </a:lvl2pPr>
-    <a:lvl3pPr marL="914400" algn="l" defTabSz="914400" rtl="0" eaLnBrk="1" latinLnBrk="0" hangingPunct="1">
+    <a:lvl3pPr marL="914400" algn="l" defTabSz="457200" rtl="0" eaLnBrk="1" latinLnBrk="0" hangingPunct="1">
       <a:defRPr sz="1200" kern="1200">
         <a:solidFill>
           <a:schemeClr val="tx1"/>
@@ -434,7 +415,7 @@
         <a:cs typeface="+mn-cs"/>
       </a:defRPr>
     </a:lvl3pPr>
-    <a:lvl4pPr marL="1371600" algn="l" defTabSz="914400" rtl="0" eaLnBrk="1" latinLnBrk="0" hangingPunct="1">
+    <a:lvl4pPr marL="1371600" algn="l" defTabSz="457200" rtl="0" eaLnBrk="1" latinLnBrk="0" hangingPunct="1">
       <a:defRPr sz="1200" kern="1200">
         <a:solidFill>
           <a:schemeClr val="tx1"/>
@@ -444,7 +425,7 @@
         <a:cs typeface="+mn-cs"/>
       </a:defRPr>
     </a:lvl4pPr>
-    <a:lvl5pPr marL="1828800" algn="l" defTabSz="914400" rtl="0" eaLnBrk="1" latinLnBrk="0" hangingPunct="1">
+    <a:lvl5pPr marL="1828800" algn="l" defTabSz="457200" rtl="0" eaLnBrk="1" latinLnBrk="0" hangingPunct="1">
       <a:defRPr sz="1200" kern="1200">
         <a:solidFill>
           <a:schemeClr val="tx1"/>
@@ -454,7 +435,7 @@
         <a:cs typeface="+mn-cs"/>
       </a:defRPr>
     </a:lvl5pPr>
-    <a:lvl6pPr marL="2286000" algn="l" defTabSz="914400" rtl="0" eaLnBrk="1" latinLnBrk="0" hangingPunct="1">
+    <a:lvl6pPr marL="2286000" algn="l" defTabSz="457200" rtl="0" eaLnBrk="1" latinLnBrk="0" hangingPunct="1">
       <a:defRPr sz="1200" kern="1200">
         <a:solidFill>
           <a:schemeClr val="tx1"/>
@@ -464,7 +445,7 @@
         <a:cs typeface="+mn-cs"/>
       </a:defRPr>
     </a:lvl6pPr>
-    <a:lvl7pPr marL="2743200" algn="l" defTabSz="914400" rtl="0" eaLnBrk="1" latinLnBrk="0" hangingPunct="1">
+    <a:lvl7pPr marL="2743200" algn="l" defTabSz="457200" rtl="0" eaLnBrk="1" latinLnBrk="0" hangingPunct="1">
       <a:defRPr sz="1200" kern="1200">
         <a:solidFill>
           <a:schemeClr val="tx1"/>
@@ -474,7 +455,7 @@
         <a:cs typeface="+mn-cs"/>
       </a:defRPr>
     </a:lvl7pPr>
-    <a:lvl8pPr marL="3200400" algn="l" defTabSz="914400" rtl="0" eaLnBrk="1" latinLnBrk="0" hangingPunct="1">
+    <a:lvl8pPr marL="3200400" algn="l" defTabSz="457200" rtl="0" eaLnBrk="1" latinLnBrk="0" hangingPunct="1">
       <a:defRPr sz="1200" kern="1200">
         <a:solidFill>
           <a:schemeClr val="tx1"/>
@@ -484,7 +465,7 @@
         <a:cs typeface="+mn-cs"/>
       </a:defRPr>
     </a:lvl8pPr>
-    <a:lvl9pPr marL="3657600" algn="l" defTabSz="914400" rtl="0" eaLnBrk="1" latinLnBrk="0" hangingPunct="1">
+    <a:lvl9pPr marL="3657600" algn="l" defTabSz="457200" rtl="0" eaLnBrk="1" latinLnBrk="0" hangingPunct="1">
       <a:defRPr sz="1200" kern="1200">
         <a:solidFill>
           <a:schemeClr val="tx1"/>
@@ -499,7 +480,7 @@
 </file>
 
 <file path=ppt/notesSlides/notesSlide1.xml><?xml version="1.0" encoding="utf-8"?>
-<p:notes xmlns:a="http://schemas.openxmlformats.org/drawingml/2006/main" xmlns:r="http://schemas.openxmlformats.org/officeDocument/2006/relationships" xmlns:p="http://schemas.openxmlformats.org/presentationml/2006/main">
+<p:notes xmlns:a="http://schemas.openxmlformats.org/drawingml/2006/main" xmlns:p="http://schemas.openxmlformats.org/presentationml/2006/main" xmlns:r="http://schemas.openxmlformats.org/officeDocument/2006/relationships">
   <p:cSld>
     <p:spTree>
       <p:nvGrpSpPr>
@@ -519,7 +500,7 @@
         <p:nvSpPr>
           <p:cNvPr id="2" name="Slide Image Placeholder 1"/>
           <p:cNvSpPr>
-            <a:spLocks noGrp="1" noRot="1" noChangeAspect="1"/>
+            <a:spLocks noGrp="1"/>
           </p:cNvSpPr>
           <p:nvPr>
             <p:ph type="sldImg" idx="2"/>
@@ -534,7 +515,7 @@
             <a:spLocks noGrp="1"/>
           </p:cNvSpPr>
           <p:nvPr>
-            <p:ph type="body" sz="quarter" idx="3"/>
+            <p:ph type="body" idx="3" sz="quarter"/>
           </p:nvPr>
         </p:nvSpPr>
         <p:spPr/>
@@ -583,7 +564,7 @@
           </a:p>
           <a:p>
             <a:r>
-              <a:t>• Fourth bullet: these three become the OPENING SECTIONS of the business case (AT1 §3–§5). What</a:t>
+              <a:t>• Fourth bullet: these three become the OPENING SECTIONS of the business case (AT1 §2–§4). What</a:t>
             </a:r>
           </a:p>
           <a:p>
@@ -613,7 +594,7 @@
           </a:p>
           <a:p>
             <a:r>
-              <a:t>UoC/AT1 tie: this Topic develops PC 1.1–1.3 and PE 1–3; the output is AT1 Part A §3–§5.</a:t>
+              <a:t>UoC/AT1 tie: this Topic develops PC 1.1–1.3 and PE 1–3; the output is AT1 Part A §2–§4.</a:t>
             </a:r>
           </a:p>
         </p:txBody>
@@ -625,7 +606,7 @@
             <a:spLocks noGrp="1"/>
           </p:cNvSpPr>
           <p:nvPr>
-            <p:ph type="sldNum" sz="quarter" idx="5"/>
+            <p:ph type="sldNum" idx="5" sz="quarter"/>
           </p:nvPr>
         </p:nvSpPr>
         <p:spPr/>
@@ -639,7 +620,7 @@
 </file>
 
 <file path=ppt/notesSlides/notesSlide10.xml><?xml version="1.0" encoding="utf-8"?>
-<p:notes xmlns:a="http://schemas.openxmlformats.org/drawingml/2006/main" xmlns:r="http://schemas.openxmlformats.org/officeDocument/2006/relationships" xmlns:p="http://schemas.openxmlformats.org/presentationml/2006/main">
+<p:notes xmlns:a="http://schemas.openxmlformats.org/drawingml/2006/main" xmlns:p="http://schemas.openxmlformats.org/presentationml/2006/main" xmlns:r="http://schemas.openxmlformats.org/officeDocument/2006/relationships">
   <p:cSld>
     <p:spTree>
       <p:nvGrpSpPr>
@@ -659,7 +640,7 @@
         <p:nvSpPr>
           <p:cNvPr id="2" name="Slide Image Placeholder 1"/>
           <p:cNvSpPr>
-            <a:spLocks noGrp="1" noRot="1" noChangeAspect="1"/>
+            <a:spLocks noGrp="1"/>
           </p:cNvSpPr>
           <p:nvPr>
             <p:ph type="sldImg" idx="2"/>
@@ -674,7 +655,7 @@
             <a:spLocks noGrp="1"/>
           </p:cNvSpPr>
           <p:nvPr>
-            <p:ph type="body" sz="quarter" idx="3"/>
+            <p:ph type="body" idx="3" sz="quarter"/>
           </p:nvPr>
         </p:nvSpPr>
         <p:spPr/>
@@ -683,100 +664,67 @@
           <a:lstStyle/>
           <a:p>
             <a:r>
-              <a:rPr dirty="0"/>
-              <a:t>The three-step method that turns source docs into a </a:t>
-            </a:r>
-            <a:r>
-              <a:rPr dirty="0" err="1"/>
-              <a:t>synthesised</a:t>
-            </a:r>
-            <a:r>
-              <a:rPr dirty="0"/>
-              <a:t> current state — teach it as a</a:t>
-            </a:r>
-          </a:p>
-          <a:p>
-            <a:r>
-              <a:rPr dirty="0"/>
+              <a:t>The three-step method that turns source docs into a synthesised current state — teach it as a</a:t>
+            </a:r>
+          </a:p>
+          <a:p>
+            <a:r>
               <a:t>repeatable procedure they'll run in the activity next.</a:t>
             </a:r>
           </a:p>
           <a:p>
             <a:r>
-              <a:rPr dirty="0"/>
               <a:t>• Step 1: read the source docs — environment overview, server/app specs, consultation notes.</a:t>
             </a:r>
           </a:p>
           <a:p>
             <a:r>
-              <a:rPr dirty="0"/>
               <a:t>• Step 2: for EACH fact ask "does this affect the renew-vs-migrate decision?" If no, cut it (this is</a:t>
             </a:r>
           </a:p>
           <a:p>
             <a:r>
-              <a:rPr dirty="0"/>
               <a:t>the relevance filter applied).</a:t>
             </a:r>
           </a:p>
           <a:p>
             <a:r>
-              <a:rPr dirty="0"/>
               <a:t>• Step 3: re-state what's left in PLAIN LANGUAGE, grouped — platform / workload / dependencies /</a:t>
             </a:r>
           </a:p>
           <a:p>
             <a:r>
-              <a:rPr dirty="0"/>
               <a:t>condition-risk. Grouping is what makes it read as synthesis, not a list.</a:t>
             </a:r>
           </a:p>
           <a:p>
             <a:r>
-              <a:rPr dirty="0"/>
               <a:t>• Aim ~half a page, no copy-paste (bolded).</a:t>
             </a:r>
           </a:p>
           <a:p>
             <a:r>
-              <a:rPr dirty="0"/>
               <a:t>Misconception to pre-empt: "re-state = reword each sentence." No — you regroup and compress across</a:t>
             </a:r>
           </a:p>
           <a:p>
             <a:r>
-              <a:rPr dirty="0"/>
-              <a:t>documents; the output is shorter and </a:t>
-            </a:r>
-            <a:r>
-              <a:rPr dirty="0" err="1"/>
-              <a:t>organised</a:t>
-            </a:r>
-            <a:r>
-              <a:rPr dirty="0"/>
-              <a:t> by theme, not a paraphrase of every line.</a:t>
-            </a:r>
-          </a:p>
-          <a:p>
-            <a:r>
-              <a:rPr dirty="0"/>
+              <a:t>documents; the output is shorter and organised by theme, not a paraphrase of every line.</a:t>
+            </a:r>
+          </a:p>
+          <a:p>
+            <a:r>
               <a:t>Question to pose: "You've got five source docs — what's the first question you ask of every fact in</a:t>
             </a:r>
           </a:p>
           <a:p>
             <a:r>
-              <a:rPr dirty="0"/>
               <a:t>them?" ("does it affect the decision?").</a:t>
             </a:r>
           </a:p>
           <a:p>
             <a:r>
-              <a:rPr dirty="0" err="1"/>
-              <a:t>UoC</a:t>
-            </a:r>
-            <a:r>
-              <a:rPr dirty="0"/>
-              <a:t>/AT1 tie: PC 1.2 / PE 2 → AT1 §4; this procedure is exactly how a strong A2 gets written.</a:t>
+              <a:t>UoC/AT1 tie: PC 1.2 / PE 2 → AT1 §3; this procedure is exactly how a strong A2 gets written.</a:t>
             </a:r>
           </a:p>
         </p:txBody>
@@ -788,7 +736,7 @@
             <a:spLocks noGrp="1"/>
           </p:cNvSpPr>
           <p:nvPr>
-            <p:ph type="sldNum" sz="quarter" idx="5"/>
+            <p:ph type="sldNum" idx="5" sz="quarter"/>
           </p:nvPr>
         </p:nvSpPr>
         <p:spPr/>
@@ -802,7 +750,7 @@
 </file>
 
 <file path=ppt/notesSlides/notesSlide11.xml><?xml version="1.0" encoding="utf-8"?>
-<p:notes xmlns:a="http://schemas.openxmlformats.org/drawingml/2006/main" xmlns:r="http://schemas.openxmlformats.org/officeDocument/2006/relationships" xmlns:p="http://schemas.openxmlformats.org/presentationml/2006/main">
+<p:notes xmlns:a="http://schemas.openxmlformats.org/drawingml/2006/main" xmlns:p="http://schemas.openxmlformats.org/presentationml/2006/main" xmlns:r="http://schemas.openxmlformats.org/officeDocument/2006/relationships">
   <p:cSld>
     <p:spTree>
       <p:nvGrpSpPr>
@@ -822,7 +770,7 @@
         <p:nvSpPr>
           <p:cNvPr id="2" name="Slide Image Placeholder 1"/>
           <p:cNvSpPr>
-            <a:spLocks noGrp="1" noRot="1" noChangeAspect="1"/>
+            <a:spLocks noGrp="1"/>
           </p:cNvSpPr>
           <p:nvPr>
             <p:ph type="sldImg" idx="2"/>
@@ -837,7 +785,7 @@
             <a:spLocks noGrp="1"/>
           </p:cNvSpPr>
           <p:nvPr>
-            <p:ph type="body" sz="quarter" idx="3"/>
+            <p:ph type="body" idx="3" sz="quarter"/>
           </p:nvPr>
         </p:nvSpPr>
         <p:spPr/>
@@ -846,12 +794,12 @@
           <a:lstStyle/>
           <a:p>
             <a:r>
-              <a:t>Facilitation — the Section 2 practice; students draft §4 of the practice business case (Ledgerline),</a:t>
-            </a:r>
-          </a:p>
-          <a:p>
-            <a:r>
-              <a:t>mirroring AT1 §4 on a different system.</a:t>
+              <a:t>Facilitation — the Section 2 practice; students draft §3 of the practice business case (Ledgerline),</a:t>
+            </a:r>
+          </a:p>
+          <a:p>
+            <a:r>
+              <a:t>mirroring AT1 §3 on a different system.</a:t>
             </a:r>
           </a:p>
           <a:p>
@@ -938,7 +886,7 @@
             <a:spLocks noGrp="1"/>
           </p:cNvSpPr>
           <p:nvPr>
-            <p:ph type="sldNum" sz="quarter" idx="5"/>
+            <p:ph type="sldNum" idx="5" sz="quarter"/>
           </p:nvPr>
         </p:nvSpPr>
         <p:spPr/>
@@ -952,7 +900,7 @@
 </file>
 
 <file path=ppt/notesSlides/notesSlide12.xml><?xml version="1.0" encoding="utf-8"?>
-<p:notes xmlns:a="http://schemas.openxmlformats.org/drawingml/2006/main" xmlns:r="http://schemas.openxmlformats.org/officeDocument/2006/relationships" xmlns:p="http://schemas.openxmlformats.org/presentationml/2006/main">
+<p:notes xmlns:a="http://schemas.openxmlformats.org/drawingml/2006/main" xmlns:p="http://schemas.openxmlformats.org/presentationml/2006/main" xmlns:r="http://schemas.openxmlformats.org/officeDocument/2006/relationships">
   <p:cSld>
     <p:spTree>
       <p:nvGrpSpPr>
@@ -972,7 +920,7 @@
         <p:nvSpPr>
           <p:cNvPr id="2" name="Slide Image Placeholder 1"/>
           <p:cNvSpPr>
-            <a:spLocks noGrp="1" noRot="1" noChangeAspect="1"/>
+            <a:spLocks noGrp="1"/>
           </p:cNvSpPr>
           <p:nvPr>
             <p:ph type="sldImg" idx="2"/>
@@ -987,7 +935,7 @@
             <a:spLocks noGrp="1"/>
           </p:cNvSpPr>
           <p:nvPr>
-            <p:ph type="body" sz="quarter" idx="3"/>
+            <p:ph type="body" idx="3" sz="quarter"/>
           </p:nvPr>
         </p:nvSpPr>
         <p:spPr/>
@@ -1011,7 +959,7 @@
           </a:p>
           <a:p>
             <a:r>
-              <a:t>current state) — it literally joins §3 to §4.</a:t>
+              <a:t>current state) — it literally joins §2 to §3.</a:t>
             </a:r>
           </a:p>
           <a:p>
@@ -1051,12 +999,12 @@
           </a:p>
           <a:p>
             <a:r>
-              <a:t>+ requirements; current ← your §4 synthesis — it's traceable both ways).</a:t>
-            </a:r>
-          </a:p>
-          <a:p>
-            <a:r>
-              <a:t>UoC/AT1 tie: PC 1.3 / PE 3 → AT1 §5 Gap Analysis (criterion A3); it's the hinge into the options work.</a:t>
+              <a:t>+ requirements; current ← your §3 synthesis — it's traceable both ways).</a:t>
+            </a:r>
+          </a:p>
+          <a:p>
+            <a:r>
+              <a:t>UoC/AT1 tie: PC 1.3 / PE 3 → AT1 §4 Gap Analysis (criterion A3); it's the hinge into the options work.</a:t>
             </a:r>
           </a:p>
         </p:txBody>
@@ -1068,7 +1016,7 @@
             <a:spLocks noGrp="1"/>
           </p:cNvSpPr>
           <p:nvPr>
-            <p:ph type="sldNum" sz="quarter" idx="5"/>
+            <p:ph type="sldNum" idx="5" sz="quarter"/>
           </p:nvPr>
         </p:nvSpPr>
         <p:spPr/>
@@ -1082,7 +1030,7 @@
 </file>
 
 <file path=ppt/notesSlides/notesSlide13.xml><?xml version="1.0" encoding="utf-8"?>
-<p:notes xmlns:a="http://schemas.openxmlformats.org/drawingml/2006/main" xmlns:r="http://schemas.openxmlformats.org/officeDocument/2006/relationships" xmlns:p="http://schemas.openxmlformats.org/presentationml/2006/main">
+<p:notes xmlns:a="http://schemas.openxmlformats.org/drawingml/2006/main" xmlns:p="http://schemas.openxmlformats.org/presentationml/2006/main" xmlns:r="http://schemas.openxmlformats.org/officeDocument/2006/relationships">
   <p:cSld>
     <p:spTree>
       <p:nvGrpSpPr>
@@ -1102,7 +1050,7 @@
         <p:nvSpPr>
           <p:cNvPr id="2" name="Slide Image Placeholder 1"/>
           <p:cNvSpPr>
-            <a:spLocks noGrp="1" noRot="1" noChangeAspect="1"/>
+            <a:spLocks noGrp="1"/>
           </p:cNvSpPr>
           <p:nvPr>
             <p:ph type="sldImg" idx="2"/>
@@ -1117,7 +1065,7 @@
             <a:spLocks noGrp="1"/>
           </p:cNvSpPr>
           <p:nvPr>
-            <p:ph type="body" sz="quarter" idx="3"/>
+            <p:ph type="body" idx="3" sz="quarter"/>
           </p:nvPr>
         </p:nvSpPr>
         <p:spPr/>
@@ -1126,12 +1074,12 @@
           <a:lstStyle/>
           <a:p>
             <a:r>
-              <a:t>Facilitation — the Section 3 practice; students build §5 of the practice business case (Ledgerline)</a:t>
-            </a:r>
-          </a:p>
-          <a:p>
-            <a:r>
-              <a:t>as a structured gap table, mirroring AT1 §5.</a:t>
+              <a:t>Facilitation — the Section 3 practice; students build §4 of the practice business case (Ledgerline)</a:t>
+            </a:r>
+          </a:p>
+          <a:p>
+            <a:r>
+              <a:t>as a structured gap table, mirroring AT1 §4.</a:t>
             </a:r>
           </a:p>
           <a:p>
@@ -1176,7 +1124,7 @@
           </a:p>
           <a:p>
             <a:r>
-              <a:t>3. Check each row traces BACK to a real objective (from §3) and your current-state facts (from §4).</a:t>
+              <a:t>3. Check each row traces BACK to a real objective (from §2) and your current-state facts (from §3).</a:t>
             </a:r>
           </a:p>
           <a:p>
@@ -1201,7 +1149,7 @@
           </a:p>
           <a:p>
             <a:r>
-              <a:t>Share-back prompt: take one row and trace it end-to-end — objective from the plan, current from §4.</a:t>
+              <a:t>Share-back prompt: take one row and trace it end-to-end — objective from the plan, current from §3.</a:t>
             </a:r>
           </a:p>
           <a:p>
@@ -1223,7 +1171,7 @@
             <a:spLocks noGrp="1"/>
           </p:cNvSpPr>
           <p:nvPr>
-            <p:ph type="sldNum" sz="quarter" idx="5"/>
+            <p:ph type="sldNum" idx="5" sz="quarter"/>
           </p:nvPr>
         </p:nvSpPr>
         <p:spPr/>
@@ -1237,7 +1185,7 @@
 </file>
 
 <file path=ppt/notesSlides/notesSlide2.xml><?xml version="1.0" encoding="utf-8"?>
-<p:notes xmlns:a="http://schemas.openxmlformats.org/drawingml/2006/main" xmlns:r="http://schemas.openxmlformats.org/officeDocument/2006/relationships" xmlns:p="http://schemas.openxmlformats.org/presentationml/2006/main">
+<p:notes xmlns:a="http://schemas.openxmlformats.org/drawingml/2006/main" xmlns:p="http://schemas.openxmlformats.org/presentationml/2006/main" xmlns:r="http://schemas.openxmlformats.org/officeDocument/2006/relationships">
   <p:cSld>
     <p:spTree>
       <p:nvGrpSpPr>
@@ -1257,7 +1205,7 @@
         <p:nvSpPr>
           <p:cNvPr id="2" name="Slide Image Placeholder 1"/>
           <p:cNvSpPr>
-            <a:spLocks noGrp="1" noRot="1" noChangeAspect="1"/>
+            <a:spLocks noGrp="1"/>
           </p:cNvSpPr>
           <p:nvPr>
             <p:ph type="sldImg" idx="2"/>
@@ -1272,7 +1220,7 @@
             <a:spLocks noGrp="1"/>
           </p:cNvSpPr>
           <p:nvPr>
-            <p:ph type="body" sz="quarter" idx="3"/>
+            <p:ph type="body" idx="3" sz="quarter"/>
           </p:nvPr>
         </p:nvSpPr>
         <p:spPr/>
@@ -1331,7 +1279,7 @@
           </a:p>
           <a:p>
             <a:r>
-              <a:t>UoC/AT1 tie: PE 1–3 in sequence; this three-part spine maps one-to-one onto AT1 §3 / §4 / §5.</a:t>
+              <a:t>UoC/AT1 tie: PE 1–3 in sequence; this three-part spine maps one-to-one onto AT1 §2 / §3 / §4.</a:t>
             </a:r>
           </a:p>
         </p:txBody>
@@ -1343,7 +1291,7 @@
             <a:spLocks noGrp="1"/>
           </p:cNvSpPr>
           <p:nvPr>
-            <p:ph type="sldNum" sz="quarter" idx="5"/>
+            <p:ph type="sldNum" idx="5" sz="quarter"/>
           </p:nvPr>
         </p:nvSpPr>
         <p:spPr/>
@@ -1357,7 +1305,7 @@
 </file>
 
 <file path=ppt/notesSlides/notesSlide3.xml><?xml version="1.0" encoding="utf-8"?>
-<p:notes xmlns:a="http://schemas.openxmlformats.org/drawingml/2006/main" xmlns:r="http://schemas.openxmlformats.org/officeDocument/2006/relationships" xmlns:p="http://schemas.openxmlformats.org/presentationml/2006/main">
+<p:notes xmlns:a="http://schemas.openxmlformats.org/drawingml/2006/main" xmlns:p="http://schemas.openxmlformats.org/presentationml/2006/main" xmlns:r="http://schemas.openxmlformats.org/officeDocument/2006/relationships">
   <p:cSld>
     <p:spTree>
       <p:nvGrpSpPr>
@@ -1377,7 +1325,7 @@
         <p:nvSpPr>
           <p:cNvPr id="2" name="Slide Image Placeholder 1"/>
           <p:cNvSpPr>
-            <a:spLocks noGrp="1" noRot="1" noChangeAspect="1"/>
+            <a:spLocks noGrp="1"/>
           </p:cNvSpPr>
           <p:nvPr>
             <p:ph type="sldImg" idx="2"/>
@@ -1392,7 +1340,7 @@
             <a:spLocks noGrp="1"/>
           </p:cNvSpPr>
           <p:nvPr>
-            <p:ph type="body" sz="quarter" idx="3"/>
+            <p:ph type="body" idx="3" sz="quarter"/>
           </p:nvPr>
         </p:nvSpPr>
         <p:spPr/>
@@ -1456,7 +1404,7 @@
           </a:p>
           <a:p>
             <a:r>
-              <a:t>UoC/AT1 tie: PC 1.1 / PE 1 → AT1 §3 Strategic Alignment Analysis (criterion A1).</a:t>
+              <a:t>UoC/AT1 tie: PC 1.1 / PE 1 → AT1 §2 Strategic Alignment Analysis (criterion A1).</a:t>
             </a:r>
           </a:p>
         </p:txBody>
@@ -1468,7 +1416,7 @@
             <a:spLocks noGrp="1"/>
           </p:cNvSpPr>
           <p:nvPr>
-            <p:ph type="sldNum" sz="quarter" idx="5"/>
+            <p:ph type="sldNum" idx="5" sz="quarter"/>
           </p:nvPr>
         </p:nvSpPr>
         <p:spPr/>
@@ -1482,7 +1430,7 @@
 </file>
 
 <file path=ppt/notesSlides/notesSlide4.xml><?xml version="1.0" encoding="utf-8"?>
-<p:notes xmlns:a="http://schemas.openxmlformats.org/drawingml/2006/main" xmlns:r="http://schemas.openxmlformats.org/officeDocument/2006/relationships" xmlns:p="http://schemas.openxmlformats.org/presentationml/2006/main">
+<p:notes xmlns:a="http://schemas.openxmlformats.org/drawingml/2006/main" xmlns:p="http://schemas.openxmlformats.org/presentationml/2006/main" xmlns:r="http://schemas.openxmlformats.org/officeDocument/2006/relationships">
   <p:cSld>
     <p:spTree>
       <p:nvGrpSpPr>
@@ -1502,7 +1450,7 @@
         <p:nvSpPr>
           <p:cNvPr id="2" name="Slide Image Placeholder 1"/>
           <p:cNvSpPr>
-            <a:spLocks noGrp="1" noRot="1" noChangeAspect="1"/>
+            <a:spLocks noGrp="1"/>
           </p:cNvSpPr>
           <p:nvPr>
             <p:ph type="sldImg" idx="2"/>
@@ -1517,7 +1465,7 @@
             <a:spLocks noGrp="1"/>
           </p:cNvSpPr>
           <p:nvPr>
-            <p:ph type="body" sz="quarter" idx="3"/>
+            <p:ph type="body" idx="3" sz="quarter"/>
           </p:nvPr>
         </p:nvSpPr>
         <p:spPr/>
@@ -1581,7 +1529,7 @@
           </a:p>
           <a:p>
             <a:r>
-              <a:t>UoC/AT1 tie: PC 1.1 / PE 1 → AT1 §3; the "trace up, material only" habit is exactly what A1 rewards.</a:t>
+              <a:t>UoC/AT1 tie: PC 1.1 / PE 1 → AT1 §2; the "trace up, material only" habit is exactly what A1 rewards.</a:t>
             </a:r>
           </a:p>
         </p:txBody>
@@ -1593,7 +1541,7 @@
             <a:spLocks noGrp="1"/>
           </p:cNvSpPr>
           <p:nvPr>
-            <p:ph type="sldNum" sz="quarter" idx="5"/>
+            <p:ph type="sldNum" idx="5" sz="quarter"/>
           </p:nvPr>
         </p:nvSpPr>
         <p:spPr/>
@@ -1607,7 +1555,7 @@
 </file>
 
 <file path=ppt/notesSlides/notesSlide5.xml><?xml version="1.0" encoding="utf-8"?>
-<p:notes xmlns:a="http://schemas.openxmlformats.org/drawingml/2006/main" xmlns:r="http://schemas.openxmlformats.org/officeDocument/2006/relationships" xmlns:p="http://schemas.openxmlformats.org/presentationml/2006/main">
+<p:notes xmlns:a="http://schemas.openxmlformats.org/drawingml/2006/main" xmlns:p="http://schemas.openxmlformats.org/presentationml/2006/main" xmlns:r="http://schemas.openxmlformats.org/officeDocument/2006/relationships">
   <p:cSld>
     <p:spTree>
       <p:nvGrpSpPr>
@@ -1627,7 +1575,7 @@
         <p:nvSpPr>
           <p:cNvPr id="2" name="Slide Image Placeholder 1"/>
           <p:cNvSpPr>
-            <a:spLocks noGrp="1" noRot="1" noChangeAspect="1"/>
+            <a:spLocks noGrp="1"/>
           </p:cNvSpPr>
           <p:nvPr>
             <p:ph type="sldImg" idx="2"/>
@@ -1642,7 +1590,7 @@
             <a:spLocks noGrp="1"/>
           </p:cNvSpPr>
           <p:nvPr>
-            <p:ph type="body" sz="quarter" idx="3"/>
+            <p:ph type="body" idx="3" sz="quarter"/>
           </p:nvPr>
         </p:nvSpPr>
         <p:spPr/>
@@ -1651,83 +1599,66 @@
           <a:lstStyle/>
           <a:p>
             <a:r>
-              <a:rPr dirty="0"/>
               <a:t>Second half of Section 1 — a strategic argument needs the EXTERNAL industry context, not just the</a:t>
             </a:r>
           </a:p>
           <a:p>
             <a:r>
-              <a:rPr dirty="0"/>
               <a:t>client's internal plan.</a:t>
             </a:r>
           </a:p>
           <a:p>
             <a:r>
-              <a:rPr dirty="0"/>
               <a:t>• First bullet: a plan doesn't exist in a vacuum; compare it against where the industry is heading.</a:t>
             </a:r>
           </a:p>
           <a:p>
             <a:r>
-              <a:rPr dirty="0"/>
               <a:t>• Second bullet: name the trends that matter here — cloud adoption, managed services, OPEX over CAPEX,</a:t>
             </a:r>
           </a:p>
           <a:p>
             <a:r>
-              <a:rPr dirty="0"/>
               <a:t>resilience. These are the yardsticks.</a:t>
             </a:r>
           </a:p>
           <a:p>
             <a:r>
-              <a:rPr dirty="0"/>
               <a:t>• Third/fourth bullets: name BOTH directions — alignment (plan matches industry direction →</a:t>
             </a:r>
           </a:p>
           <a:p>
             <a:r>
-              <a:rPr dirty="0"/>
               <a:t>strengthens the case) and divergence (plan lags or differs → a risk, or an opportunity to flag).</a:t>
             </a:r>
           </a:p>
           <a:p>
             <a:r>
-              <a:rPr dirty="0"/>
               <a:t>Misconception to pre-empt: "industry context = cheerlead for cloud." No — a balanced analysis names</a:t>
             </a:r>
           </a:p>
           <a:p>
             <a:r>
-              <a:rPr dirty="0"/>
               <a:t>where the client is behind AND where a trend might not fit them; honesty is the mark of analysis.</a:t>
             </a:r>
           </a:p>
           <a:p>
             <a:r>
-              <a:rPr dirty="0"/>
               <a:t>Question to pose: "The sector is moving to managed cloud services — where does that ALIGN with YAT's</a:t>
             </a:r>
           </a:p>
           <a:p>
             <a:r>
-              <a:rPr dirty="0"/>
               <a:t>plan, and is there anywhere it might DIVERGE for a small RTO?"</a:t>
             </a:r>
           </a:p>
           <a:p>
             <a:r>
-              <a:rPr dirty="0" err="1"/>
-              <a:t>UoC</a:t>
-            </a:r>
-            <a:r>
-              <a:rPr dirty="0"/>
-              <a:t>/AT1 tie: KE 4 (current/emerging trends and directions) → AT1 §3; the outside view is what lifts</a:t>
-            </a:r>
-          </a:p>
-          <a:p>
-            <a:r>
-              <a:rPr dirty="0"/>
+              <a:t>UoC/AT1 tie: KE 4 (current/emerging trends and directions) → AT1 §2; the outside view is what lifts</a:t>
+            </a:r>
+          </a:p>
+          <a:p>
+            <a:r>
               <a:t>A1 from description to analysis.</a:t>
             </a:r>
           </a:p>
@@ -1740,7 +1671,7 @@
             <a:spLocks noGrp="1"/>
           </p:cNvSpPr>
           <p:nvPr>
-            <p:ph type="sldNum" sz="quarter" idx="5"/>
+            <p:ph type="sldNum" idx="5" sz="quarter"/>
           </p:nvPr>
         </p:nvSpPr>
         <p:spPr/>
@@ -1754,7 +1685,7 @@
 </file>
 
 <file path=ppt/notesSlides/notesSlide6.xml><?xml version="1.0" encoding="utf-8"?>
-<p:notes xmlns:a="http://schemas.openxmlformats.org/drawingml/2006/main" xmlns:r="http://schemas.openxmlformats.org/officeDocument/2006/relationships" xmlns:p="http://schemas.openxmlformats.org/presentationml/2006/main">
+<p:notes xmlns:a="http://schemas.openxmlformats.org/drawingml/2006/main" xmlns:p="http://schemas.openxmlformats.org/presentationml/2006/main" xmlns:r="http://schemas.openxmlformats.org/officeDocument/2006/relationships">
   <p:cSld>
     <p:spTree>
       <p:nvGrpSpPr>
@@ -1774,7 +1705,7 @@
         <p:nvSpPr>
           <p:cNvPr id="2" name="Slide Image Placeholder 1"/>
           <p:cNvSpPr>
-            <a:spLocks noGrp="1" noRot="1" noChangeAspect="1"/>
+            <a:spLocks noGrp="1"/>
           </p:cNvSpPr>
           <p:nvPr>
             <p:ph type="sldImg" idx="2"/>
@@ -1789,7 +1720,7 @@
             <a:spLocks noGrp="1"/>
           </p:cNvSpPr>
           <p:nvPr>
-            <p:ph type="body" sz="quarter" idx="3"/>
+            <p:ph type="body" idx="3" sz="quarter"/>
           </p:nvPr>
         </p:nvSpPr>
         <p:spPr/>
@@ -1798,80 +1729,57 @@
           <a:lstStyle/>
           <a:p>
             <a:r>
-              <a:rPr dirty="0"/>
-              <a:t>The quality checklist for Section 1 — read it as the marker's-eye view of a strong §3, right before</a:t>
-            </a:r>
-          </a:p>
-          <a:p>
-            <a:r>
-              <a:rPr dirty="0"/>
+              <a:t>The quality checklist for Section 1 — read it as the marker's-eye view of a strong §2, right before</a:t>
+            </a:r>
+          </a:p>
+          <a:p>
+            <a:r>
               <a:t>they attempt it. Keep it short; it's a rubric, not new content.</a:t>
             </a:r>
           </a:p>
           <a:p>
             <a:r>
-              <a:rPr dirty="0"/>
               <a:t>• Every claim CITED to the plan (e.g. "ICT Strategic Plan — ICT Goals") — no unsourced assertions.</a:t>
             </a:r>
           </a:p>
           <a:p>
             <a:r>
-              <a:rPr dirty="0"/>
               <a:t>• MATERIAL items only — not the whole plan recited.</a:t>
             </a:r>
           </a:p>
           <a:p>
             <a:r>
-              <a:rPr dirty="0"/>
-              <a:t>• TRACES the initiative up to a real </a:t>
-            </a:r>
-            <a:r>
-              <a:rPr dirty="0" err="1"/>
-              <a:t>organisational</a:t>
-            </a:r>
-            <a:r>
-              <a:rPr dirty="0"/>
-              <a:t> goal (the three-layer move).</a:t>
-            </a:r>
-          </a:p>
-          <a:p>
-            <a:r>
-              <a:rPr dirty="0"/>
+              <a:t>• TRACES the initiative up to a real organisational goal (the three-layer move).</a:t>
+            </a:r>
+          </a:p>
+          <a:p>
+            <a:r>
               <a:t>• ALIGNMENT AND DIVERGENCE both named (magenta line) — balanced, not cheerleading.</a:t>
             </a:r>
           </a:p>
           <a:p>
             <a:r>
-              <a:rPr dirty="0"/>
-              <a:t>Misconception to pre-empt: "more is better." No — a padded §3 that recites the plan scores worse than</a:t>
-            </a:r>
-          </a:p>
-          <a:p>
-            <a:r>
-              <a:rPr dirty="0"/>
+              <a:t>Misconception to pre-empt: "more is better." No — a padded §2 that recites the plan scores worse than</a:t>
+            </a:r>
+          </a:p>
+          <a:p>
+            <a:r>
               <a:t>a tight one that cites four material objectives and traces them.</a:t>
             </a:r>
           </a:p>
           <a:p>
             <a:r>
-              <a:rPr dirty="0"/>
-              <a:t>Question to pose: "If I marked your §3, what's the single fastest way to lose marks?" (uncited claims /</a:t>
-            </a:r>
-          </a:p>
-          <a:p>
-            <a:r>
-              <a:rPr dirty="0"/>
+              <a:t>Question to pose: "If I marked your §2, what's the single fastest way to lose marks?" (uncited claims /</a:t>
+            </a:r>
+          </a:p>
+          <a:p>
+            <a:r>
               <a:t>reciting everything / no divergence named).</a:t>
             </a:r>
           </a:p>
           <a:p>
             <a:r>
-              <a:rPr dirty="0" err="1"/>
-              <a:t>UoC</a:t>
-            </a:r>
-            <a:r>
-              <a:rPr dirty="0"/>
-              <a:t>/AT1 tie: this is the A1 acceptance standard for AT1 §3 — hand them the bar before the activity.</a:t>
+              <a:t>UoC/AT1 tie: this is the A1 acceptance standard for AT1 §2 — hand them the bar before the activity.</a:t>
             </a:r>
           </a:p>
         </p:txBody>
@@ -1883,7 +1791,7 @@
             <a:spLocks noGrp="1"/>
           </p:cNvSpPr>
           <p:nvPr>
-            <p:ph type="sldNum" sz="quarter" idx="5"/>
+            <p:ph type="sldNum" idx="5" sz="quarter"/>
           </p:nvPr>
         </p:nvSpPr>
         <p:spPr/>
@@ -1897,7 +1805,7 @@
 </file>
 
 <file path=ppt/notesSlides/notesSlide7.xml><?xml version="1.0" encoding="utf-8"?>
-<p:notes xmlns:a="http://schemas.openxmlformats.org/drawingml/2006/main" xmlns:r="http://schemas.openxmlformats.org/officeDocument/2006/relationships" xmlns:p="http://schemas.openxmlformats.org/presentationml/2006/main">
+<p:notes xmlns:a="http://schemas.openxmlformats.org/drawingml/2006/main" xmlns:p="http://schemas.openxmlformats.org/presentationml/2006/main" xmlns:r="http://schemas.openxmlformats.org/officeDocument/2006/relationships">
   <p:cSld>
     <p:spTree>
       <p:nvGrpSpPr>
@@ -1917,7 +1825,7 @@
         <p:nvSpPr>
           <p:cNvPr id="2" name="Slide Image Placeholder 1"/>
           <p:cNvSpPr>
-            <a:spLocks noGrp="1" noRot="1" noChangeAspect="1"/>
+            <a:spLocks noGrp="1"/>
           </p:cNvSpPr>
           <p:nvPr>
             <p:ph type="sldImg" idx="2"/>
@@ -1932,7 +1840,7 @@
             <a:spLocks noGrp="1"/>
           </p:cNvSpPr>
           <p:nvPr>
-            <p:ph type="body" sz="quarter" idx="3"/>
+            <p:ph type="body" idx="3" sz="quarter"/>
           </p:nvPr>
         </p:nvSpPr>
         <p:spPr/>
@@ -1941,12 +1849,12 @@
           <a:lstStyle/>
           <a:p>
             <a:r>
-              <a:t>Facilitation — the Section 1 practice; students draft §3 of the PRACTICE business case (Ledgerline).</a:t>
-            </a:r>
-          </a:p>
-          <a:p>
-            <a:r>
-              <a:t>This mirrors AT1 §3 against a different system.</a:t>
+              <a:t>Facilitation — the Section 1 practice; students draft §2 of the PRACTICE business case (Ledgerline).</a:t>
+            </a:r>
+          </a:p>
+          <a:p>
+            <a:r>
+              <a:t>This mirrors AT1 §2 against a different system.</a:t>
             </a:r>
           </a:p>
           <a:p>
@@ -2028,7 +1936,7 @@
             <a:spLocks noGrp="1"/>
           </p:cNvSpPr>
           <p:nvPr>
-            <p:ph type="sldNum" sz="quarter" idx="5"/>
+            <p:ph type="sldNum" idx="5" sz="quarter"/>
           </p:nvPr>
         </p:nvSpPr>
         <p:spPr/>
@@ -2042,7 +1950,7 @@
 </file>
 
 <file path=ppt/notesSlides/notesSlide8.xml><?xml version="1.0" encoding="utf-8"?>
-<p:notes xmlns:a="http://schemas.openxmlformats.org/drawingml/2006/main" xmlns:r="http://schemas.openxmlformats.org/officeDocument/2006/relationships" xmlns:p="http://schemas.openxmlformats.org/presentationml/2006/main">
+<p:notes xmlns:a="http://schemas.openxmlformats.org/drawingml/2006/main" xmlns:p="http://schemas.openxmlformats.org/presentationml/2006/main" xmlns:r="http://schemas.openxmlformats.org/officeDocument/2006/relationships">
   <p:cSld>
     <p:spTree>
       <p:nvGrpSpPr>
@@ -2062,7 +1970,7 @@
         <p:nvSpPr>
           <p:cNvPr id="2" name="Slide Image Placeholder 1"/>
           <p:cNvSpPr>
-            <a:spLocks noGrp="1" noRot="1" noChangeAspect="1"/>
+            <a:spLocks noGrp="1"/>
           </p:cNvSpPr>
           <p:nvPr>
             <p:ph type="sldImg" idx="2"/>
@@ -2077,7 +1985,7 @@
             <a:spLocks noGrp="1"/>
           </p:cNvSpPr>
           <p:nvPr>
-            <p:ph type="body" sz="quarter" idx="3"/>
+            <p:ph type="body" idx="3" sz="quarter"/>
           </p:nvPr>
         </p:nvSpPr>
         <p:spPr/>
@@ -2146,7 +2054,7 @@
           </a:p>
           <a:p>
             <a:r>
-              <a:t>UoC/AT1 tie: PC 1.2 / PE 2 → AT1 §4 Current State (criterion A2); "own words, material only" is A2.</a:t>
+              <a:t>UoC/AT1 tie: PC 1.2 / PE 2 → AT1 §3 Current State (criterion A2); "own words, material only" is A2.</a:t>
             </a:r>
           </a:p>
         </p:txBody>
@@ -2158,7 +2066,7 @@
             <a:spLocks noGrp="1"/>
           </p:cNvSpPr>
           <p:nvPr>
-            <p:ph type="sldNum" sz="quarter" idx="5"/>
+            <p:ph type="sldNum" idx="5" sz="quarter"/>
           </p:nvPr>
         </p:nvSpPr>
         <p:spPr/>
@@ -2172,7 +2080,7 @@
 </file>
 
 <file path=ppt/notesSlides/notesSlide9.xml><?xml version="1.0" encoding="utf-8"?>
-<p:notes xmlns:a="http://schemas.openxmlformats.org/drawingml/2006/main" xmlns:r="http://schemas.openxmlformats.org/officeDocument/2006/relationships" xmlns:p="http://schemas.openxmlformats.org/presentationml/2006/main">
+<p:notes xmlns:a="http://schemas.openxmlformats.org/drawingml/2006/main" xmlns:p="http://schemas.openxmlformats.org/presentationml/2006/main" xmlns:r="http://schemas.openxmlformats.org/officeDocument/2006/relationships">
   <p:cSld>
     <p:spTree>
       <p:nvGrpSpPr>
@@ -2192,7 +2100,7 @@
         <p:nvSpPr>
           <p:cNvPr id="2" name="Slide Image Placeholder 1"/>
           <p:cNvSpPr>
-            <a:spLocks noGrp="1" noRot="1" noChangeAspect="1"/>
+            <a:spLocks noGrp="1"/>
           </p:cNvSpPr>
           <p:nvPr>
             <p:ph type="sldImg" idx="2"/>
@@ -2207,7 +2115,7 @@
             <a:spLocks noGrp="1"/>
           </p:cNvSpPr>
           <p:nvPr>
-            <p:ph type="body" sz="quarter" idx="3"/>
+            <p:ph type="body" idx="3" sz="quarter"/>
           </p:nvPr>
         </p:nvSpPr>
         <p:spPr/>
@@ -2271,7 +2179,7 @@
           </a:p>
           <a:p>
             <a:r>
-              <a:t>UoC/AT1 tie: PC 1.2 / PE 2 → AT1 §4; the filter is how A2 stays material rather than a data dump.</a:t>
+              <a:t>UoC/AT1 tie: PC 1.2 / PE 2 → AT1 §3; the filter is how A2 stays material rather than a data dump.</a:t>
             </a:r>
           </a:p>
         </p:txBody>
@@ -2283,7 +2191,7 @@
             <a:spLocks noGrp="1"/>
           </p:cNvSpPr>
           <p:nvPr>
-            <p:ph type="sldNum" sz="quarter" idx="5"/>
+            <p:ph type="sldNum" idx="5" sz="quarter"/>
           </p:nvPr>
         </p:nvSpPr>
         <p:spPr/>
@@ -2334,9 +2242,10 @@
           <a:lstStyle/>
           <a:p>
             <a:r>
-              <a:rPr lang="en-US"/>
+              <a:rPr lang="en-US" smtClean="0"/>
               <a:t>Click to edit Master title style</a:t>
             </a:r>
+            <a:endParaRPr lang="en-US"/>
           </a:p>
         </p:txBody>
       </p:sp>
@@ -2452,9 +2361,10 @@
           </a:lstStyle>
           <a:p>
             <a:r>
-              <a:rPr lang="en-US"/>
+              <a:rPr lang="en-US" smtClean="0"/>
               <a:t>Click to edit Master subtitle style</a:t>
             </a:r>
+            <a:endParaRPr lang="en-US"/>
           </a:p>
         </p:txBody>
       </p:sp>
@@ -2475,7 +2385,7 @@
           <a:p>
             <a:fld id="{5BCAD085-E8A6-8845-BD4E-CB4CCA059FC4}" type="datetimeFigureOut">
               <a:rPr lang="en-US" smtClean="0"/>
-              <a:t>7/15/26</a:t>
+              <a:t>1/27/13</a:t>
             </a:fld>
             <a:endParaRPr lang="en-US"/>
           </a:p>
@@ -2569,9 +2479,10 @@
           <a:lstStyle/>
           <a:p>
             <a:r>
-              <a:rPr lang="en-US"/>
+              <a:rPr lang="en-US" smtClean="0"/>
               <a:t>Click to edit Master title style</a:t>
             </a:r>
+            <a:endParaRPr lang="en-US"/>
           </a:p>
         </p:txBody>
       </p:sp>
@@ -2592,37 +2503,38 @@
           <a:p>
             <a:pPr lvl="0"/>
             <a:r>
-              <a:rPr lang="en-US"/>
+              <a:rPr lang="en-US" smtClean="0"/>
               <a:t>Click to edit Master text styles</a:t>
             </a:r>
           </a:p>
           <a:p>
             <a:pPr lvl="1"/>
             <a:r>
-              <a:rPr lang="en-US"/>
+              <a:rPr lang="en-US" smtClean="0"/>
               <a:t>Second level</a:t>
             </a:r>
           </a:p>
           <a:p>
             <a:pPr lvl="2"/>
             <a:r>
-              <a:rPr lang="en-US"/>
+              <a:rPr lang="en-US" smtClean="0"/>
               <a:t>Third level</a:t>
             </a:r>
           </a:p>
           <a:p>
             <a:pPr lvl="3"/>
             <a:r>
-              <a:rPr lang="en-US"/>
+              <a:rPr lang="en-US" smtClean="0"/>
               <a:t>Fourth level</a:t>
             </a:r>
           </a:p>
           <a:p>
             <a:pPr lvl="4"/>
             <a:r>
-              <a:rPr lang="en-US"/>
+              <a:rPr lang="en-US" smtClean="0"/>
               <a:t>Fifth level</a:t>
             </a:r>
+            <a:endParaRPr lang="en-US"/>
           </a:p>
         </p:txBody>
       </p:sp>
@@ -2643,7 +2555,7 @@
           <a:p>
             <a:fld id="{5BCAD085-E8A6-8845-BD4E-CB4CCA059FC4}" type="datetimeFigureOut">
               <a:rPr lang="en-US" smtClean="0"/>
-              <a:t>7/15/26</a:t>
+              <a:t>1/27/13</a:t>
             </a:fld>
             <a:endParaRPr lang="en-US"/>
           </a:p>
@@ -2742,9 +2654,10 @@
           <a:lstStyle/>
           <a:p>
             <a:r>
-              <a:rPr lang="en-US"/>
+              <a:rPr lang="en-US" smtClean="0"/>
               <a:t>Click to edit Master title style</a:t>
             </a:r>
+            <a:endParaRPr lang="en-US"/>
           </a:p>
         </p:txBody>
       </p:sp>
@@ -2770,37 +2683,38 @@
           <a:p>
             <a:pPr lvl="0"/>
             <a:r>
-              <a:rPr lang="en-US"/>
+              <a:rPr lang="en-US" smtClean="0"/>
               <a:t>Click to edit Master text styles</a:t>
             </a:r>
           </a:p>
           <a:p>
             <a:pPr lvl="1"/>
             <a:r>
-              <a:rPr lang="en-US"/>
+              <a:rPr lang="en-US" smtClean="0"/>
               <a:t>Second level</a:t>
             </a:r>
           </a:p>
           <a:p>
             <a:pPr lvl="2"/>
             <a:r>
-              <a:rPr lang="en-US"/>
+              <a:rPr lang="en-US" smtClean="0"/>
               <a:t>Third level</a:t>
             </a:r>
           </a:p>
           <a:p>
             <a:pPr lvl="3"/>
             <a:r>
-              <a:rPr lang="en-US"/>
+              <a:rPr lang="en-US" smtClean="0"/>
               <a:t>Fourth level</a:t>
             </a:r>
           </a:p>
           <a:p>
             <a:pPr lvl="4"/>
             <a:r>
-              <a:rPr lang="en-US"/>
+              <a:rPr lang="en-US" smtClean="0"/>
               <a:t>Fifth level</a:t>
             </a:r>
+            <a:endParaRPr lang="en-US"/>
           </a:p>
         </p:txBody>
       </p:sp>
@@ -2821,7 +2735,7 @@
           <a:p>
             <a:fld id="{5BCAD085-E8A6-8845-BD4E-CB4CCA059FC4}" type="datetimeFigureOut">
               <a:rPr lang="en-US" smtClean="0"/>
-              <a:t>7/15/26</a:t>
+              <a:t>1/27/13</a:t>
             </a:fld>
             <a:endParaRPr lang="en-US"/>
           </a:p>
@@ -2915,9 +2829,10 @@
           <a:lstStyle/>
           <a:p>
             <a:r>
-              <a:rPr lang="en-US"/>
+              <a:rPr lang="en-US" smtClean="0"/>
               <a:t>Click to edit Master title style</a:t>
             </a:r>
+            <a:endParaRPr lang="en-US"/>
           </a:p>
         </p:txBody>
       </p:sp>
@@ -2938,37 +2853,38 @@
           <a:p>
             <a:pPr lvl="0"/>
             <a:r>
-              <a:rPr lang="en-US"/>
+              <a:rPr lang="en-US" smtClean="0"/>
               <a:t>Click to edit Master text styles</a:t>
             </a:r>
           </a:p>
           <a:p>
             <a:pPr lvl="1"/>
             <a:r>
-              <a:rPr lang="en-US"/>
+              <a:rPr lang="en-US" smtClean="0"/>
               <a:t>Second level</a:t>
             </a:r>
           </a:p>
           <a:p>
             <a:pPr lvl="2"/>
             <a:r>
-              <a:rPr lang="en-US"/>
+              <a:rPr lang="en-US" smtClean="0"/>
               <a:t>Third level</a:t>
             </a:r>
           </a:p>
           <a:p>
             <a:pPr lvl="3"/>
             <a:r>
-              <a:rPr lang="en-US"/>
+              <a:rPr lang="en-US" smtClean="0"/>
               <a:t>Fourth level</a:t>
             </a:r>
           </a:p>
           <a:p>
             <a:pPr lvl="4"/>
             <a:r>
-              <a:rPr lang="en-US"/>
+              <a:rPr lang="en-US" smtClean="0"/>
               <a:t>Fifth level</a:t>
             </a:r>
+            <a:endParaRPr lang="en-US"/>
           </a:p>
         </p:txBody>
       </p:sp>
@@ -2989,7 +2905,7 @@
           <a:p>
             <a:fld id="{5BCAD085-E8A6-8845-BD4E-CB4CCA059FC4}" type="datetimeFigureOut">
               <a:rPr lang="en-US" smtClean="0"/>
-              <a:t>7/15/26</a:t>
+              <a:t>1/27/13</a:t>
             </a:fld>
             <a:endParaRPr lang="en-US"/>
           </a:p>
@@ -3092,9 +3008,10 @@
           </a:lstStyle>
           <a:p>
             <a:r>
-              <a:rPr lang="en-US"/>
+              <a:rPr lang="en-US" smtClean="0"/>
               <a:t>Click to edit Master title style</a:t>
             </a:r>
+            <a:endParaRPr lang="en-US"/>
           </a:p>
         </p:txBody>
       </p:sp>
@@ -3211,7 +3128,7 @@
           <a:p>
             <a:pPr lvl="0"/>
             <a:r>
-              <a:rPr lang="en-US"/>
+              <a:rPr lang="en-US" smtClean="0"/>
               <a:t>Click to edit Master text styles</a:t>
             </a:r>
           </a:p>
@@ -3234,7 +3151,7 @@
           <a:p>
             <a:fld id="{5BCAD085-E8A6-8845-BD4E-CB4CCA059FC4}" type="datetimeFigureOut">
               <a:rPr lang="en-US" smtClean="0"/>
-              <a:t>7/15/26</a:t>
+              <a:t>1/27/13</a:t>
             </a:fld>
             <a:endParaRPr lang="en-US"/>
           </a:p>
@@ -3328,9 +3245,10 @@
           <a:lstStyle/>
           <a:p>
             <a:r>
-              <a:rPr lang="en-US"/>
+              <a:rPr lang="en-US" smtClean="0"/>
               <a:t>Click to edit Master title style</a:t>
             </a:r>
+            <a:endParaRPr lang="en-US"/>
           </a:p>
         </p:txBody>
       </p:sp>
@@ -3384,37 +3302,38 @@
           <a:p>
             <a:pPr lvl="0"/>
             <a:r>
-              <a:rPr lang="en-US"/>
+              <a:rPr lang="en-US" smtClean="0"/>
               <a:t>Click to edit Master text styles</a:t>
             </a:r>
           </a:p>
           <a:p>
             <a:pPr lvl="1"/>
             <a:r>
-              <a:rPr lang="en-US"/>
+              <a:rPr lang="en-US" smtClean="0"/>
               <a:t>Second level</a:t>
             </a:r>
           </a:p>
           <a:p>
             <a:pPr lvl="2"/>
             <a:r>
-              <a:rPr lang="en-US"/>
+              <a:rPr lang="en-US" smtClean="0"/>
               <a:t>Third level</a:t>
             </a:r>
           </a:p>
           <a:p>
             <a:pPr lvl="3"/>
             <a:r>
-              <a:rPr lang="en-US"/>
+              <a:rPr lang="en-US" smtClean="0"/>
               <a:t>Fourth level</a:t>
             </a:r>
           </a:p>
           <a:p>
             <a:pPr lvl="4"/>
             <a:r>
-              <a:rPr lang="en-US"/>
+              <a:rPr lang="en-US" smtClean="0"/>
               <a:t>Fifth level</a:t>
             </a:r>
+            <a:endParaRPr lang="en-US"/>
           </a:p>
         </p:txBody>
       </p:sp>
@@ -3468,37 +3387,38 @@
           <a:p>
             <a:pPr lvl="0"/>
             <a:r>
-              <a:rPr lang="en-US"/>
+              <a:rPr lang="en-US" smtClean="0"/>
               <a:t>Click to edit Master text styles</a:t>
             </a:r>
           </a:p>
           <a:p>
             <a:pPr lvl="1"/>
             <a:r>
-              <a:rPr lang="en-US"/>
+              <a:rPr lang="en-US" smtClean="0"/>
               <a:t>Second level</a:t>
             </a:r>
           </a:p>
           <a:p>
             <a:pPr lvl="2"/>
             <a:r>
-              <a:rPr lang="en-US"/>
+              <a:rPr lang="en-US" smtClean="0"/>
               <a:t>Third level</a:t>
             </a:r>
           </a:p>
           <a:p>
             <a:pPr lvl="3"/>
             <a:r>
-              <a:rPr lang="en-US"/>
+              <a:rPr lang="en-US" smtClean="0"/>
               <a:t>Fourth level</a:t>
             </a:r>
           </a:p>
           <a:p>
             <a:pPr lvl="4"/>
             <a:r>
-              <a:rPr lang="en-US"/>
+              <a:rPr lang="en-US" smtClean="0"/>
               <a:t>Fifth level</a:t>
             </a:r>
+            <a:endParaRPr lang="en-US"/>
           </a:p>
         </p:txBody>
       </p:sp>
@@ -3519,7 +3439,7 @@
           <a:p>
             <a:fld id="{5BCAD085-E8A6-8845-BD4E-CB4CCA059FC4}" type="datetimeFigureOut">
               <a:rPr lang="en-US" smtClean="0"/>
-              <a:t>7/15/26</a:t>
+              <a:t>1/27/13</a:t>
             </a:fld>
             <a:endParaRPr lang="en-US"/>
           </a:p>
@@ -3617,9 +3537,10 @@
           </a:lstStyle>
           <a:p>
             <a:r>
-              <a:rPr lang="en-US"/>
+              <a:rPr lang="en-US" smtClean="0"/>
               <a:t>Click to edit Master title style</a:t>
             </a:r>
+            <a:endParaRPr lang="en-US"/>
           </a:p>
         </p:txBody>
       </p:sp>
@@ -3682,7 +3603,7 @@
           <a:p>
             <a:pPr lvl="0"/>
             <a:r>
-              <a:rPr lang="en-US"/>
+              <a:rPr lang="en-US" smtClean="0"/>
               <a:t>Click to edit Master text styles</a:t>
             </a:r>
           </a:p>
@@ -3738,37 +3659,38 @@
           <a:p>
             <a:pPr lvl="0"/>
             <a:r>
-              <a:rPr lang="en-US"/>
+              <a:rPr lang="en-US" smtClean="0"/>
               <a:t>Click to edit Master text styles</a:t>
             </a:r>
           </a:p>
           <a:p>
             <a:pPr lvl="1"/>
             <a:r>
-              <a:rPr lang="en-US"/>
+              <a:rPr lang="en-US" smtClean="0"/>
               <a:t>Second level</a:t>
             </a:r>
           </a:p>
           <a:p>
             <a:pPr lvl="2"/>
             <a:r>
-              <a:rPr lang="en-US"/>
+              <a:rPr lang="en-US" smtClean="0"/>
               <a:t>Third level</a:t>
             </a:r>
           </a:p>
           <a:p>
             <a:pPr lvl="3"/>
             <a:r>
-              <a:rPr lang="en-US"/>
+              <a:rPr lang="en-US" smtClean="0"/>
               <a:t>Fourth level</a:t>
             </a:r>
           </a:p>
           <a:p>
             <a:pPr lvl="4"/>
             <a:r>
-              <a:rPr lang="en-US"/>
+              <a:rPr lang="en-US" smtClean="0"/>
               <a:t>Fifth level</a:t>
             </a:r>
+            <a:endParaRPr lang="en-US"/>
           </a:p>
         </p:txBody>
       </p:sp>
@@ -3831,7 +3753,7 @@
           <a:p>
             <a:pPr lvl="0"/>
             <a:r>
-              <a:rPr lang="en-US"/>
+              <a:rPr lang="en-US" smtClean="0"/>
               <a:t>Click to edit Master text styles</a:t>
             </a:r>
           </a:p>
@@ -3887,37 +3809,38 @@
           <a:p>
             <a:pPr lvl="0"/>
             <a:r>
-              <a:rPr lang="en-US"/>
+              <a:rPr lang="en-US" smtClean="0"/>
               <a:t>Click to edit Master text styles</a:t>
             </a:r>
           </a:p>
           <a:p>
             <a:pPr lvl="1"/>
             <a:r>
-              <a:rPr lang="en-US"/>
+              <a:rPr lang="en-US" smtClean="0"/>
               <a:t>Second level</a:t>
             </a:r>
           </a:p>
           <a:p>
             <a:pPr lvl="2"/>
             <a:r>
-              <a:rPr lang="en-US"/>
+              <a:rPr lang="en-US" smtClean="0"/>
               <a:t>Third level</a:t>
             </a:r>
           </a:p>
           <a:p>
             <a:pPr lvl="3"/>
             <a:r>
-              <a:rPr lang="en-US"/>
+              <a:rPr lang="en-US" smtClean="0"/>
               <a:t>Fourth level</a:t>
             </a:r>
           </a:p>
           <a:p>
             <a:pPr lvl="4"/>
             <a:r>
-              <a:rPr lang="en-US"/>
+              <a:rPr lang="en-US" smtClean="0"/>
               <a:t>Fifth level</a:t>
             </a:r>
+            <a:endParaRPr lang="en-US"/>
           </a:p>
         </p:txBody>
       </p:sp>
@@ -3938,7 +3861,7 @@
           <a:p>
             <a:fld id="{5BCAD085-E8A6-8845-BD4E-CB4CCA059FC4}" type="datetimeFigureOut">
               <a:rPr lang="en-US" smtClean="0"/>
-              <a:t>7/15/26</a:t>
+              <a:t>1/27/13</a:t>
             </a:fld>
             <a:endParaRPr lang="en-US"/>
           </a:p>
@@ -4032,9 +3955,10 @@
           <a:lstStyle/>
           <a:p>
             <a:r>
-              <a:rPr lang="en-US"/>
+              <a:rPr lang="en-US" smtClean="0"/>
               <a:t>Click to edit Master title style</a:t>
             </a:r>
+            <a:endParaRPr lang="en-US"/>
           </a:p>
         </p:txBody>
       </p:sp>
@@ -4055,7 +3979,7 @@
           <a:p>
             <a:fld id="{5BCAD085-E8A6-8845-BD4E-CB4CCA059FC4}" type="datetimeFigureOut">
               <a:rPr lang="en-US" smtClean="0"/>
-              <a:t>7/15/26</a:t>
+              <a:t>1/27/13</a:t>
             </a:fld>
             <a:endParaRPr lang="en-US"/>
           </a:p>
@@ -4150,7 +4074,7 @@
           <a:p>
             <a:fld id="{5BCAD085-E8A6-8845-BD4E-CB4CCA059FC4}" type="datetimeFigureOut">
               <a:rPr lang="en-US" smtClean="0"/>
-              <a:t>7/15/26</a:t>
+              <a:t>1/27/13</a:t>
             </a:fld>
             <a:endParaRPr lang="en-US"/>
           </a:p>
@@ -4253,9 +4177,10 @@
           </a:lstStyle>
           <a:p>
             <a:r>
-              <a:rPr lang="en-US"/>
+              <a:rPr lang="en-US" smtClean="0"/>
               <a:t>Click to edit Master title style</a:t>
             </a:r>
+            <a:endParaRPr lang="en-US"/>
           </a:p>
         </p:txBody>
       </p:sp>
@@ -4309,37 +4234,38 @@
           <a:p>
             <a:pPr lvl="0"/>
             <a:r>
-              <a:rPr lang="en-US"/>
+              <a:rPr lang="en-US" smtClean="0"/>
               <a:t>Click to edit Master text styles</a:t>
             </a:r>
           </a:p>
           <a:p>
             <a:pPr lvl="1"/>
             <a:r>
-              <a:rPr lang="en-US"/>
+              <a:rPr lang="en-US" smtClean="0"/>
               <a:t>Second level</a:t>
             </a:r>
           </a:p>
           <a:p>
             <a:pPr lvl="2"/>
             <a:r>
-              <a:rPr lang="en-US"/>
+              <a:rPr lang="en-US" smtClean="0"/>
               <a:t>Third level</a:t>
             </a:r>
           </a:p>
           <a:p>
             <a:pPr lvl="3"/>
             <a:r>
-              <a:rPr lang="en-US"/>
+              <a:rPr lang="en-US" smtClean="0"/>
               <a:t>Fourth level</a:t>
             </a:r>
           </a:p>
           <a:p>
             <a:pPr lvl="4"/>
             <a:r>
-              <a:rPr lang="en-US"/>
+              <a:rPr lang="en-US" smtClean="0"/>
               <a:t>Fifth level</a:t>
             </a:r>
+            <a:endParaRPr lang="en-US"/>
           </a:p>
         </p:txBody>
       </p:sp>
@@ -4402,7 +4328,7 @@
           <a:p>
             <a:pPr lvl="0"/>
             <a:r>
-              <a:rPr lang="en-US"/>
+              <a:rPr lang="en-US" smtClean="0"/>
               <a:t>Click to edit Master text styles</a:t>
             </a:r>
           </a:p>
@@ -4425,7 +4351,7 @@
           <a:p>
             <a:fld id="{5BCAD085-E8A6-8845-BD4E-CB4CCA059FC4}" type="datetimeFigureOut">
               <a:rPr lang="en-US" smtClean="0"/>
-              <a:t>7/15/26</a:t>
+              <a:t>1/27/13</a:t>
             </a:fld>
             <a:endParaRPr lang="en-US"/>
           </a:p>
@@ -4528,9 +4454,10 @@
           </a:lstStyle>
           <a:p>
             <a:r>
-              <a:rPr lang="en-US"/>
+              <a:rPr lang="en-US" smtClean="0"/>
               <a:t>Click to edit Master title style</a:t>
             </a:r>
+            <a:endParaRPr lang="en-US"/>
           </a:p>
         </p:txBody>
       </p:sp>
@@ -4654,7 +4581,7 @@
           <a:p>
             <a:pPr lvl="0"/>
             <a:r>
-              <a:rPr lang="en-US"/>
+              <a:rPr lang="en-US" smtClean="0"/>
               <a:t>Click to edit Master text styles</a:t>
             </a:r>
           </a:p>
@@ -4677,7 +4604,7 @@
           <a:p>
             <a:fld id="{5BCAD085-E8A6-8845-BD4E-CB4CCA059FC4}" type="datetimeFigureOut">
               <a:rPr lang="en-US" smtClean="0"/>
-              <a:t>7/15/26</a:t>
+              <a:t>1/27/13</a:t>
             </a:fld>
             <a:endParaRPr lang="en-US"/>
           </a:p>
@@ -4786,9 +4713,10 @@
           <a:lstStyle/>
           <a:p>
             <a:r>
-              <a:rPr lang="en-US"/>
+              <a:rPr lang="en-US" smtClean="0"/>
               <a:t>Click to edit Master title style</a:t>
             </a:r>
+            <a:endParaRPr lang="en-US"/>
           </a:p>
         </p:txBody>
       </p:sp>
@@ -4819,37 +4747,38 @@
           <a:p>
             <a:pPr lvl="0"/>
             <a:r>
-              <a:rPr lang="en-US"/>
+              <a:rPr lang="en-US" smtClean="0"/>
               <a:t>Click to edit Master text styles</a:t>
             </a:r>
           </a:p>
           <a:p>
             <a:pPr lvl="1"/>
             <a:r>
-              <a:rPr lang="en-US"/>
+              <a:rPr lang="en-US" smtClean="0"/>
               <a:t>Second level</a:t>
             </a:r>
           </a:p>
           <a:p>
             <a:pPr lvl="2"/>
             <a:r>
-              <a:rPr lang="en-US"/>
+              <a:rPr lang="en-US" smtClean="0"/>
               <a:t>Third level</a:t>
             </a:r>
           </a:p>
           <a:p>
             <a:pPr lvl="3"/>
             <a:r>
-              <a:rPr lang="en-US"/>
+              <a:rPr lang="en-US" smtClean="0"/>
               <a:t>Fourth level</a:t>
             </a:r>
           </a:p>
           <a:p>
             <a:pPr lvl="4"/>
             <a:r>
-              <a:rPr lang="en-US"/>
+              <a:rPr lang="en-US" smtClean="0"/>
               <a:t>Fifth level</a:t>
             </a:r>
+            <a:endParaRPr lang="en-US"/>
           </a:p>
         </p:txBody>
       </p:sp>
@@ -4888,7 +4817,7 @@
           <a:p>
             <a:fld id="{5BCAD085-E8A6-8845-BD4E-CB4CCA059FC4}" type="datetimeFigureOut">
               <a:rPr lang="en-US" smtClean="0"/>
-              <a:t>7/15/26</a:t>
+              <a:t>1/27/13</a:t>
             </a:fld>
             <a:endParaRPr lang="en-US"/>
           </a:p>
@@ -5247,7 +5176,7 @@
 </file>
 
 <file path=ppt/slides/slide1.xml><?xml version="1.0" encoding="utf-8"?>
-<p:sld xmlns:a="http://schemas.openxmlformats.org/drawingml/2006/main" xmlns:r="http://schemas.openxmlformats.org/officeDocument/2006/relationships" xmlns:p="http://schemas.openxmlformats.org/presentationml/2006/main">
+<p:sld xmlns:a="http://schemas.openxmlformats.org/drawingml/2006/main" xmlns:p="http://schemas.openxmlformats.org/presentationml/2006/main" xmlns:r="http://schemas.openxmlformats.org/officeDocument/2006/relationships">
   <p:cSld>
     <p:bg>
       <p:bgPr>
@@ -5263,14 +5192,7 @@
         <p:cNvGrpSpPr/>
         <p:nvPr/>
       </p:nvGrpSpPr>
-      <p:grpSpPr>
-        <a:xfrm>
-          <a:off x="0" y="0"/>
-          <a:ext cx="0" cy="0"/>
-          <a:chOff x="0" y="0"/>
-          <a:chExt cx="0" cy="0"/>
-        </a:xfrm>
-      </p:grpSpPr>
+      <p:grpSpPr/>
       <p:sp>
         <p:nvSpPr>
           <p:cNvPr id="2" name="Rectangle 1"/>
@@ -5312,7 +5234,6 @@
           <a:lstStyle/>
           <a:p>
             <a:pPr algn="ctr"/>
-            <a:endParaRPr/>
           </a:p>
         </p:txBody>
       </p:sp>
@@ -5333,7 +5254,7 @@
           <a:noFill/>
         </p:spPr>
         <p:txBody>
-          <a:bodyPr wrap="square" lIns="0" tIns="0" rIns="0" bIns="0" anchor="t">
+          <a:bodyPr wrap="square" anchor="t" lIns="0" rIns="0" tIns="0" bIns="0">
             <a:spAutoFit/>
           </a:bodyPr>
           <a:lstStyle/>
@@ -5399,7 +5320,7 @@
           <a:noFill/>
         </p:spPr>
         <p:txBody>
-          <a:bodyPr wrap="square" lIns="0" tIns="0" rIns="0" bIns="0" anchor="t">
+          <a:bodyPr wrap="square" anchor="t" lIns="0" rIns="0" tIns="0" bIns="0">
             <a:spAutoFit/>
           </a:bodyPr>
           <a:lstStyle/>
@@ -5434,7 +5355,7 @@
 </file>
 
 <file path=ppt/slides/slide10.xml><?xml version="1.0" encoding="utf-8"?>
-<p:sld xmlns:a="http://schemas.openxmlformats.org/drawingml/2006/main" xmlns:r="http://schemas.openxmlformats.org/officeDocument/2006/relationships" xmlns:p="http://schemas.openxmlformats.org/presentationml/2006/main">
+<p:sld xmlns:a="http://schemas.openxmlformats.org/drawingml/2006/main" xmlns:p="http://schemas.openxmlformats.org/presentationml/2006/main" xmlns:r="http://schemas.openxmlformats.org/officeDocument/2006/relationships">
   <p:cSld>
     <p:bg>
       <p:bgPr>
@@ -5450,14 +5371,7 @@
         <p:cNvGrpSpPr/>
         <p:nvPr/>
       </p:nvGrpSpPr>
-      <p:grpSpPr>
-        <a:xfrm>
-          <a:off x="0" y="0"/>
-          <a:ext cx="0" cy="0"/>
-          <a:chOff x="0" y="0"/>
-          <a:chExt cx="0" cy="0"/>
-        </a:xfrm>
-      </p:grpSpPr>
+      <p:grpSpPr/>
       <p:sp>
         <p:nvSpPr>
           <p:cNvPr id="2" name="TextBox 1"/>
@@ -5475,7 +5389,7 @@
           <a:noFill/>
         </p:spPr>
         <p:txBody>
-          <a:bodyPr wrap="square" lIns="0" tIns="0" rIns="0" bIns="0" anchor="t">
+          <a:bodyPr wrap="square" anchor="t" lIns="0" rIns="0" tIns="0" bIns="0">
             <a:spAutoFit/>
           </a:bodyPr>
           <a:lstStyle/>
@@ -5549,7 +5463,6 @@
           <a:lstStyle/>
           <a:p>
             <a:pPr algn="ctr"/>
-            <a:endParaRPr/>
           </a:p>
         </p:txBody>
       </p:sp>
@@ -5596,7 +5509,6 @@
           <a:lstStyle/>
           <a:p>
             <a:pPr algn="ctr"/>
-            <a:endParaRPr/>
           </a:p>
         </p:txBody>
       </p:sp>
@@ -5641,7 +5553,6 @@
           <a:lstStyle/>
           <a:p>
             <a:pPr algn="ctr"/>
-            <a:endParaRPr/>
           </a:p>
         </p:txBody>
       </p:sp>
@@ -5662,7 +5573,7 @@
           <a:noFill/>
         </p:spPr>
         <p:txBody>
-          <a:bodyPr wrap="square" lIns="0" tIns="0" rIns="0" bIns="0" anchor="ctr">
+          <a:bodyPr wrap="square" anchor="ctr" lIns="0" rIns="0" tIns="0" bIns="0">
             <a:spAutoFit/>
           </a:bodyPr>
           <a:lstStyle/>
@@ -5727,7 +5638,6 @@
           <a:lstStyle/>
           <a:p>
             <a:pPr algn="ctr"/>
-            <a:endParaRPr/>
           </a:p>
         </p:txBody>
       </p:sp>
@@ -5772,7 +5682,6 @@
           <a:lstStyle/>
           <a:p>
             <a:pPr algn="ctr"/>
-            <a:endParaRPr/>
           </a:p>
         </p:txBody>
       </p:sp>
@@ -5793,7 +5702,7 @@
           <a:noFill/>
         </p:spPr>
         <p:txBody>
-          <a:bodyPr wrap="square" lIns="0" tIns="0" rIns="0" bIns="0" anchor="ctr">
+          <a:bodyPr wrap="square" anchor="ctr" lIns="0" rIns="0" tIns="0" bIns="0">
             <a:spAutoFit/>
           </a:bodyPr>
           <a:lstStyle/>
@@ -5858,7 +5767,6 @@
           <a:lstStyle/>
           <a:p>
             <a:pPr algn="ctr"/>
-            <a:endParaRPr/>
           </a:p>
         </p:txBody>
       </p:sp>
@@ -5903,7 +5811,6 @@
           <a:lstStyle/>
           <a:p>
             <a:pPr algn="ctr"/>
-            <a:endParaRPr/>
           </a:p>
         </p:txBody>
       </p:sp>
@@ -5924,7 +5831,7 @@
           <a:noFill/>
         </p:spPr>
         <p:txBody>
-          <a:bodyPr wrap="square" lIns="0" tIns="0" rIns="0" bIns="0" anchor="ctr">
+          <a:bodyPr wrap="square" anchor="ctr" lIns="0" rIns="0" tIns="0" bIns="0">
             <a:spAutoFit/>
           </a:bodyPr>
           <a:lstStyle/>
@@ -5989,7 +5896,6 @@
           <a:lstStyle/>
           <a:p>
             <a:pPr algn="ctr"/>
-            <a:endParaRPr/>
           </a:p>
         </p:txBody>
       </p:sp>
@@ -6034,7 +5940,6 @@
           <a:lstStyle/>
           <a:p>
             <a:pPr algn="ctr"/>
-            <a:endParaRPr/>
           </a:p>
         </p:txBody>
       </p:sp>
@@ -6055,7 +5960,7 @@
           <a:noFill/>
         </p:spPr>
         <p:txBody>
-          <a:bodyPr wrap="square" lIns="0" tIns="0" rIns="0" bIns="0" anchor="ctr">
+          <a:bodyPr wrap="square" anchor="ctr" lIns="0" rIns="0" tIns="0" bIns="0">
             <a:spAutoFit/>
           </a:bodyPr>
           <a:lstStyle/>
@@ -6118,7 +6023,6 @@
           <a:lstStyle/>
           <a:p>
             <a:pPr algn="ctr"/>
-            <a:endParaRPr/>
           </a:p>
         </p:txBody>
       </p:sp>
@@ -6139,7 +6043,7 @@
           <a:noFill/>
         </p:spPr>
         <p:txBody>
-          <a:bodyPr wrap="square" lIns="0" tIns="0" rIns="0" bIns="0" anchor="t">
+          <a:bodyPr wrap="square" anchor="t" lIns="0" rIns="0" tIns="0" bIns="0">
             <a:spAutoFit/>
           </a:bodyPr>
           <a:lstStyle/>
@@ -6182,7 +6086,7 @@
           <a:noFill/>
         </p:spPr>
         <p:txBody>
-          <a:bodyPr wrap="square" lIns="0" tIns="0" rIns="0" bIns="0" anchor="t">
+          <a:bodyPr wrap="square" anchor="t" lIns="0" rIns="0" tIns="0" bIns="0">
             <a:spAutoFit/>
           </a:bodyPr>
           <a:lstStyle/>
@@ -6209,7 +6113,7 @@
 </file>
 
 <file path=ppt/slides/slide11.xml><?xml version="1.0" encoding="utf-8"?>
-<p:sld xmlns:a="http://schemas.openxmlformats.org/drawingml/2006/main" xmlns:r="http://schemas.openxmlformats.org/officeDocument/2006/relationships" xmlns:p="http://schemas.openxmlformats.org/presentationml/2006/main">
+<p:sld xmlns:a="http://schemas.openxmlformats.org/drawingml/2006/main" xmlns:p="http://schemas.openxmlformats.org/presentationml/2006/main" xmlns:r="http://schemas.openxmlformats.org/officeDocument/2006/relationships">
   <p:cSld>
     <p:bg>
       <p:bgPr>
@@ -6225,14 +6129,7 @@
         <p:cNvGrpSpPr/>
         <p:nvPr/>
       </p:nvGrpSpPr>
-      <p:grpSpPr>
-        <a:xfrm>
-          <a:off x="0" y="0"/>
-          <a:ext cx="0" cy="0"/>
-          <a:chOff x="0" y="0"/>
-          <a:chExt cx="0" cy="0"/>
-        </a:xfrm>
-      </p:grpSpPr>
+      <p:grpSpPr/>
       <p:sp>
         <p:nvSpPr>
           <p:cNvPr id="2" name="Rectangle 1"/>
@@ -6274,7 +6171,6 @@
           <a:lstStyle/>
           <a:p>
             <a:pPr algn="ctr"/>
-            <a:endParaRPr/>
           </a:p>
         </p:txBody>
       </p:sp>
@@ -6295,7 +6191,7 @@
           <a:noFill/>
         </p:spPr>
         <p:txBody>
-          <a:bodyPr wrap="square" lIns="0" tIns="0" rIns="0" bIns="0" anchor="t">
+          <a:bodyPr wrap="square" anchor="t" lIns="0" rIns="0" tIns="0" bIns="0">
             <a:spAutoFit/>
           </a:bodyPr>
           <a:lstStyle/>
@@ -6329,7 +6225,7 @@
           <a:noFill/>
         </p:spPr>
         <p:txBody>
-          <a:bodyPr wrap="square" lIns="0" tIns="0" rIns="0" bIns="0" anchor="t">
+          <a:bodyPr wrap="square" anchor="t" lIns="0" rIns="0" tIns="0" bIns="0">
             <a:spAutoFit/>
           </a:bodyPr>
           <a:lstStyle/>
@@ -6419,7 +6315,6 @@
           <a:lstStyle/>
           <a:p>
             <a:pPr algn="ctr"/>
-            <a:endParaRPr/>
           </a:p>
         </p:txBody>
       </p:sp>
@@ -6440,7 +6335,7 @@
           <a:noFill/>
         </p:spPr>
         <p:txBody>
-          <a:bodyPr wrap="square" lIns="0" tIns="0" rIns="0" bIns="0" anchor="t">
+          <a:bodyPr wrap="square" anchor="t" lIns="0" rIns="0" tIns="0" bIns="0">
             <a:spAutoFit/>
           </a:bodyPr>
           <a:lstStyle/>
@@ -6483,13 +6378,21 @@
           <a:noFill/>
         </p:spPr>
         <p:txBody>
-          <a:bodyPr wrap="square" lIns="0" tIns="0" rIns="0" bIns="0" anchor="t">
+          <a:bodyPr wrap="square" anchor="t" lIns="0" rIns="0" tIns="0" bIns="0">
             <a:spAutoFit/>
           </a:bodyPr>
           <a:lstStyle/>
           <a:p>
             <a:pPr algn="r"/>
-            <a:endParaRPr/>
+            <a:r>
+              <a:rPr sz="1100" b="0" i="0">
+                <a:solidFill>
+                  <a:srgbClr val="7A7A7A"/>
+                </a:solidFill>
+                <a:latin typeface="Roboto"/>
+              </a:rPr>
+              <a:t/>
+            </a:r>
           </a:p>
         </p:txBody>
       </p:sp>
@@ -6502,7 +6405,7 @@
 </file>
 
 <file path=ppt/slides/slide12.xml><?xml version="1.0" encoding="utf-8"?>
-<p:sld xmlns:a="http://schemas.openxmlformats.org/drawingml/2006/main" xmlns:r="http://schemas.openxmlformats.org/officeDocument/2006/relationships" xmlns:p="http://schemas.openxmlformats.org/presentationml/2006/main">
+<p:sld xmlns:a="http://schemas.openxmlformats.org/drawingml/2006/main" xmlns:p="http://schemas.openxmlformats.org/presentationml/2006/main" xmlns:r="http://schemas.openxmlformats.org/officeDocument/2006/relationships">
   <p:cSld>
     <p:bg>
       <p:bgPr>
@@ -6518,14 +6421,7 @@
         <p:cNvGrpSpPr/>
         <p:nvPr/>
       </p:nvGrpSpPr>
-      <p:grpSpPr>
-        <a:xfrm>
-          <a:off x="0" y="0"/>
-          <a:ext cx="0" cy="0"/>
-          <a:chOff x="0" y="0"/>
-          <a:chExt cx="0" cy="0"/>
-        </a:xfrm>
-      </p:grpSpPr>
+      <p:grpSpPr/>
       <p:sp>
         <p:nvSpPr>
           <p:cNvPr id="2" name="TextBox 1"/>
@@ -6543,7 +6439,7 @@
           <a:noFill/>
         </p:spPr>
         <p:txBody>
-          <a:bodyPr wrap="square" lIns="0" tIns="0" rIns="0" bIns="0" anchor="t">
+          <a:bodyPr wrap="square" anchor="t" lIns="0" rIns="0" tIns="0" bIns="0">
             <a:spAutoFit/>
           </a:bodyPr>
           <a:lstStyle/>
@@ -6601,7 +6497,6 @@
           <a:lstStyle/>
           <a:p>
             <a:pPr algn="ctr"/>
-            <a:endParaRPr/>
           </a:p>
         </p:txBody>
       </p:sp>
@@ -6613,8 +6508,8 @@
         </p:nvSpPr>
         <p:spPr>
           <a:xfrm>
-            <a:off x="658368" y="2684848"/>
-            <a:ext cx="10881360" cy="2494144"/>
+            <a:off x="658368" y="1691640"/>
+            <a:ext cx="10881360" cy="4480560"/>
           </a:xfrm>
           <a:prstGeom prst="rect">
             <a:avLst/>
@@ -6622,7 +6517,7 @@
           <a:noFill/>
         </p:spPr>
         <p:txBody>
-          <a:bodyPr wrap="square" lIns="0" tIns="0" rIns="0" bIns="0" anchor="ctr">
+          <a:bodyPr wrap="square" anchor="ctr" lIns="0" rIns="0" tIns="0" bIns="0">
             <a:spAutoFit/>
           </a:bodyPr>
           <a:lstStyle/>
@@ -6639,7 +6534,7 @@
               </a:spcAft>
             </a:pPr>
             <a:r>
-              <a:rPr sz="2800" b="1" i="0" dirty="0">
+              <a:rPr sz="2400" b="1" i="0">
                 <a:solidFill>
                   <a:srgbClr val="EDAB0C"/>
                 </a:solidFill>
@@ -6648,22 +6543,13 @@
               <a:t>■  </a:t>
             </a:r>
             <a:r>
-              <a:rPr sz="2800" b="0" i="0" dirty="0" err="1">
+              <a:rPr sz="2400" b="0" i="0">
                 <a:solidFill>
                   <a:srgbClr val="2A2929"/>
                 </a:solidFill>
                 <a:latin typeface="Roboto"/>
               </a:rPr>
-              <a:t>Summarise</a:t>
-            </a:r>
-            <a:r>
-              <a:rPr sz="2800" b="0" i="0" dirty="0">
-                <a:solidFill>
-                  <a:srgbClr val="2A2929"/>
-                </a:solidFill>
-                <a:latin typeface="Roboto"/>
-              </a:rPr>
-              <a:t> the current environment in your own words, focused on what's material to this decision.</a:t>
+              <a:t>Summarise the current environment in your own words, focused on what's material to this decision.</a:t>
             </a:r>
           </a:p>
           <a:p>
@@ -6679,7 +6565,7 @@
               </a:spcAft>
             </a:pPr>
             <a:r>
-              <a:rPr sz="2800" b="1" i="0" dirty="0">
+              <a:rPr sz="2400" b="1" i="0">
                 <a:solidFill>
                   <a:srgbClr val="EDAB0C"/>
                 </a:solidFill>
@@ -6688,7 +6574,7 @@
               <a:t>■  </a:t>
             </a:r>
             <a:r>
-              <a:rPr sz="2800" b="0" i="0" dirty="0">
+              <a:rPr sz="2400" b="0" i="0">
                 <a:solidFill>
                   <a:srgbClr val="2A2929"/>
                 </a:solidFill>
@@ -6710,7 +6596,7 @@
               </a:spcAft>
             </a:pPr>
             <a:r>
-              <a:rPr sz="2800" b="1" i="0" dirty="0">
+              <a:rPr sz="2400" b="1" i="0">
                 <a:solidFill>
                   <a:srgbClr val="EDAB0C"/>
                 </a:solidFill>
@@ -6719,7 +6605,7 @@
               <a:t>■  </a:t>
             </a:r>
             <a:r>
-              <a:rPr sz="2800" b="0" i="0" dirty="0">
+              <a:rPr sz="2400" b="0" i="0">
                 <a:solidFill>
                   <a:srgbClr val="2A2929"/>
                 </a:solidFill>
@@ -6771,7 +6657,6 @@
           <a:lstStyle/>
           <a:p>
             <a:pPr algn="ctr"/>
-            <a:endParaRPr/>
           </a:p>
         </p:txBody>
       </p:sp>
@@ -6792,7 +6677,7 @@
           <a:noFill/>
         </p:spPr>
         <p:txBody>
-          <a:bodyPr wrap="square" lIns="0" tIns="0" rIns="0" bIns="0" anchor="t">
+          <a:bodyPr wrap="square" anchor="t" lIns="0" rIns="0" tIns="0" bIns="0">
             <a:spAutoFit/>
           </a:bodyPr>
           <a:lstStyle/>
@@ -6835,7 +6720,7 @@
           <a:noFill/>
         </p:spPr>
         <p:txBody>
-          <a:bodyPr wrap="square" lIns="0" tIns="0" rIns="0" bIns="0" anchor="t">
+          <a:bodyPr wrap="square" anchor="t" lIns="0" rIns="0" tIns="0" bIns="0">
             <a:spAutoFit/>
           </a:bodyPr>
           <a:lstStyle/>
@@ -6862,7 +6747,7 @@
 </file>
 
 <file path=ppt/slides/slide13.xml><?xml version="1.0" encoding="utf-8"?>
-<p:sld xmlns:a="http://schemas.openxmlformats.org/drawingml/2006/main" xmlns:r="http://schemas.openxmlformats.org/officeDocument/2006/relationships" xmlns:p="http://schemas.openxmlformats.org/presentationml/2006/main">
+<p:sld xmlns:a="http://schemas.openxmlformats.org/drawingml/2006/main" xmlns:p="http://schemas.openxmlformats.org/presentationml/2006/main" xmlns:r="http://schemas.openxmlformats.org/officeDocument/2006/relationships">
   <p:cSld>
     <p:bg>
       <p:bgPr>
@@ -6878,14 +6763,7 @@
         <p:cNvGrpSpPr/>
         <p:nvPr/>
       </p:nvGrpSpPr>
-      <p:grpSpPr>
-        <a:xfrm>
-          <a:off x="0" y="0"/>
-          <a:ext cx="0" cy="0"/>
-          <a:chOff x="0" y="0"/>
-          <a:chExt cx="0" cy="0"/>
-        </a:xfrm>
-      </p:grpSpPr>
+      <p:grpSpPr/>
       <p:sp>
         <p:nvSpPr>
           <p:cNvPr id="2" name="TextBox 1"/>
@@ -6903,7 +6781,7 @@
           <a:noFill/>
         </p:spPr>
         <p:txBody>
-          <a:bodyPr wrap="square" lIns="0" tIns="0" rIns="0" bIns="0" anchor="t">
+          <a:bodyPr wrap="square" anchor="t" lIns="0" rIns="0" tIns="0" bIns="0">
             <a:spAutoFit/>
           </a:bodyPr>
           <a:lstStyle/>
@@ -6977,7 +6855,6 @@
           <a:lstStyle/>
           <a:p>
             <a:pPr algn="ctr"/>
-            <a:endParaRPr/>
           </a:p>
         </p:txBody>
       </p:sp>
@@ -6989,8 +6866,8 @@
         </p:nvSpPr>
         <p:spPr>
           <a:xfrm>
-            <a:off x="658368" y="2264669"/>
-            <a:ext cx="10881360" cy="3334503"/>
+            <a:off x="658368" y="1691640"/>
+            <a:ext cx="10881360" cy="4480560"/>
           </a:xfrm>
           <a:prstGeom prst="rect">
             <a:avLst/>
@@ -6998,7 +6875,7 @@
           <a:noFill/>
         </p:spPr>
         <p:txBody>
-          <a:bodyPr wrap="square" lIns="0" tIns="0" rIns="0" bIns="0" anchor="ctr">
+          <a:bodyPr wrap="square" anchor="ctr" lIns="0" rIns="0" tIns="0" bIns="0">
             <a:spAutoFit/>
           </a:bodyPr>
           <a:lstStyle/>
@@ -7015,7 +6892,7 @@
               </a:spcAft>
             </a:pPr>
             <a:r>
-              <a:rPr sz="2800" b="1" i="0" dirty="0">
+              <a:rPr sz="2400" b="1" i="0">
                 <a:solidFill>
                   <a:srgbClr val="EDAB0C"/>
                 </a:solidFill>
@@ -7024,7 +6901,7 @@
               <a:t>■  </a:t>
             </a:r>
             <a:r>
-              <a:rPr sz="2800" b="0" i="0" dirty="0">
+              <a:rPr sz="2400" b="0" i="0">
                 <a:solidFill>
                   <a:srgbClr val="2A2929"/>
                 </a:solidFill>
@@ -7046,7 +6923,7 @@
               </a:spcAft>
             </a:pPr>
             <a:r>
-              <a:rPr sz="2400" b="0" i="0" dirty="0">
+              <a:rPr sz="2100" b="0" i="0">
                 <a:solidFill>
                   <a:srgbClr val="7A7A7A"/>
                 </a:solidFill>
@@ -7055,7 +6932,7 @@
               <a:t>–  </a:t>
             </a:r>
             <a:r>
-              <a:rPr sz="2400" b="0" i="0" dirty="0">
+              <a:rPr sz="2100" b="0" i="0">
                 <a:solidFill>
                   <a:srgbClr val="2A2929"/>
                 </a:solidFill>
@@ -7077,7 +6954,7 @@
               </a:spcAft>
             </a:pPr>
             <a:r>
-              <a:rPr sz="2800" b="1" i="0" dirty="0">
+              <a:rPr sz="2400" b="1" i="0">
                 <a:solidFill>
                   <a:srgbClr val="EDAB0C"/>
                 </a:solidFill>
@@ -7086,7 +6963,7 @@
               <a:t>■  </a:t>
             </a:r>
             <a:r>
-              <a:rPr sz="2800" b="0" i="0" dirty="0">
+              <a:rPr sz="2400" b="0" i="0">
                 <a:solidFill>
                   <a:srgbClr val="2A2929"/>
                 </a:solidFill>
@@ -7108,7 +6985,7 @@
               </a:spcAft>
             </a:pPr>
             <a:r>
-              <a:rPr sz="2400" b="0" i="0" dirty="0">
+              <a:rPr sz="2100" b="0" i="0">
                 <a:solidFill>
                   <a:srgbClr val="7A7A7A"/>
                 </a:solidFill>
@@ -7117,7 +6994,7 @@
               <a:t>–  </a:t>
             </a:r>
             <a:r>
-              <a:rPr sz="2400" b="0" i="0" dirty="0">
+              <a:rPr sz="2100" b="0" i="0">
                 <a:solidFill>
                   <a:srgbClr val="2A2929"/>
                 </a:solidFill>
@@ -7139,7 +7016,7 @@
               </a:spcAft>
             </a:pPr>
             <a:r>
-              <a:rPr sz="2800" b="1" i="0" dirty="0">
+              <a:rPr sz="2400" b="1" i="0">
                 <a:solidFill>
                   <a:srgbClr val="EDAB0C"/>
                 </a:solidFill>
@@ -7148,7 +7025,7 @@
               <a:t>■  </a:t>
             </a:r>
             <a:r>
-              <a:rPr sz="2800" b="0" i="0" dirty="0">
+              <a:rPr sz="2400" b="0" i="0">
                 <a:solidFill>
                   <a:srgbClr val="2A2929"/>
                 </a:solidFill>
@@ -7200,7 +7077,6 @@
           <a:lstStyle/>
           <a:p>
             <a:pPr algn="ctr"/>
-            <a:endParaRPr/>
           </a:p>
         </p:txBody>
       </p:sp>
@@ -7221,7 +7097,7 @@
           <a:noFill/>
         </p:spPr>
         <p:txBody>
-          <a:bodyPr wrap="square" lIns="0" tIns="0" rIns="0" bIns="0" anchor="t">
+          <a:bodyPr wrap="square" anchor="t" lIns="0" rIns="0" tIns="0" bIns="0">
             <a:spAutoFit/>
           </a:bodyPr>
           <a:lstStyle/>
@@ -7264,7 +7140,7 @@
           <a:noFill/>
         </p:spPr>
         <p:txBody>
-          <a:bodyPr wrap="square" lIns="0" tIns="0" rIns="0" bIns="0" anchor="t">
+          <a:bodyPr wrap="square" anchor="t" lIns="0" rIns="0" tIns="0" bIns="0">
             <a:spAutoFit/>
           </a:bodyPr>
           <a:lstStyle/>
@@ -7291,7 +7167,7 @@
 </file>
 
 <file path=ppt/slides/slide14.xml><?xml version="1.0" encoding="utf-8"?>
-<p:sld xmlns:a="http://schemas.openxmlformats.org/drawingml/2006/main" xmlns:r="http://schemas.openxmlformats.org/officeDocument/2006/relationships" xmlns:p="http://schemas.openxmlformats.org/presentationml/2006/main">
+<p:sld xmlns:a="http://schemas.openxmlformats.org/drawingml/2006/main" xmlns:p="http://schemas.openxmlformats.org/presentationml/2006/main" xmlns:r="http://schemas.openxmlformats.org/officeDocument/2006/relationships">
   <p:cSld>
     <p:bg>
       <p:bgPr>
@@ -7307,14 +7183,7 @@
         <p:cNvGrpSpPr/>
         <p:nvPr/>
       </p:nvGrpSpPr>
-      <p:grpSpPr>
-        <a:xfrm>
-          <a:off x="0" y="0"/>
-          <a:ext cx="0" cy="0"/>
-          <a:chOff x="0" y="0"/>
-          <a:chExt cx="0" cy="0"/>
-        </a:xfrm>
-      </p:grpSpPr>
+      <p:grpSpPr/>
       <p:sp>
         <p:nvSpPr>
           <p:cNvPr id="2" name="TextBox 1"/>
@@ -7332,7 +7201,7 @@
           <a:noFill/>
         </p:spPr>
         <p:txBody>
-          <a:bodyPr wrap="square" lIns="0" tIns="0" rIns="0" bIns="0" anchor="t">
+          <a:bodyPr wrap="square" anchor="t" lIns="0" rIns="0" tIns="0" bIns="0">
             <a:spAutoFit/>
           </a:bodyPr>
           <a:lstStyle/>
@@ -7390,7 +7259,6 @@
           <a:lstStyle/>
           <a:p>
             <a:pPr algn="ctr"/>
-            <a:endParaRPr/>
           </a:p>
         </p:txBody>
       </p:sp>
@@ -7402,8 +7270,8 @@
         </p:nvSpPr>
         <p:spPr>
           <a:xfrm>
-            <a:off x="658368" y="2168296"/>
-            <a:ext cx="10881360" cy="3527248"/>
+            <a:off x="658368" y="1691640"/>
+            <a:ext cx="10881360" cy="4480560"/>
           </a:xfrm>
           <a:prstGeom prst="rect">
             <a:avLst/>
@@ -7411,7 +7279,7 @@
           <a:noFill/>
         </p:spPr>
         <p:txBody>
-          <a:bodyPr wrap="square" lIns="0" tIns="0" rIns="0" bIns="0" anchor="ctr">
+          <a:bodyPr wrap="square" anchor="ctr" lIns="0" rIns="0" tIns="0" bIns="0">
             <a:spAutoFit/>
           </a:bodyPr>
           <a:lstStyle/>
@@ -7428,7 +7296,7 @@
               </a:spcAft>
             </a:pPr>
             <a:r>
-              <a:rPr sz="2800" b="1" i="0" dirty="0">
+              <a:rPr sz="2400" b="1" i="0">
                 <a:solidFill>
                   <a:srgbClr val="EDAB0C"/>
                 </a:solidFill>
@@ -7437,7 +7305,7 @@
               <a:t>■  </a:t>
             </a:r>
             <a:r>
-              <a:rPr sz="2800" b="0" i="0" dirty="0">
+              <a:rPr sz="2400" b="0" i="0">
                 <a:solidFill>
                   <a:srgbClr val="2A2929"/>
                 </a:solidFill>
@@ -7459,7 +7327,7 @@
               </a:spcAft>
             </a:pPr>
             <a:r>
-              <a:rPr sz="2800" b="1" i="0" dirty="0">
+              <a:rPr sz="2400" b="1" i="0">
                 <a:solidFill>
                   <a:srgbClr val="EDAB0C"/>
                 </a:solidFill>
@@ -7468,7 +7336,7 @@
               <a:t>■  </a:t>
             </a:r>
             <a:r>
-              <a:rPr sz="2800" b="0" i="0" dirty="0">
+              <a:rPr sz="2400" b="0" i="0">
                 <a:solidFill>
                   <a:srgbClr val="2A2929"/>
                 </a:solidFill>
@@ -7490,7 +7358,7 @@
               </a:spcAft>
             </a:pPr>
             <a:r>
-              <a:rPr sz="2800" b="1" i="0" dirty="0">
+              <a:rPr sz="2400" b="1" i="0">
                 <a:solidFill>
                   <a:srgbClr val="EDAB0C"/>
                 </a:solidFill>
@@ -7499,7 +7367,7 @@
               <a:t>■  </a:t>
             </a:r>
             <a:r>
-              <a:rPr sz="2800" b="0" i="0" dirty="0">
+              <a:rPr sz="2400" b="0" i="0">
                 <a:solidFill>
                   <a:srgbClr val="2A2929"/>
                 </a:solidFill>
@@ -7521,7 +7389,7 @@
               </a:spcAft>
             </a:pPr>
             <a:r>
-              <a:rPr sz="2800" b="1" i="0" dirty="0">
+              <a:rPr sz="2400" b="1" i="0">
                 <a:solidFill>
                   <a:srgbClr val="EDAB0C"/>
                 </a:solidFill>
@@ -7530,7 +7398,7 @@
               <a:t>■  </a:t>
             </a:r>
             <a:r>
-              <a:rPr sz="2800" b="0" i="0" dirty="0">
+              <a:rPr sz="2400" b="0" i="0">
                 <a:solidFill>
                   <a:srgbClr val="2A2929"/>
                 </a:solidFill>
@@ -7582,7 +7450,6 @@
           <a:lstStyle/>
           <a:p>
             <a:pPr algn="ctr"/>
-            <a:endParaRPr/>
           </a:p>
         </p:txBody>
       </p:sp>
@@ -7603,7 +7470,7 @@
           <a:noFill/>
         </p:spPr>
         <p:txBody>
-          <a:bodyPr wrap="square" lIns="0" tIns="0" rIns="0" bIns="0" anchor="t">
+          <a:bodyPr wrap="square" anchor="t" lIns="0" rIns="0" tIns="0" bIns="0">
             <a:spAutoFit/>
           </a:bodyPr>
           <a:lstStyle/>
@@ -7646,7 +7513,7 @@
           <a:noFill/>
         </p:spPr>
         <p:txBody>
-          <a:bodyPr wrap="square" lIns="0" tIns="0" rIns="0" bIns="0" anchor="t">
+          <a:bodyPr wrap="square" anchor="t" lIns="0" rIns="0" tIns="0" bIns="0">
             <a:spAutoFit/>
           </a:bodyPr>
           <a:lstStyle/>
@@ -7673,7 +7540,7 @@
 </file>
 
 <file path=ppt/slides/slide15.xml><?xml version="1.0" encoding="utf-8"?>
-<p:sld xmlns:a="http://schemas.openxmlformats.org/drawingml/2006/main" xmlns:r="http://schemas.openxmlformats.org/officeDocument/2006/relationships" xmlns:p="http://schemas.openxmlformats.org/presentationml/2006/main">
+<p:sld xmlns:a="http://schemas.openxmlformats.org/drawingml/2006/main" xmlns:p="http://schemas.openxmlformats.org/presentationml/2006/main" xmlns:r="http://schemas.openxmlformats.org/officeDocument/2006/relationships">
   <p:cSld>
     <p:bg>
       <p:bgPr>
@@ -7689,14 +7556,7 @@
         <p:cNvGrpSpPr/>
         <p:nvPr/>
       </p:nvGrpSpPr>
-      <p:grpSpPr>
-        <a:xfrm>
-          <a:off x="0" y="0"/>
-          <a:ext cx="0" cy="0"/>
-          <a:chOff x="0" y="0"/>
-          <a:chExt cx="0" cy="0"/>
-        </a:xfrm>
-      </p:grpSpPr>
+      <p:grpSpPr/>
       <p:sp>
         <p:nvSpPr>
           <p:cNvPr id="2" name="Rectangle 1"/>
@@ -7738,7 +7598,6 @@
           <a:lstStyle/>
           <a:p>
             <a:pPr algn="ctr"/>
-            <a:endParaRPr/>
           </a:p>
         </p:txBody>
       </p:sp>
@@ -7812,7 +7671,7 @@
           <a:noFill/>
         </p:spPr>
         <p:txBody>
-          <a:bodyPr wrap="square" lIns="0" tIns="0" rIns="0" bIns="0" anchor="ctr">
+          <a:bodyPr wrap="square" anchor="ctr" lIns="0" rIns="0" tIns="0" bIns="0">
             <a:spAutoFit/>
           </a:bodyPr>
           <a:lstStyle/>
@@ -7838,7 +7697,7 @@
         <p:spPr>
           <a:xfrm>
             <a:off x="658368" y="1554480"/>
-            <a:ext cx="10881360" cy="2991909"/>
+            <a:ext cx="10881360" cy="4297680"/>
           </a:xfrm>
           <a:prstGeom prst="rect">
             <a:avLst/>
@@ -7846,7 +7705,7 @@
           <a:noFill/>
         </p:spPr>
         <p:txBody>
-          <a:bodyPr wrap="square" lIns="0" tIns="0" rIns="0" bIns="0" anchor="t">
+          <a:bodyPr wrap="square" anchor="t" lIns="0" rIns="0" tIns="0" bIns="0">
             <a:spAutoFit/>
           </a:bodyPr>
           <a:lstStyle/>
@@ -7863,7 +7722,7 @@
               </a:spcAft>
             </a:pPr>
             <a:r>
-              <a:rPr b="1" i="0" dirty="0">
+              <a:rPr sz="1700" b="1" i="0">
                 <a:solidFill>
                   <a:srgbClr val="EDAB0C"/>
                 </a:solidFill>
@@ -7872,7 +7731,7 @@
               <a:t>■  </a:t>
             </a:r>
             <a:r>
-              <a:rPr b="0" i="0" dirty="0">
+              <a:rPr sz="1700" b="0" i="0">
                 <a:solidFill>
                   <a:srgbClr val="2A2929"/>
                 </a:solidFill>
@@ -7894,7 +7753,7 @@
               </a:spcAft>
             </a:pPr>
             <a:r>
-              <a:rPr b="1" i="0" dirty="0">
+              <a:rPr sz="1700" b="1" i="0">
                 <a:solidFill>
                   <a:srgbClr val="EDAB0C"/>
                 </a:solidFill>
@@ -7903,7 +7762,7 @@
               <a:t>■  </a:t>
             </a:r>
             <a:r>
-              <a:rPr b="0" i="0" dirty="0">
+              <a:rPr sz="1700" b="0" i="0">
                 <a:solidFill>
                   <a:srgbClr val="2A2929"/>
                 </a:solidFill>
@@ -7925,7 +7784,7 @@
               </a:spcAft>
             </a:pPr>
             <a:r>
-              <a:rPr sz="1600" b="0" i="0" dirty="0">
+              <a:rPr sz="1400" b="0" i="0">
                 <a:solidFill>
                   <a:srgbClr val="7A7A7A"/>
                 </a:solidFill>
@@ -7934,7 +7793,7 @@
               <a:t>–  </a:t>
             </a:r>
             <a:r>
-              <a:rPr sz="1600" b="0" i="0" dirty="0">
+              <a:rPr sz="1400" b="0" i="0">
                 <a:solidFill>
                   <a:srgbClr val="2A2929"/>
                 </a:solidFill>
@@ -7956,7 +7815,7 @@
               </a:spcAft>
             </a:pPr>
             <a:r>
-              <a:rPr sz="1600" b="0" i="0" dirty="0">
+              <a:rPr sz="1400" b="0" i="0">
                 <a:solidFill>
                   <a:srgbClr val="7A7A7A"/>
                 </a:solidFill>
@@ -7965,7 +7824,7 @@
               <a:t>–  </a:t>
             </a:r>
             <a:r>
-              <a:rPr sz="1600" b="0" i="0" dirty="0">
+              <a:rPr sz="1400" b="0" i="0">
                 <a:solidFill>
                   <a:srgbClr val="2A2929"/>
                 </a:solidFill>
@@ -7987,7 +7846,7 @@
               </a:spcAft>
             </a:pPr>
             <a:r>
-              <a:rPr b="1" i="0" dirty="0">
+              <a:rPr sz="1700" b="1" i="0">
                 <a:solidFill>
                   <a:srgbClr val="EDAB0C"/>
                 </a:solidFill>
@@ -7996,7 +7855,7 @@
               <a:t>■  </a:t>
             </a:r>
             <a:r>
-              <a:rPr b="0" i="0" dirty="0">
+              <a:rPr sz="1700" b="0" i="0">
                 <a:solidFill>
                   <a:srgbClr val="2A2929"/>
                 </a:solidFill>
@@ -8018,7 +7877,7 @@
               </a:spcAft>
             </a:pPr>
             <a:r>
-              <a:rPr b="1" i="0" dirty="0">
+              <a:rPr sz="1700" b="1" i="0">
                 <a:solidFill>
                   <a:srgbClr val="EDAB0C"/>
                 </a:solidFill>
@@ -8027,31 +7886,13 @@
               <a:t>■  </a:t>
             </a:r>
             <a:r>
-              <a:rPr b="0" i="0" dirty="0">
+              <a:rPr sz="1700" b="0" i="0">
                 <a:solidFill>
                   <a:srgbClr val="2A2929"/>
                 </a:solidFill>
                 <a:latin typeface="Roboto"/>
               </a:rPr>
-              <a:t>⚠  Material only — </a:t>
-            </a:r>
-            <a:r>
-              <a:rPr b="0" i="0" dirty="0" err="1">
-                <a:solidFill>
-                  <a:srgbClr val="2A2929"/>
-                </a:solidFill>
-                <a:latin typeface="Roboto"/>
-              </a:rPr>
-              <a:t>synthesise</a:t>
-            </a:r>
-            <a:r>
-              <a:rPr b="0" i="0" dirty="0">
-                <a:solidFill>
-                  <a:srgbClr val="2A2929"/>
-                </a:solidFill>
-                <a:latin typeface="Roboto"/>
-              </a:rPr>
-              <a:t> in your own words, no verbatim copying.</a:t>
+              <a:t>⚠  Material only — synthesise in your own words, no verbatim copying.</a:t>
             </a:r>
           </a:p>
         </p:txBody>
@@ -8099,7 +7940,6 @@
           <a:lstStyle/>
           <a:p>
             <a:pPr algn="ctr"/>
-            <a:endParaRPr/>
           </a:p>
         </p:txBody>
       </p:sp>
@@ -8120,7 +7960,7 @@
           <a:noFill/>
         </p:spPr>
         <p:txBody>
-          <a:bodyPr wrap="square" lIns="0" tIns="0" rIns="0" bIns="0" anchor="ctr">
+          <a:bodyPr wrap="square" anchor="ctr" lIns="0" rIns="0" tIns="0" bIns="0">
             <a:spAutoFit/>
           </a:bodyPr>
           <a:lstStyle/>
@@ -8178,7 +8018,6 @@
           <a:lstStyle/>
           <a:p>
             <a:pPr algn="ctr"/>
-            <a:endParaRPr/>
           </a:p>
         </p:txBody>
       </p:sp>
@@ -8199,7 +8038,7 @@
           <a:noFill/>
         </p:spPr>
         <p:txBody>
-          <a:bodyPr wrap="square" lIns="0" tIns="0" rIns="0" bIns="0" anchor="t">
+          <a:bodyPr wrap="square" anchor="t" lIns="0" rIns="0" tIns="0" bIns="0">
             <a:spAutoFit/>
           </a:bodyPr>
           <a:lstStyle/>
@@ -8242,7 +8081,7 @@
           <a:noFill/>
         </p:spPr>
         <p:txBody>
-          <a:bodyPr wrap="square" lIns="0" tIns="0" rIns="0" bIns="0" anchor="t">
+          <a:bodyPr wrap="square" anchor="t" lIns="0" rIns="0" tIns="0" bIns="0">
             <a:spAutoFit/>
           </a:bodyPr>
           <a:lstStyle/>
@@ -8269,7 +8108,7 @@
 </file>
 
 <file path=ppt/slides/slide16.xml><?xml version="1.0" encoding="utf-8"?>
-<p:sld xmlns:a="http://schemas.openxmlformats.org/drawingml/2006/main" xmlns:r="http://schemas.openxmlformats.org/officeDocument/2006/relationships" xmlns:p="http://schemas.openxmlformats.org/presentationml/2006/main">
+<p:sld xmlns:a="http://schemas.openxmlformats.org/drawingml/2006/main" xmlns:p="http://schemas.openxmlformats.org/presentationml/2006/main" xmlns:r="http://schemas.openxmlformats.org/officeDocument/2006/relationships">
   <p:cSld>
     <p:bg>
       <p:bgPr>
@@ -8285,14 +8124,7 @@
         <p:cNvGrpSpPr/>
         <p:nvPr/>
       </p:nvGrpSpPr>
-      <p:grpSpPr>
-        <a:xfrm>
-          <a:off x="0" y="0"/>
-          <a:ext cx="0" cy="0"/>
-          <a:chOff x="0" y="0"/>
-          <a:chExt cx="0" cy="0"/>
-        </a:xfrm>
-      </p:grpSpPr>
+      <p:grpSpPr/>
       <p:sp>
         <p:nvSpPr>
           <p:cNvPr id="2" name="TextBox 1"/>
@@ -8310,7 +8142,7 @@
           <a:noFill/>
         </p:spPr>
         <p:txBody>
-          <a:bodyPr wrap="square" lIns="0" tIns="0" rIns="0" bIns="0" anchor="t">
+          <a:bodyPr wrap="square" anchor="t" lIns="0" rIns="0" tIns="0" bIns="0">
             <a:spAutoFit/>
           </a:bodyPr>
           <a:lstStyle/>
@@ -8384,7 +8216,6 @@
           <a:lstStyle/>
           <a:p>
             <a:pPr algn="ctr"/>
-            <a:endParaRPr/>
           </a:p>
         </p:txBody>
       </p:sp>
@@ -8431,7 +8262,6 @@
           <a:lstStyle/>
           <a:p>
             <a:pPr algn="ctr"/>
-            <a:endParaRPr/>
           </a:p>
         </p:txBody>
       </p:sp>
@@ -8476,7 +8306,6 @@
           <a:lstStyle/>
           <a:p>
             <a:pPr algn="ctr"/>
-            <a:endParaRPr/>
           </a:p>
         </p:txBody>
       </p:sp>
@@ -8497,7 +8326,7 @@
           <a:noFill/>
         </p:spPr>
         <p:txBody>
-          <a:bodyPr wrap="square" lIns="0" tIns="0" rIns="0" bIns="0" anchor="ctr">
+          <a:bodyPr wrap="square" anchor="ctr" lIns="0" rIns="0" tIns="0" bIns="0">
             <a:spAutoFit/>
           </a:bodyPr>
           <a:lstStyle/>
@@ -8562,7 +8391,6 @@
           <a:lstStyle/>
           <a:p>
             <a:pPr algn="ctr"/>
-            <a:endParaRPr/>
           </a:p>
         </p:txBody>
       </p:sp>
@@ -8607,7 +8435,6 @@
           <a:lstStyle/>
           <a:p>
             <a:pPr algn="ctr"/>
-            <a:endParaRPr/>
           </a:p>
         </p:txBody>
       </p:sp>
@@ -8628,7 +8455,7 @@
           <a:noFill/>
         </p:spPr>
         <p:txBody>
-          <a:bodyPr wrap="square" lIns="0" tIns="0" rIns="0" bIns="0" anchor="ctr">
+          <a:bodyPr wrap="square" anchor="ctr" lIns="0" rIns="0" tIns="0" bIns="0">
             <a:spAutoFit/>
           </a:bodyPr>
           <a:lstStyle/>
@@ -8693,7 +8520,6 @@
           <a:lstStyle/>
           <a:p>
             <a:pPr algn="ctr"/>
-            <a:endParaRPr/>
           </a:p>
         </p:txBody>
       </p:sp>
@@ -8738,7 +8564,6 @@
           <a:lstStyle/>
           <a:p>
             <a:pPr algn="ctr"/>
-            <a:endParaRPr/>
           </a:p>
         </p:txBody>
       </p:sp>
@@ -8759,7 +8584,7 @@
           <a:noFill/>
         </p:spPr>
         <p:txBody>
-          <a:bodyPr wrap="square" lIns="0" tIns="0" rIns="0" bIns="0" anchor="ctr">
+          <a:bodyPr wrap="square" anchor="ctr" lIns="0" rIns="0" tIns="0" bIns="0">
             <a:spAutoFit/>
           </a:bodyPr>
           <a:lstStyle/>
@@ -8822,7 +8647,6 @@
           <a:lstStyle/>
           <a:p>
             <a:pPr algn="ctr"/>
-            <a:endParaRPr/>
           </a:p>
         </p:txBody>
       </p:sp>
@@ -8843,7 +8667,7 @@
           <a:noFill/>
         </p:spPr>
         <p:txBody>
-          <a:bodyPr wrap="square" lIns="0" tIns="0" rIns="0" bIns="0" anchor="t">
+          <a:bodyPr wrap="square" anchor="t" lIns="0" rIns="0" tIns="0" bIns="0">
             <a:spAutoFit/>
           </a:bodyPr>
           <a:lstStyle/>
@@ -8886,7 +8710,7 @@
           <a:noFill/>
         </p:spPr>
         <p:txBody>
-          <a:bodyPr wrap="square" lIns="0" tIns="0" rIns="0" bIns="0" anchor="t">
+          <a:bodyPr wrap="square" anchor="t" lIns="0" rIns="0" tIns="0" bIns="0">
             <a:spAutoFit/>
           </a:bodyPr>
           <a:lstStyle/>
@@ -8913,7 +8737,7 @@
 </file>
 
 <file path=ppt/slides/slide17.xml><?xml version="1.0" encoding="utf-8"?>
-<p:sld xmlns:a="http://schemas.openxmlformats.org/drawingml/2006/main" xmlns:r="http://schemas.openxmlformats.org/officeDocument/2006/relationships" xmlns:p="http://schemas.openxmlformats.org/presentationml/2006/main">
+<p:sld xmlns:a="http://schemas.openxmlformats.org/drawingml/2006/main" xmlns:p="http://schemas.openxmlformats.org/presentationml/2006/main" xmlns:r="http://schemas.openxmlformats.org/officeDocument/2006/relationships">
   <p:cSld>
     <p:bg>
       <p:bgPr>
@@ -8929,14 +8753,7 @@
         <p:cNvGrpSpPr/>
         <p:nvPr/>
       </p:nvGrpSpPr>
-      <p:grpSpPr>
-        <a:xfrm>
-          <a:off x="0" y="0"/>
-          <a:ext cx="0" cy="0"/>
-          <a:chOff x="0" y="0"/>
-          <a:chExt cx="0" cy="0"/>
-        </a:xfrm>
-      </p:grpSpPr>
+      <p:grpSpPr/>
       <p:sp>
         <p:nvSpPr>
           <p:cNvPr id="2" name="Rectangle 1"/>
@@ -8978,7 +8795,6 @@
           <a:lstStyle/>
           <a:p>
             <a:pPr algn="ctr"/>
-            <a:endParaRPr/>
           </a:p>
         </p:txBody>
       </p:sp>
@@ -8999,7 +8815,7 @@
           <a:noFill/>
         </p:spPr>
         <p:txBody>
-          <a:bodyPr wrap="square" lIns="0" tIns="0" rIns="0" bIns="0" anchor="t">
+          <a:bodyPr wrap="square" anchor="t" lIns="0" rIns="0" tIns="0" bIns="0">
             <a:spAutoFit/>
           </a:bodyPr>
           <a:lstStyle/>
@@ -9033,7 +8849,7 @@
           <a:noFill/>
         </p:spPr>
         <p:txBody>
-          <a:bodyPr wrap="square" lIns="0" tIns="0" rIns="0" bIns="0" anchor="t">
+          <a:bodyPr wrap="square" anchor="t" lIns="0" rIns="0" tIns="0" bIns="0">
             <a:spAutoFit/>
           </a:bodyPr>
           <a:lstStyle/>
@@ -9123,7 +8939,6 @@
           <a:lstStyle/>
           <a:p>
             <a:pPr algn="ctr"/>
-            <a:endParaRPr/>
           </a:p>
         </p:txBody>
       </p:sp>
@@ -9144,7 +8959,7 @@
           <a:noFill/>
         </p:spPr>
         <p:txBody>
-          <a:bodyPr wrap="square" lIns="0" tIns="0" rIns="0" bIns="0" anchor="t">
+          <a:bodyPr wrap="square" anchor="t" lIns="0" rIns="0" tIns="0" bIns="0">
             <a:spAutoFit/>
           </a:bodyPr>
           <a:lstStyle/>
@@ -9187,13 +9002,21 @@
           <a:noFill/>
         </p:spPr>
         <p:txBody>
-          <a:bodyPr wrap="square" lIns="0" tIns="0" rIns="0" bIns="0" anchor="t">
+          <a:bodyPr wrap="square" anchor="t" lIns="0" rIns="0" tIns="0" bIns="0">
             <a:spAutoFit/>
           </a:bodyPr>
           <a:lstStyle/>
           <a:p>
             <a:pPr algn="r"/>
-            <a:endParaRPr/>
+            <a:r>
+              <a:rPr sz="1100" b="0" i="0">
+                <a:solidFill>
+                  <a:srgbClr val="7A7A7A"/>
+                </a:solidFill>
+                <a:latin typeface="Roboto"/>
+              </a:rPr>
+              <a:t/>
+            </a:r>
           </a:p>
         </p:txBody>
       </p:sp>
@@ -9206,7 +9029,7 @@
 </file>
 
 <file path=ppt/slides/slide18.xml><?xml version="1.0" encoding="utf-8"?>
-<p:sld xmlns:a="http://schemas.openxmlformats.org/drawingml/2006/main" xmlns:r="http://schemas.openxmlformats.org/officeDocument/2006/relationships" xmlns:p="http://schemas.openxmlformats.org/presentationml/2006/main">
+<p:sld xmlns:a="http://schemas.openxmlformats.org/drawingml/2006/main" xmlns:p="http://schemas.openxmlformats.org/presentationml/2006/main" xmlns:r="http://schemas.openxmlformats.org/officeDocument/2006/relationships">
   <p:cSld>
     <p:bg>
       <p:bgPr>
@@ -9222,14 +9045,7 @@
         <p:cNvGrpSpPr/>
         <p:nvPr/>
       </p:nvGrpSpPr>
-      <p:grpSpPr>
-        <a:xfrm>
-          <a:off x="0" y="0"/>
-          <a:ext cx="0" cy="0"/>
-          <a:chOff x="0" y="0"/>
-          <a:chExt cx="0" cy="0"/>
-        </a:xfrm>
-      </p:grpSpPr>
+      <p:grpSpPr/>
       <p:sp>
         <p:nvSpPr>
           <p:cNvPr id="2" name="TextBox 1"/>
@@ -9247,7 +9063,7 @@
           <a:noFill/>
         </p:spPr>
         <p:txBody>
-          <a:bodyPr wrap="square" lIns="0" tIns="0" rIns="0" bIns="0" anchor="t">
+          <a:bodyPr wrap="square" anchor="t" lIns="0" rIns="0" tIns="0" bIns="0">
             <a:spAutoFit/>
           </a:bodyPr>
           <a:lstStyle/>
@@ -9305,7 +9121,6 @@
           <a:lstStyle/>
           <a:p>
             <a:pPr algn="ctr"/>
-            <a:endParaRPr/>
           </a:p>
         </p:txBody>
       </p:sp>
@@ -9317,8 +9132,8 @@
         </p:nvSpPr>
         <p:spPr>
           <a:xfrm>
-            <a:off x="658368" y="2620727"/>
-            <a:ext cx="10881360" cy="2622385"/>
+            <a:off x="658368" y="1691640"/>
+            <a:ext cx="10881360" cy="4480560"/>
           </a:xfrm>
           <a:prstGeom prst="rect">
             <a:avLst/>
@@ -9326,7 +9141,7 @@
           <a:noFill/>
         </p:spPr>
         <p:txBody>
-          <a:bodyPr wrap="square" lIns="0" tIns="0" rIns="0" bIns="0" anchor="ctr">
+          <a:bodyPr wrap="square" anchor="ctr" lIns="0" rIns="0" tIns="0" bIns="0">
             <a:spAutoFit/>
           </a:bodyPr>
           <a:lstStyle/>
@@ -9343,7 +9158,7 @@
               </a:spcAft>
             </a:pPr>
             <a:r>
-              <a:rPr sz="2800" b="1" i="0" dirty="0">
+              <a:rPr sz="2400" b="1" i="0">
                 <a:solidFill>
                   <a:srgbClr val="EDAB0C"/>
                 </a:solidFill>
@@ -9352,7 +9167,7 @@
               <a:t>■  </a:t>
             </a:r>
             <a:r>
-              <a:rPr sz="2800" b="0" i="0" dirty="0">
+              <a:rPr sz="2400" b="0" i="0">
                 <a:solidFill>
                   <a:srgbClr val="2A2929"/>
                 </a:solidFill>
@@ -9374,7 +9189,7 @@
               </a:spcAft>
             </a:pPr>
             <a:r>
-              <a:rPr sz="2800" b="1" i="0" dirty="0">
+              <a:rPr sz="2400" b="1" i="0">
                 <a:solidFill>
                   <a:srgbClr val="EDAB0C"/>
                 </a:solidFill>
@@ -9383,7 +9198,7 @@
               <a:t>■  </a:t>
             </a:r>
             <a:r>
-              <a:rPr sz="2800" b="0" i="0" dirty="0">
+              <a:rPr sz="2400" b="0" i="0">
                 <a:solidFill>
                   <a:srgbClr val="2A2929"/>
                 </a:solidFill>
@@ -9405,7 +9220,7 @@
               </a:spcAft>
             </a:pPr>
             <a:r>
-              <a:rPr sz="2800" b="1" i="0" dirty="0">
+              <a:rPr sz="2400" b="1" i="0">
                 <a:solidFill>
                   <a:srgbClr val="EDAB0C"/>
                 </a:solidFill>
@@ -9414,7 +9229,7 @@
               <a:t>■  </a:t>
             </a:r>
             <a:r>
-              <a:rPr sz="2800" b="0" i="0" dirty="0">
+              <a:rPr sz="2400" b="0" i="0">
                 <a:solidFill>
                   <a:srgbClr val="2A2929"/>
                 </a:solidFill>
@@ -9436,7 +9251,7 @@
               </a:spcAft>
             </a:pPr>
             <a:r>
-              <a:rPr sz="2800" b="1" i="0" dirty="0">
+              <a:rPr sz="2400" b="1" i="0">
                 <a:solidFill>
                   <a:srgbClr val="EDAB0C"/>
                 </a:solidFill>
@@ -9445,7 +9260,7 @@
               <a:t>■  </a:t>
             </a:r>
             <a:r>
-              <a:rPr sz="2800" b="0" i="0" dirty="0">
+              <a:rPr sz="2400" b="0" i="0">
                 <a:solidFill>
                   <a:srgbClr val="2A2929"/>
                 </a:solidFill>
@@ -9497,7 +9312,6 @@
           <a:lstStyle/>
           <a:p>
             <a:pPr algn="ctr"/>
-            <a:endParaRPr/>
           </a:p>
         </p:txBody>
       </p:sp>
@@ -9518,7 +9332,7 @@
           <a:noFill/>
         </p:spPr>
         <p:txBody>
-          <a:bodyPr wrap="square" lIns="0" tIns="0" rIns="0" bIns="0" anchor="t">
+          <a:bodyPr wrap="square" anchor="t" lIns="0" rIns="0" tIns="0" bIns="0">
             <a:spAutoFit/>
           </a:bodyPr>
           <a:lstStyle/>
@@ -9561,7 +9375,7 @@
           <a:noFill/>
         </p:spPr>
         <p:txBody>
-          <a:bodyPr wrap="square" lIns="0" tIns="0" rIns="0" bIns="0" anchor="t">
+          <a:bodyPr wrap="square" anchor="t" lIns="0" rIns="0" tIns="0" bIns="0">
             <a:spAutoFit/>
           </a:bodyPr>
           <a:lstStyle/>
@@ -9588,7 +9402,7 @@
 </file>
 
 <file path=ppt/slides/slide19.xml><?xml version="1.0" encoding="utf-8"?>
-<p:sld xmlns:a="http://schemas.openxmlformats.org/drawingml/2006/main" xmlns:r="http://schemas.openxmlformats.org/officeDocument/2006/relationships" xmlns:p="http://schemas.openxmlformats.org/presentationml/2006/main">
+<p:sld xmlns:a="http://schemas.openxmlformats.org/drawingml/2006/main" xmlns:p="http://schemas.openxmlformats.org/presentationml/2006/main" xmlns:r="http://schemas.openxmlformats.org/officeDocument/2006/relationships">
   <p:cSld>
     <p:bg>
       <p:bgPr>
@@ -9604,14 +9418,7 @@
         <p:cNvGrpSpPr/>
         <p:nvPr/>
       </p:nvGrpSpPr>
-      <p:grpSpPr>
-        <a:xfrm>
-          <a:off x="0" y="0"/>
-          <a:ext cx="0" cy="0"/>
-          <a:chOff x="0" y="0"/>
-          <a:chExt cx="0" cy="0"/>
-        </a:xfrm>
-      </p:grpSpPr>
+      <p:grpSpPr/>
       <p:sp>
         <p:nvSpPr>
           <p:cNvPr id="2" name="TextBox 1"/>
@@ -9629,7 +9436,7 @@
           <a:noFill/>
         </p:spPr>
         <p:txBody>
-          <a:bodyPr wrap="square" lIns="0" tIns="0" rIns="0" bIns="0" anchor="t">
+          <a:bodyPr wrap="square" anchor="t" lIns="0" rIns="0" tIns="0" bIns="0">
             <a:spAutoFit/>
           </a:bodyPr>
           <a:lstStyle/>
@@ -9703,7 +9510,6 @@
           <a:lstStyle/>
           <a:p>
             <a:pPr algn="ctr"/>
-            <a:endParaRPr/>
           </a:p>
         </p:txBody>
       </p:sp>
@@ -9726,48 +9532,12 @@
                 <a:tableStyleId>{5C22544A-7EE6-4342-B048-85BDC9FD1C3A}</a:tableStyleId>
               </a:tblPr>
               <a:tblGrid>
-                <a:gridCol w="1813560">
-                  <a:extLst>
-                    <a:ext uri="{9D8B030D-6E8A-4147-A177-3AD203B41FA5}">
-                      <a16:colId xmlns:a16="http://schemas.microsoft.com/office/drawing/2014/main" val="20000"/>
-                    </a:ext>
-                  </a:extLst>
-                </a:gridCol>
-                <a:gridCol w="1813560">
-                  <a:extLst>
-                    <a:ext uri="{9D8B030D-6E8A-4147-A177-3AD203B41FA5}">
-                      <a16:colId xmlns:a16="http://schemas.microsoft.com/office/drawing/2014/main" val="20001"/>
-                    </a:ext>
-                  </a:extLst>
-                </a:gridCol>
-                <a:gridCol w="1813560">
-                  <a:extLst>
-                    <a:ext uri="{9D8B030D-6E8A-4147-A177-3AD203B41FA5}">
-                      <a16:colId xmlns:a16="http://schemas.microsoft.com/office/drawing/2014/main" val="20002"/>
-                    </a:ext>
-                  </a:extLst>
-                </a:gridCol>
-                <a:gridCol w="1813560">
-                  <a:extLst>
-                    <a:ext uri="{9D8B030D-6E8A-4147-A177-3AD203B41FA5}">
-                      <a16:colId xmlns:a16="http://schemas.microsoft.com/office/drawing/2014/main" val="20003"/>
-                    </a:ext>
-                  </a:extLst>
-                </a:gridCol>
-                <a:gridCol w="1813560">
-                  <a:extLst>
-                    <a:ext uri="{9D8B030D-6E8A-4147-A177-3AD203B41FA5}">
-                      <a16:colId xmlns:a16="http://schemas.microsoft.com/office/drawing/2014/main" val="20004"/>
-                    </a:ext>
-                  </a:extLst>
-                </a:gridCol>
-                <a:gridCol w="1813560">
-                  <a:extLst>
-                    <a:ext uri="{9D8B030D-6E8A-4147-A177-3AD203B41FA5}">
-                      <a16:colId xmlns:a16="http://schemas.microsoft.com/office/drawing/2014/main" val="20005"/>
-                    </a:ext>
-                  </a:extLst>
-                </a:gridCol>
+                <a:gridCol w="1813560"/>
+                <a:gridCol w="1813560"/>
+                <a:gridCol w="1813560"/>
+                <a:gridCol w="1813560"/>
+                <a:gridCol w="1813560"/>
+                <a:gridCol w="1813560"/>
               </a:tblGrid>
               <a:tr h="457200">
                 <a:tc>
@@ -9902,11 +9672,6 @@
                     </a:solidFill>
                   </a:tcPr>
                 </a:tc>
-                <a:extLst>
-                  <a:ext uri="{0D108BD9-81ED-4DB2-BD59-A6C34878D82A}">
-                    <a16:rowId xmlns:a16="http://schemas.microsoft.com/office/drawing/2014/main" val="10000"/>
-                  </a:ext>
-                </a:extLst>
               </a:tr>
             </a:tbl>
           </a:graphicData>
@@ -9929,7 +9694,7 @@
           <a:noFill/>
         </p:spPr>
         <p:txBody>
-          <a:bodyPr wrap="square" lIns="0" tIns="0" rIns="0" bIns="0" anchor="t">
+          <a:bodyPr wrap="square" anchor="t" lIns="0" rIns="0" tIns="0" bIns="0">
             <a:spAutoFit/>
           </a:bodyPr>
           <a:lstStyle/>
@@ -9987,7 +9752,6 @@
           <a:lstStyle/>
           <a:p>
             <a:pPr algn="ctr"/>
-            <a:endParaRPr/>
           </a:p>
         </p:txBody>
       </p:sp>
@@ -10008,7 +9772,7 @@
           <a:noFill/>
         </p:spPr>
         <p:txBody>
-          <a:bodyPr wrap="square" lIns="0" tIns="0" rIns="0" bIns="0" anchor="t">
+          <a:bodyPr wrap="square" anchor="t" lIns="0" rIns="0" tIns="0" bIns="0">
             <a:spAutoFit/>
           </a:bodyPr>
           <a:lstStyle/>
@@ -10051,7 +9815,7 @@
           <a:noFill/>
         </p:spPr>
         <p:txBody>
-          <a:bodyPr wrap="square" lIns="0" tIns="0" rIns="0" bIns="0" anchor="t">
+          <a:bodyPr wrap="square" anchor="t" lIns="0" rIns="0" tIns="0" bIns="0">
             <a:spAutoFit/>
           </a:bodyPr>
           <a:lstStyle/>
@@ -10078,7 +9842,7 @@
 </file>
 
 <file path=ppt/slides/slide2.xml><?xml version="1.0" encoding="utf-8"?>
-<p:sld xmlns:a="http://schemas.openxmlformats.org/drawingml/2006/main" xmlns:r="http://schemas.openxmlformats.org/officeDocument/2006/relationships" xmlns:p="http://schemas.openxmlformats.org/presentationml/2006/main">
+<p:sld xmlns:a="http://schemas.openxmlformats.org/drawingml/2006/main" xmlns:p="http://schemas.openxmlformats.org/presentationml/2006/main" xmlns:r="http://schemas.openxmlformats.org/officeDocument/2006/relationships">
   <p:cSld>
     <p:bg>
       <p:bgPr>
@@ -10094,14 +9858,7 @@
         <p:cNvGrpSpPr/>
         <p:nvPr/>
       </p:nvGrpSpPr>
-      <p:grpSpPr>
-        <a:xfrm>
-          <a:off x="0" y="0"/>
-          <a:ext cx="0" cy="0"/>
-          <a:chOff x="0" y="0"/>
-          <a:chExt cx="0" cy="0"/>
-        </a:xfrm>
-      </p:grpSpPr>
+      <p:grpSpPr/>
       <p:sp>
         <p:nvSpPr>
           <p:cNvPr id="2" name="TextBox 1"/>
@@ -10119,7 +9876,7 @@
           <a:noFill/>
         </p:spPr>
         <p:txBody>
-          <a:bodyPr wrap="square" lIns="0" tIns="0" rIns="0" bIns="0" anchor="t">
+          <a:bodyPr wrap="square" anchor="t" lIns="0" rIns="0" tIns="0" bIns="0">
             <a:spAutoFit/>
           </a:bodyPr>
           <a:lstStyle/>
@@ -10193,7 +9950,6 @@
           <a:lstStyle/>
           <a:p>
             <a:pPr algn="ctr"/>
-            <a:endParaRPr/>
           </a:p>
         </p:txBody>
       </p:sp>
@@ -10214,7 +9970,7 @@
           <a:noFill/>
         </p:spPr>
         <p:txBody>
-          <a:bodyPr wrap="square" lIns="0" tIns="0" rIns="0" bIns="0" anchor="ctr">
+          <a:bodyPr wrap="square" anchor="ctr" lIns="0" rIns="0" tIns="0" bIns="0">
             <a:spAutoFit/>
           </a:bodyPr>
           <a:lstStyle/>
@@ -10385,7 +10141,6 @@
           <a:lstStyle/>
           <a:p>
             <a:pPr algn="ctr"/>
-            <a:endParaRPr/>
           </a:p>
         </p:txBody>
       </p:sp>
@@ -10406,7 +10161,7 @@
           <a:noFill/>
         </p:spPr>
         <p:txBody>
-          <a:bodyPr wrap="square" lIns="0" tIns="0" rIns="0" bIns="0" anchor="t">
+          <a:bodyPr wrap="square" anchor="t" lIns="0" rIns="0" tIns="0" bIns="0">
             <a:spAutoFit/>
           </a:bodyPr>
           <a:lstStyle/>
@@ -10449,7 +10204,7 @@
           <a:noFill/>
         </p:spPr>
         <p:txBody>
-          <a:bodyPr wrap="square" lIns="0" tIns="0" rIns="0" bIns="0" anchor="t">
+          <a:bodyPr wrap="square" anchor="t" lIns="0" rIns="0" tIns="0" bIns="0">
             <a:spAutoFit/>
           </a:bodyPr>
           <a:lstStyle/>
@@ -10476,7 +10231,7 @@
 </file>
 
 <file path=ppt/slides/slide20.xml><?xml version="1.0" encoding="utf-8"?>
-<p:sld xmlns:a="http://schemas.openxmlformats.org/drawingml/2006/main" xmlns:r="http://schemas.openxmlformats.org/officeDocument/2006/relationships" xmlns:p="http://schemas.openxmlformats.org/presentationml/2006/main">
+<p:sld xmlns:a="http://schemas.openxmlformats.org/drawingml/2006/main" xmlns:p="http://schemas.openxmlformats.org/presentationml/2006/main" xmlns:r="http://schemas.openxmlformats.org/officeDocument/2006/relationships">
   <p:cSld>
     <p:bg>
       <p:bgPr>
@@ -10492,14 +10247,7 @@
         <p:cNvGrpSpPr/>
         <p:nvPr/>
       </p:nvGrpSpPr>
-      <p:grpSpPr>
-        <a:xfrm>
-          <a:off x="0" y="0"/>
-          <a:ext cx="0" cy="0"/>
-          <a:chOff x="0" y="0"/>
-          <a:chExt cx="0" cy="0"/>
-        </a:xfrm>
-      </p:grpSpPr>
+      <p:grpSpPr/>
       <p:sp>
         <p:nvSpPr>
           <p:cNvPr id="2" name="TextBox 1"/>
@@ -10517,7 +10265,7 @@
           <a:noFill/>
         </p:spPr>
         <p:txBody>
-          <a:bodyPr wrap="square" lIns="0" tIns="0" rIns="0" bIns="0" anchor="t">
+          <a:bodyPr wrap="square" anchor="t" lIns="0" rIns="0" tIns="0" bIns="0">
             <a:spAutoFit/>
           </a:bodyPr>
           <a:lstStyle/>
@@ -10591,7 +10339,6 @@
           <a:lstStyle/>
           <a:p>
             <a:pPr algn="ctr"/>
-            <a:endParaRPr/>
           </a:p>
         </p:txBody>
       </p:sp>
@@ -10614,20 +10361,8 @@
                 <a:tableStyleId>{5C22544A-7EE6-4342-B048-85BDC9FD1C3A}</a:tableStyleId>
               </a:tblPr>
               <a:tblGrid>
-                <a:gridCol w="5440680">
-                  <a:extLst>
-                    <a:ext uri="{9D8B030D-6E8A-4147-A177-3AD203B41FA5}">
-                      <a16:colId xmlns:a16="http://schemas.microsoft.com/office/drawing/2014/main" val="20000"/>
-                    </a:ext>
-                  </a:extLst>
-                </a:gridCol>
-                <a:gridCol w="5440680">
-                  <a:extLst>
-                    <a:ext uri="{9D8B030D-6E8A-4147-A177-3AD203B41FA5}">
-                      <a16:colId xmlns:a16="http://schemas.microsoft.com/office/drawing/2014/main" val="20001"/>
-                    </a:ext>
-                  </a:extLst>
-                </a:gridCol>
+                <a:gridCol w="5440680"/>
+                <a:gridCol w="5440680"/>
               </a:tblGrid>
               <a:tr h="457200">
                 <a:tc>
@@ -10674,11 +10409,6 @@
                     </a:solidFill>
                   </a:tcPr>
                 </a:tc>
-                <a:extLst>
-                  <a:ext uri="{0D108BD9-81ED-4DB2-BD59-A6C34878D82A}">
-                    <a16:rowId xmlns:a16="http://schemas.microsoft.com/office/drawing/2014/main" val="10000"/>
-                  </a:ext>
-                </a:extLst>
               </a:tr>
               <a:tr h="457200">
                 <a:tc>
@@ -10725,11 +10455,6 @@
                     </a:solidFill>
                   </a:tcPr>
                 </a:tc>
-                <a:extLst>
-                  <a:ext uri="{0D108BD9-81ED-4DB2-BD59-A6C34878D82A}">
-                    <a16:rowId xmlns:a16="http://schemas.microsoft.com/office/drawing/2014/main" val="10001"/>
-                  </a:ext>
-                </a:extLst>
               </a:tr>
               <a:tr h="457200">
                 <a:tc>
@@ -10776,11 +10501,6 @@
                     </a:solidFill>
                   </a:tcPr>
                 </a:tc>
-                <a:extLst>
-                  <a:ext uri="{0D108BD9-81ED-4DB2-BD59-A6C34878D82A}">
-                    <a16:rowId xmlns:a16="http://schemas.microsoft.com/office/drawing/2014/main" val="10002"/>
-                  </a:ext>
-                </a:extLst>
               </a:tr>
               <a:tr h="457200">
                 <a:tc>
@@ -10827,11 +10547,6 @@
                     </a:solidFill>
                   </a:tcPr>
                 </a:tc>
-                <a:extLst>
-                  <a:ext uri="{0D108BD9-81ED-4DB2-BD59-A6C34878D82A}">
-                    <a16:rowId xmlns:a16="http://schemas.microsoft.com/office/drawing/2014/main" val="10003"/>
-                  </a:ext>
-                </a:extLst>
               </a:tr>
               <a:tr h="457200">
                 <a:tc>
@@ -10878,11 +10593,6 @@
                     </a:solidFill>
                   </a:tcPr>
                 </a:tc>
-                <a:extLst>
-                  <a:ext uri="{0D108BD9-81ED-4DB2-BD59-A6C34878D82A}">
-                    <a16:rowId xmlns:a16="http://schemas.microsoft.com/office/drawing/2014/main" val="10004"/>
-                  </a:ext>
-                </a:extLst>
               </a:tr>
               <a:tr h="457200">
                 <a:tc>
@@ -10929,11 +10639,6 @@
                     </a:solidFill>
                   </a:tcPr>
                 </a:tc>
-                <a:extLst>
-                  <a:ext uri="{0D108BD9-81ED-4DB2-BD59-A6C34878D82A}">
-                    <a16:rowId xmlns:a16="http://schemas.microsoft.com/office/drawing/2014/main" val="10005"/>
-                  </a:ext>
-                </a:extLst>
               </a:tr>
               <a:tr h="457200">
                 <a:tc>
@@ -10980,11 +10685,6 @@
                     </a:solidFill>
                   </a:tcPr>
                 </a:tc>
-                <a:extLst>
-                  <a:ext uri="{0D108BD9-81ED-4DB2-BD59-A6C34878D82A}">
-                    <a16:rowId xmlns:a16="http://schemas.microsoft.com/office/drawing/2014/main" val="10006"/>
-                  </a:ext>
-                </a:extLst>
               </a:tr>
             </a:tbl>
           </a:graphicData>
@@ -11007,7 +10707,7 @@
           <a:noFill/>
         </p:spPr>
         <p:txBody>
-          <a:bodyPr wrap="square" lIns="0" tIns="0" rIns="0" bIns="0" anchor="t">
+          <a:bodyPr wrap="square" anchor="t" lIns="0" rIns="0" tIns="0" bIns="0">
             <a:spAutoFit/>
           </a:bodyPr>
           <a:lstStyle/>
@@ -11065,7 +10765,6 @@
           <a:lstStyle/>
           <a:p>
             <a:pPr algn="ctr"/>
-            <a:endParaRPr/>
           </a:p>
         </p:txBody>
       </p:sp>
@@ -11086,7 +10785,7 @@
           <a:noFill/>
         </p:spPr>
         <p:txBody>
-          <a:bodyPr wrap="square" lIns="0" tIns="0" rIns="0" bIns="0" anchor="t">
+          <a:bodyPr wrap="square" anchor="t" lIns="0" rIns="0" tIns="0" bIns="0">
             <a:spAutoFit/>
           </a:bodyPr>
           <a:lstStyle/>
@@ -11129,7 +10828,7 @@
           <a:noFill/>
         </p:spPr>
         <p:txBody>
-          <a:bodyPr wrap="square" lIns="0" tIns="0" rIns="0" bIns="0" anchor="t">
+          <a:bodyPr wrap="square" anchor="t" lIns="0" rIns="0" tIns="0" bIns="0">
             <a:spAutoFit/>
           </a:bodyPr>
           <a:lstStyle/>
@@ -11156,7 +10855,7 @@
 </file>
 
 <file path=ppt/slides/slide21.xml><?xml version="1.0" encoding="utf-8"?>
-<p:sld xmlns:a="http://schemas.openxmlformats.org/drawingml/2006/main" xmlns:r="http://schemas.openxmlformats.org/officeDocument/2006/relationships" xmlns:p="http://schemas.openxmlformats.org/presentationml/2006/main">
+<p:sld xmlns:a="http://schemas.openxmlformats.org/drawingml/2006/main" xmlns:p="http://schemas.openxmlformats.org/presentationml/2006/main" xmlns:r="http://schemas.openxmlformats.org/officeDocument/2006/relationships">
   <p:cSld>
     <p:bg>
       <p:bgPr>
@@ -11172,14 +10871,7 @@
         <p:cNvGrpSpPr/>
         <p:nvPr/>
       </p:nvGrpSpPr>
-      <p:grpSpPr>
-        <a:xfrm>
-          <a:off x="0" y="0"/>
-          <a:ext cx="0" cy="0"/>
-          <a:chOff x="0" y="0"/>
-          <a:chExt cx="0" cy="0"/>
-        </a:xfrm>
-      </p:grpSpPr>
+      <p:grpSpPr/>
       <p:sp>
         <p:nvSpPr>
           <p:cNvPr id="2" name="Rectangle 1"/>
@@ -11221,7 +10913,6 @@
           <a:lstStyle/>
           <a:p>
             <a:pPr algn="ctr"/>
-            <a:endParaRPr/>
           </a:p>
         </p:txBody>
       </p:sp>
@@ -11295,7 +10986,7 @@
           <a:noFill/>
         </p:spPr>
         <p:txBody>
-          <a:bodyPr wrap="square" lIns="0" tIns="0" rIns="0" bIns="0" anchor="ctr">
+          <a:bodyPr wrap="square" anchor="ctr" lIns="0" rIns="0" tIns="0" bIns="0">
             <a:spAutoFit/>
           </a:bodyPr>
           <a:lstStyle/>
@@ -11321,7 +11012,7 @@
         <p:spPr>
           <a:xfrm>
             <a:off x="658368" y="1554480"/>
-            <a:ext cx="10881360" cy="3120150"/>
+            <a:ext cx="10881360" cy="4297680"/>
           </a:xfrm>
           <a:prstGeom prst="rect">
             <a:avLst/>
@@ -11329,7 +11020,7 @@
           <a:noFill/>
         </p:spPr>
         <p:txBody>
-          <a:bodyPr wrap="square" lIns="0" tIns="0" rIns="0" bIns="0" anchor="t">
+          <a:bodyPr wrap="square" anchor="t" lIns="0" rIns="0" tIns="0" bIns="0">
             <a:spAutoFit/>
           </a:bodyPr>
           <a:lstStyle/>
@@ -11346,7 +11037,7 @@
               </a:spcAft>
             </a:pPr>
             <a:r>
-              <a:rPr b="1" i="0" dirty="0">
+              <a:rPr sz="1700" b="1" i="0">
                 <a:solidFill>
                   <a:srgbClr val="EDAB0C"/>
                 </a:solidFill>
@@ -11355,7 +11046,7 @@
               <a:t>■  </a:t>
             </a:r>
             <a:r>
-              <a:rPr b="0" i="0" dirty="0">
+              <a:rPr sz="1700" b="0" i="0">
                 <a:solidFill>
                   <a:srgbClr val="2A2929"/>
                 </a:solidFill>
@@ -11377,7 +11068,7 @@
               </a:spcAft>
             </a:pPr>
             <a:r>
-              <a:rPr b="1" i="0" dirty="0">
+              <a:rPr sz="1700" b="1" i="0">
                 <a:solidFill>
                   <a:srgbClr val="EDAB0C"/>
                 </a:solidFill>
@@ -11386,7 +11077,7 @@
               <a:t>■  </a:t>
             </a:r>
             <a:r>
-              <a:rPr b="0" i="0" dirty="0">
+              <a:rPr sz="1700" b="0" i="0">
                 <a:solidFill>
                   <a:srgbClr val="2A2929"/>
                 </a:solidFill>
@@ -11408,7 +11099,7 @@
               </a:spcAft>
             </a:pPr>
             <a:r>
-              <a:rPr sz="1600" b="0" i="0" dirty="0">
+              <a:rPr sz="1400" b="0" i="0">
                 <a:solidFill>
                   <a:srgbClr val="7A7A7A"/>
                 </a:solidFill>
@@ -11417,7 +11108,7 @@
               <a:t>–  </a:t>
             </a:r>
             <a:r>
-              <a:rPr sz="1600" b="0" i="0" dirty="0">
+              <a:rPr sz="1400" b="0" i="0">
                 <a:solidFill>
                   <a:srgbClr val="2A2929"/>
                 </a:solidFill>
@@ -11439,7 +11130,7 @@
               </a:spcAft>
             </a:pPr>
             <a:r>
-              <a:rPr sz="1600" b="0" i="0" dirty="0">
+              <a:rPr sz="1400" b="0" i="0">
                 <a:solidFill>
                   <a:srgbClr val="7A7A7A"/>
                 </a:solidFill>
@@ -11448,7 +11139,7 @@
               <a:t>–  </a:t>
             </a:r>
             <a:r>
-              <a:rPr sz="1600" b="0" i="0" dirty="0">
+              <a:rPr sz="1400" b="0" i="0">
                 <a:solidFill>
                   <a:srgbClr val="2A2929"/>
                 </a:solidFill>
@@ -11470,7 +11161,7 @@
               </a:spcAft>
             </a:pPr>
             <a:r>
-              <a:rPr sz="1600" b="0" i="0" dirty="0">
+              <a:rPr sz="1400" b="0" i="0">
                 <a:solidFill>
                   <a:srgbClr val="7A7A7A"/>
                 </a:solidFill>
@@ -11479,7 +11170,7 @@
               <a:t>–  </a:t>
             </a:r>
             <a:r>
-              <a:rPr sz="1600" b="0" i="0" dirty="0">
+              <a:rPr sz="1400" b="0" i="0">
                 <a:solidFill>
                   <a:srgbClr val="2A2929"/>
                 </a:solidFill>
@@ -11501,7 +11192,7 @@
               </a:spcAft>
             </a:pPr>
             <a:r>
-              <a:rPr sz="1600" b="0" i="0" dirty="0">
+              <a:rPr sz="1400" b="0" i="0">
                 <a:solidFill>
                   <a:srgbClr val="7A7A7A"/>
                 </a:solidFill>
@@ -11510,7 +11201,7 @@
               <a:t>–  </a:t>
             </a:r>
             <a:r>
-              <a:rPr sz="1600" b="0" i="0" dirty="0">
+              <a:rPr sz="1400" b="0" i="0">
                 <a:solidFill>
                   <a:srgbClr val="2A2929"/>
                 </a:solidFill>
@@ -11532,7 +11223,7 @@
               </a:spcAft>
             </a:pPr>
             <a:r>
-              <a:rPr b="1" i="0" dirty="0">
+              <a:rPr sz="1700" b="1" i="0">
                 <a:solidFill>
                   <a:srgbClr val="EDAB0C"/>
                 </a:solidFill>
@@ -11541,7 +11232,7 @@
               <a:t>■  </a:t>
             </a:r>
             <a:r>
-              <a:rPr b="0" i="0" dirty="0">
+              <a:rPr sz="1700" b="0" i="0">
                 <a:solidFill>
                   <a:srgbClr val="2A2929"/>
                 </a:solidFill>
@@ -11563,7 +11254,7 @@
               </a:spcAft>
             </a:pPr>
             <a:r>
-              <a:rPr b="1" i="0" dirty="0">
+              <a:rPr sz="1700" b="1" i="0">
                 <a:solidFill>
                   <a:srgbClr val="EDAB0C"/>
                 </a:solidFill>
@@ -11572,7 +11263,7 @@
               <a:t>■  </a:t>
             </a:r>
             <a:r>
-              <a:rPr b="0" i="0" dirty="0">
+              <a:rPr sz="1700" b="0" i="0">
                 <a:solidFill>
                   <a:srgbClr val="2A2929"/>
                 </a:solidFill>
@@ -11626,7 +11317,6 @@
           <a:lstStyle/>
           <a:p>
             <a:pPr algn="ctr"/>
-            <a:endParaRPr/>
           </a:p>
         </p:txBody>
       </p:sp>
@@ -11647,7 +11337,7 @@
           <a:noFill/>
         </p:spPr>
         <p:txBody>
-          <a:bodyPr wrap="square" lIns="0" tIns="0" rIns="0" bIns="0" anchor="ctr">
+          <a:bodyPr wrap="square" anchor="ctr" lIns="0" rIns="0" tIns="0" bIns="0">
             <a:spAutoFit/>
           </a:bodyPr>
           <a:lstStyle/>
@@ -11705,7 +11395,6 @@
           <a:lstStyle/>
           <a:p>
             <a:pPr algn="ctr"/>
-            <a:endParaRPr/>
           </a:p>
         </p:txBody>
       </p:sp>
@@ -11726,7 +11415,7 @@
           <a:noFill/>
         </p:spPr>
         <p:txBody>
-          <a:bodyPr wrap="square" lIns="0" tIns="0" rIns="0" bIns="0" anchor="t">
+          <a:bodyPr wrap="square" anchor="t" lIns="0" rIns="0" tIns="0" bIns="0">
             <a:spAutoFit/>
           </a:bodyPr>
           <a:lstStyle/>
@@ -11769,7 +11458,7 @@
           <a:noFill/>
         </p:spPr>
         <p:txBody>
-          <a:bodyPr wrap="square" lIns="0" tIns="0" rIns="0" bIns="0" anchor="t">
+          <a:bodyPr wrap="square" anchor="t" lIns="0" rIns="0" tIns="0" bIns="0">
             <a:spAutoFit/>
           </a:bodyPr>
           <a:lstStyle/>
@@ -11796,7 +11485,7 @@
 </file>
 
 <file path=ppt/slides/slide22.xml><?xml version="1.0" encoding="utf-8"?>
-<p:sld xmlns:a="http://schemas.openxmlformats.org/drawingml/2006/main" xmlns:r="http://schemas.openxmlformats.org/officeDocument/2006/relationships" xmlns:p="http://schemas.openxmlformats.org/presentationml/2006/main">
+<p:sld xmlns:a="http://schemas.openxmlformats.org/drawingml/2006/main" xmlns:p="http://schemas.openxmlformats.org/presentationml/2006/main" xmlns:r="http://schemas.openxmlformats.org/officeDocument/2006/relationships">
   <p:cSld>
     <p:bg>
       <p:bgPr>
@@ -11812,14 +11501,7 @@
         <p:cNvGrpSpPr/>
         <p:nvPr/>
       </p:nvGrpSpPr>
-      <p:grpSpPr>
-        <a:xfrm>
-          <a:off x="0" y="0"/>
-          <a:ext cx="0" cy="0"/>
-          <a:chOff x="0" y="0"/>
-          <a:chExt cx="0" cy="0"/>
-        </a:xfrm>
-      </p:grpSpPr>
+      <p:grpSpPr/>
       <p:sp>
         <p:nvSpPr>
           <p:cNvPr id="2" name="TextBox 1"/>
@@ -11837,7 +11519,7 @@
           <a:noFill/>
         </p:spPr>
         <p:txBody>
-          <a:bodyPr wrap="square" lIns="0" tIns="0" rIns="0" bIns="0" anchor="t">
+          <a:bodyPr wrap="square" anchor="t" lIns="0" rIns="0" tIns="0" bIns="0">
             <a:spAutoFit/>
           </a:bodyPr>
           <a:lstStyle/>
@@ -11911,7 +11593,6 @@
           <a:lstStyle/>
           <a:p>
             <a:pPr algn="ctr"/>
-            <a:endParaRPr/>
           </a:p>
         </p:txBody>
       </p:sp>
@@ -11958,7 +11639,6 @@
           <a:lstStyle/>
           <a:p>
             <a:pPr algn="ctr"/>
-            <a:endParaRPr/>
           </a:p>
         </p:txBody>
       </p:sp>
@@ -12003,7 +11683,6 @@
           <a:lstStyle/>
           <a:p>
             <a:pPr algn="ctr"/>
-            <a:endParaRPr/>
           </a:p>
         </p:txBody>
       </p:sp>
@@ -12024,7 +11703,7 @@
           <a:noFill/>
         </p:spPr>
         <p:txBody>
-          <a:bodyPr wrap="square" lIns="0" tIns="0" rIns="0" bIns="0" anchor="ctr">
+          <a:bodyPr wrap="square" anchor="ctr" lIns="0" rIns="0" tIns="0" bIns="0">
             <a:spAutoFit/>
           </a:bodyPr>
           <a:lstStyle/>
@@ -12089,7 +11768,6 @@
           <a:lstStyle/>
           <a:p>
             <a:pPr algn="ctr"/>
-            <a:endParaRPr/>
           </a:p>
         </p:txBody>
       </p:sp>
@@ -12134,7 +11812,6 @@
           <a:lstStyle/>
           <a:p>
             <a:pPr algn="ctr"/>
-            <a:endParaRPr/>
           </a:p>
         </p:txBody>
       </p:sp>
@@ -12155,7 +11832,7 @@
           <a:noFill/>
         </p:spPr>
         <p:txBody>
-          <a:bodyPr wrap="square" lIns="0" tIns="0" rIns="0" bIns="0" anchor="ctr">
+          <a:bodyPr wrap="square" anchor="ctr" lIns="0" rIns="0" tIns="0" bIns="0">
             <a:spAutoFit/>
           </a:bodyPr>
           <a:lstStyle/>
@@ -12220,7 +11897,6 @@
           <a:lstStyle/>
           <a:p>
             <a:pPr algn="ctr"/>
-            <a:endParaRPr/>
           </a:p>
         </p:txBody>
       </p:sp>
@@ -12265,7 +11941,6 @@
           <a:lstStyle/>
           <a:p>
             <a:pPr algn="ctr"/>
-            <a:endParaRPr/>
           </a:p>
         </p:txBody>
       </p:sp>
@@ -12286,7 +11961,7 @@
           <a:noFill/>
         </p:spPr>
         <p:txBody>
-          <a:bodyPr wrap="square" lIns="0" tIns="0" rIns="0" bIns="0" anchor="ctr">
+          <a:bodyPr wrap="square" anchor="ctr" lIns="0" rIns="0" tIns="0" bIns="0">
             <a:spAutoFit/>
           </a:bodyPr>
           <a:lstStyle/>
@@ -12349,7 +12024,6 @@
           <a:lstStyle/>
           <a:p>
             <a:pPr algn="ctr"/>
-            <a:endParaRPr/>
           </a:p>
         </p:txBody>
       </p:sp>
@@ -12370,7 +12044,7 @@
           <a:noFill/>
         </p:spPr>
         <p:txBody>
-          <a:bodyPr wrap="square" lIns="0" tIns="0" rIns="0" bIns="0" anchor="t">
+          <a:bodyPr wrap="square" anchor="t" lIns="0" rIns="0" tIns="0" bIns="0">
             <a:spAutoFit/>
           </a:bodyPr>
           <a:lstStyle/>
@@ -12413,7 +12087,7 @@
           <a:noFill/>
         </p:spPr>
         <p:txBody>
-          <a:bodyPr wrap="square" lIns="0" tIns="0" rIns="0" bIns="0" anchor="t">
+          <a:bodyPr wrap="square" anchor="t" lIns="0" rIns="0" tIns="0" bIns="0">
             <a:spAutoFit/>
           </a:bodyPr>
           <a:lstStyle/>
@@ -12440,7 +12114,7 @@
 </file>
 
 <file path=ppt/slides/slide23.xml><?xml version="1.0" encoding="utf-8"?>
-<p:sld xmlns:a="http://schemas.openxmlformats.org/drawingml/2006/main" xmlns:r="http://schemas.openxmlformats.org/officeDocument/2006/relationships" xmlns:p="http://schemas.openxmlformats.org/presentationml/2006/main">
+<p:sld xmlns:a="http://schemas.openxmlformats.org/drawingml/2006/main" xmlns:p="http://schemas.openxmlformats.org/presentationml/2006/main" xmlns:r="http://schemas.openxmlformats.org/officeDocument/2006/relationships">
   <p:cSld>
     <p:bg>
       <p:bgPr>
@@ -12456,14 +12130,7 @@
         <p:cNvGrpSpPr/>
         <p:nvPr/>
       </p:nvGrpSpPr>
-      <p:grpSpPr>
-        <a:xfrm>
-          <a:off x="0" y="0"/>
-          <a:ext cx="0" cy="0"/>
-          <a:chOff x="0" y="0"/>
-          <a:chExt cx="0" cy="0"/>
-        </a:xfrm>
-      </p:grpSpPr>
+      <p:grpSpPr/>
       <p:sp>
         <p:nvSpPr>
           <p:cNvPr id="2" name="Rectangle 1"/>
@@ -12505,7 +12172,6 @@
           <a:lstStyle/>
           <a:p>
             <a:pPr algn="ctr"/>
-            <a:endParaRPr/>
           </a:p>
         </p:txBody>
       </p:sp>
@@ -12526,7 +12192,7 @@
           <a:noFill/>
         </p:spPr>
         <p:txBody>
-          <a:bodyPr wrap="square" lIns="0" tIns="0" rIns="0" bIns="0" anchor="t">
+          <a:bodyPr wrap="square" anchor="t" lIns="0" rIns="0" tIns="0" bIns="0">
             <a:spAutoFit/>
           </a:bodyPr>
           <a:lstStyle/>
@@ -12647,7 +12313,7 @@
 </file>
 
 <file path=ppt/slides/slide3.xml><?xml version="1.0" encoding="utf-8"?>
-<p:sld xmlns:a="http://schemas.openxmlformats.org/drawingml/2006/main" xmlns:r="http://schemas.openxmlformats.org/officeDocument/2006/relationships" xmlns:p="http://schemas.openxmlformats.org/presentationml/2006/main">
+<p:sld xmlns:a="http://schemas.openxmlformats.org/drawingml/2006/main" xmlns:p="http://schemas.openxmlformats.org/presentationml/2006/main" xmlns:r="http://schemas.openxmlformats.org/officeDocument/2006/relationships">
   <p:cSld>
     <p:bg>
       <p:bgPr>
@@ -12663,14 +12329,7 @@
         <p:cNvGrpSpPr/>
         <p:nvPr/>
       </p:nvGrpSpPr>
-      <p:grpSpPr>
-        <a:xfrm>
-          <a:off x="0" y="0"/>
-          <a:ext cx="0" cy="0"/>
-          <a:chOff x="0" y="0"/>
-          <a:chExt cx="0" cy="0"/>
-        </a:xfrm>
-      </p:grpSpPr>
+      <p:grpSpPr/>
       <p:sp>
         <p:nvSpPr>
           <p:cNvPr id="2" name="TextBox 1"/>
@@ -12688,7 +12347,7 @@
           <a:noFill/>
         </p:spPr>
         <p:txBody>
-          <a:bodyPr wrap="square" lIns="0" tIns="0" rIns="0" bIns="0" anchor="t">
+          <a:bodyPr wrap="square" anchor="t" lIns="0" rIns="0" tIns="0" bIns="0">
             <a:spAutoFit/>
           </a:bodyPr>
           <a:lstStyle/>
@@ -12746,7 +12405,6 @@
           <a:lstStyle/>
           <a:p>
             <a:pPr algn="ctr"/>
-            <a:endParaRPr/>
           </a:p>
         </p:txBody>
       </p:sp>
@@ -12767,7 +12425,7 @@
           <a:noFill/>
         </p:spPr>
         <p:txBody>
-          <a:bodyPr wrap="square" lIns="0" tIns="0" rIns="0" bIns="0" anchor="ctr">
+          <a:bodyPr wrap="square" anchor="ctr" lIns="0" rIns="0" tIns="0" bIns="0">
             <a:spAutoFit/>
           </a:bodyPr>
           <a:lstStyle/>
@@ -12784,7 +12442,7 @@
               </a:spcAft>
             </a:pPr>
             <a:r>
-              <a:rPr sz="2400" b="1" i="0" dirty="0">
+              <a:rPr sz="2400" b="1" i="0">
                 <a:solidFill>
                   <a:srgbClr val="EDAB0C"/>
                 </a:solidFill>
@@ -12793,7 +12451,7 @@
               <a:t>■  </a:t>
             </a:r>
             <a:r>
-              <a:rPr sz="2400" b="0" i="0" dirty="0">
+              <a:rPr sz="2400" b="0" i="0">
                 <a:solidFill>
                   <a:srgbClr val="2A2929"/>
                 </a:solidFill>
@@ -12815,7 +12473,7 @@
               </a:spcAft>
             </a:pPr>
             <a:r>
-              <a:rPr sz="2100" b="0" i="0" dirty="0">
+              <a:rPr sz="2100" b="0" i="0">
                 <a:solidFill>
                   <a:srgbClr val="7A7A7A"/>
                 </a:solidFill>
@@ -12824,31 +12482,13 @@
               <a:t>–  </a:t>
             </a:r>
             <a:r>
-              <a:rPr sz="2100" b="0" i="0" dirty="0">
+              <a:rPr sz="2100" b="0" i="0">
                 <a:solidFill>
                   <a:srgbClr val="2A2929"/>
                 </a:solidFill>
                 <a:latin typeface="Roboto"/>
               </a:rPr>
-              <a:t>Where does the </a:t>
-            </a:r>
-            <a:r>
-              <a:rPr sz="2100" b="0" i="0" dirty="0" err="1">
-                <a:solidFill>
-                  <a:srgbClr val="2A2929"/>
-                </a:solidFill>
-                <a:latin typeface="Roboto"/>
-              </a:rPr>
-              <a:t>organisation</a:t>
-            </a:r>
-            <a:r>
-              <a:rPr sz="2100" b="0" i="0" dirty="0">
-                <a:solidFill>
-                  <a:srgbClr val="2A2929"/>
-                </a:solidFill>
-                <a:latin typeface="Roboto"/>
-              </a:rPr>
-              <a:t> want to go?   — strategy</a:t>
+              <a:t>Where does the organisation want to go?   — strategy</a:t>
             </a:r>
           </a:p>
           <a:p>
@@ -12864,7 +12504,7 @@
               </a:spcAft>
             </a:pPr>
             <a:r>
-              <a:rPr sz="2100" b="0" i="0" dirty="0">
+              <a:rPr sz="2100" b="0" i="0">
                 <a:solidFill>
                   <a:srgbClr val="7A7A7A"/>
                 </a:solidFill>
@@ -12873,7 +12513,7 @@
               <a:t>–  </a:t>
             </a:r>
             <a:r>
-              <a:rPr sz="2100" b="0" i="0" dirty="0">
+              <a:rPr sz="2100" b="0" i="0">
                 <a:solidFill>
                   <a:srgbClr val="2A2929"/>
                 </a:solidFill>
@@ -12895,7 +12535,7 @@
               </a:spcAft>
             </a:pPr>
             <a:r>
-              <a:rPr sz="2100" b="0" i="0" dirty="0">
+              <a:rPr sz="2100" b="0" i="0">
                 <a:solidFill>
                   <a:srgbClr val="7A7A7A"/>
                 </a:solidFill>
@@ -12904,7 +12544,7 @@
               <a:t>–  </a:t>
             </a:r>
             <a:r>
-              <a:rPr sz="2100" b="0" i="0" dirty="0">
+              <a:rPr sz="2100" b="0" i="0">
                 <a:solidFill>
                   <a:srgbClr val="2A2929"/>
                 </a:solidFill>
@@ -12926,7 +12566,7 @@
               </a:spcAft>
             </a:pPr>
             <a:r>
-              <a:rPr sz="2400" b="1" i="0" dirty="0">
+              <a:rPr sz="2400" b="1" i="0">
                 <a:solidFill>
                   <a:srgbClr val="EDAB0C"/>
                 </a:solidFill>
@@ -12935,7 +12575,7 @@
               <a:t>■  </a:t>
             </a:r>
             <a:r>
-              <a:rPr sz="2400" b="0" i="0" dirty="0">
+              <a:rPr sz="2400" b="0" i="0">
                 <a:solidFill>
                   <a:srgbClr val="2A2929"/>
                 </a:solidFill>
@@ -12957,7 +12597,7 @@
               </a:spcAft>
             </a:pPr>
             <a:r>
-              <a:rPr sz="2400" b="1" i="0" dirty="0">
+              <a:rPr sz="2400" b="1" i="0">
                 <a:solidFill>
                   <a:srgbClr val="EDAB0C"/>
                 </a:solidFill>
@@ -12966,7 +12606,7 @@
               <a:t>■  </a:t>
             </a:r>
             <a:r>
-              <a:rPr sz="2400" b="0" i="0" dirty="0">
+              <a:rPr sz="2400" b="0" i="0">
                 <a:solidFill>
                   <a:srgbClr val="2A2929"/>
                 </a:solidFill>
@@ -13018,7 +12658,6 @@
           <a:lstStyle/>
           <a:p>
             <a:pPr algn="ctr"/>
-            <a:endParaRPr/>
           </a:p>
         </p:txBody>
       </p:sp>
@@ -13039,7 +12678,7 @@
           <a:noFill/>
         </p:spPr>
         <p:txBody>
-          <a:bodyPr wrap="square" lIns="0" tIns="0" rIns="0" bIns="0" anchor="t">
+          <a:bodyPr wrap="square" anchor="t" lIns="0" rIns="0" tIns="0" bIns="0">
             <a:spAutoFit/>
           </a:bodyPr>
           <a:lstStyle/>
@@ -13082,7 +12721,7 @@
           <a:noFill/>
         </p:spPr>
         <p:txBody>
-          <a:bodyPr wrap="square" lIns="0" tIns="0" rIns="0" bIns="0" anchor="t">
+          <a:bodyPr wrap="square" anchor="t" lIns="0" rIns="0" tIns="0" bIns="0">
             <a:spAutoFit/>
           </a:bodyPr>
           <a:lstStyle/>
@@ -13109,7 +12748,7 @@
 </file>
 
 <file path=ppt/slides/slide4.xml><?xml version="1.0" encoding="utf-8"?>
-<p:sld xmlns:a="http://schemas.openxmlformats.org/drawingml/2006/main" xmlns:r="http://schemas.openxmlformats.org/officeDocument/2006/relationships" xmlns:p="http://schemas.openxmlformats.org/presentationml/2006/main">
+<p:sld xmlns:a="http://schemas.openxmlformats.org/drawingml/2006/main" xmlns:p="http://schemas.openxmlformats.org/presentationml/2006/main" xmlns:r="http://schemas.openxmlformats.org/officeDocument/2006/relationships">
   <p:cSld>
     <p:bg>
       <p:bgPr>
@@ -13125,14 +12764,7 @@
         <p:cNvGrpSpPr/>
         <p:nvPr/>
       </p:nvGrpSpPr>
-      <p:grpSpPr>
-        <a:xfrm>
-          <a:off x="0" y="0"/>
-          <a:ext cx="0" cy="0"/>
-          <a:chOff x="0" y="0"/>
-          <a:chExt cx="0" cy="0"/>
-        </a:xfrm>
-      </p:grpSpPr>
+      <p:grpSpPr/>
       <p:sp>
         <p:nvSpPr>
           <p:cNvPr id="2" name="Rectangle 1"/>
@@ -13174,7 +12806,6 @@
           <a:lstStyle/>
           <a:p>
             <a:pPr algn="ctr"/>
-            <a:endParaRPr/>
           </a:p>
         </p:txBody>
       </p:sp>
@@ -13195,7 +12826,7 @@
           <a:noFill/>
         </p:spPr>
         <p:txBody>
-          <a:bodyPr wrap="square" lIns="0" tIns="0" rIns="0" bIns="0" anchor="t">
+          <a:bodyPr wrap="square" anchor="t" lIns="0" rIns="0" tIns="0" bIns="0">
             <a:spAutoFit/>
           </a:bodyPr>
           <a:lstStyle/>
@@ -13229,7 +12860,7 @@
           <a:noFill/>
         </p:spPr>
         <p:txBody>
-          <a:bodyPr wrap="square" lIns="0" tIns="0" rIns="0" bIns="0" anchor="t">
+          <a:bodyPr wrap="square" anchor="t" lIns="0" rIns="0" tIns="0" bIns="0">
             <a:spAutoFit/>
           </a:bodyPr>
           <a:lstStyle/>
@@ -13319,7 +12950,6 @@
           <a:lstStyle/>
           <a:p>
             <a:pPr algn="ctr"/>
-            <a:endParaRPr/>
           </a:p>
         </p:txBody>
       </p:sp>
@@ -13340,7 +12970,7 @@
           <a:noFill/>
         </p:spPr>
         <p:txBody>
-          <a:bodyPr wrap="square" lIns="0" tIns="0" rIns="0" bIns="0" anchor="t">
+          <a:bodyPr wrap="square" anchor="t" lIns="0" rIns="0" tIns="0" bIns="0">
             <a:spAutoFit/>
           </a:bodyPr>
           <a:lstStyle/>
@@ -13383,13 +13013,21 @@
           <a:noFill/>
         </p:spPr>
         <p:txBody>
-          <a:bodyPr wrap="square" lIns="0" tIns="0" rIns="0" bIns="0" anchor="t">
+          <a:bodyPr wrap="square" anchor="t" lIns="0" rIns="0" tIns="0" bIns="0">
             <a:spAutoFit/>
           </a:bodyPr>
           <a:lstStyle/>
           <a:p>
             <a:pPr algn="r"/>
-            <a:endParaRPr/>
+            <a:r>
+              <a:rPr sz="1100" b="0" i="0">
+                <a:solidFill>
+                  <a:srgbClr val="7A7A7A"/>
+                </a:solidFill>
+                <a:latin typeface="Roboto"/>
+              </a:rPr>
+              <a:t/>
+            </a:r>
           </a:p>
         </p:txBody>
       </p:sp>
@@ -13402,7 +13040,7 @@
 </file>
 
 <file path=ppt/slides/slide5.xml><?xml version="1.0" encoding="utf-8"?>
-<p:sld xmlns:a="http://schemas.openxmlformats.org/drawingml/2006/main" xmlns:r="http://schemas.openxmlformats.org/officeDocument/2006/relationships" xmlns:p="http://schemas.openxmlformats.org/presentationml/2006/main">
+<p:sld xmlns:a="http://schemas.openxmlformats.org/drawingml/2006/main" xmlns:p="http://schemas.openxmlformats.org/presentationml/2006/main" xmlns:r="http://schemas.openxmlformats.org/officeDocument/2006/relationships">
   <p:cSld>
     <p:bg>
       <p:bgPr>
@@ -13418,14 +13056,7 @@
         <p:cNvGrpSpPr/>
         <p:nvPr/>
       </p:nvGrpSpPr>
-      <p:grpSpPr>
-        <a:xfrm>
-          <a:off x="0" y="0"/>
-          <a:ext cx="0" cy="0"/>
-          <a:chOff x="0" y="0"/>
-          <a:chExt cx="0" cy="0"/>
-        </a:xfrm>
-      </p:grpSpPr>
+      <p:grpSpPr/>
       <p:sp>
         <p:nvSpPr>
           <p:cNvPr id="2" name="TextBox 1"/>
@@ -13443,7 +13074,7 @@
           <a:noFill/>
         </p:spPr>
         <p:txBody>
-          <a:bodyPr wrap="square" lIns="0" tIns="0" rIns="0" bIns="0" anchor="t">
+          <a:bodyPr wrap="square" anchor="t" lIns="0" rIns="0" tIns="0" bIns="0">
             <a:spAutoFit/>
           </a:bodyPr>
           <a:lstStyle/>
@@ -13517,7 +13148,6 @@
           <a:lstStyle/>
           <a:p>
             <a:pPr algn="ctr"/>
-            <a:endParaRPr/>
           </a:p>
         </p:txBody>
       </p:sp>
@@ -13538,7 +13168,7 @@
           <a:noFill/>
         </p:spPr>
         <p:txBody>
-          <a:bodyPr wrap="square" lIns="0" tIns="0" rIns="0" bIns="0" anchor="ctr">
+          <a:bodyPr wrap="square" anchor="ctr" lIns="0" rIns="0" tIns="0" bIns="0">
             <a:spAutoFit/>
           </a:bodyPr>
           <a:lstStyle/>
@@ -13709,7 +13339,6 @@
           <a:lstStyle/>
           <a:p>
             <a:pPr algn="ctr"/>
-            <a:endParaRPr/>
           </a:p>
         </p:txBody>
       </p:sp>
@@ -13730,7 +13359,7 @@
           <a:noFill/>
         </p:spPr>
         <p:txBody>
-          <a:bodyPr wrap="square" lIns="0" tIns="0" rIns="0" bIns="0" anchor="t">
+          <a:bodyPr wrap="square" anchor="t" lIns="0" rIns="0" tIns="0" bIns="0">
             <a:spAutoFit/>
           </a:bodyPr>
           <a:lstStyle/>
@@ -13773,7 +13402,7 @@
           <a:noFill/>
         </p:spPr>
         <p:txBody>
-          <a:bodyPr wrap="square" lIns="0" tIns="0" rIns="0" bIns="0" anchor="t">
+          <a:bodyPr wrap="square" anchor="t" lIns="0" rIns="0" tIns="0" bIns="0">
             <a:spAutoFit/>
           </a:bodyPr>
           <a:lstStyle/>
@@ -13800,7 +13429,7 @@
 </file>
 
 <file path=ppt/slides/slide6.xml><?xml version="1.0" encoding="utf-8"?>
-<p:sld xmlns:a="http://schemas.openxmlformats.org/drawingml/2006/main" xmlns:r="http://schemas.openxmlformats.org/officeDocument/2006/relationships" xmlns:p="http://schemas.openxmlformats.org/presentationml/2006/main">
+<p:sld xmlns:a="http://schemas.openxmlformats.org/drawingml/2006/main" xmlns:p="http://schemas.openxmlformats.org/presentationml/2006/main" xmlns:r="http://schemas.openxmlformats.org/officeDocument/2006/relationships">
   <p:cSld>
     <p:bg>
       <p:bgPr>
@@ -13816,14 +13445,7 @@
         <p:cNvGrpSpPr/>
         <p:nvPr/>
       </p:nvGrpSpPr>
-      <p:grpSpPr>
-        <a:xfrm>
-          <a:off x="0" y="0"/>
-          <a:ext cx="0" cy="0"/>
-          <a:chOff x="0" y="0"/>
-          <a:chExt cx="0" cy="0"/>
-        </a:xfrm>
-      </p:grpSpPr>
+      <p:grpSpPr/>
       <p:sp>
         <p:nvSpPr>
           <p:cNvPr id="2" name="TextBox 1"/>
@@ -13841,7 +13463,7 @@
           <a:noFill/>
         </p:spPr>
         <p:txBody>
-          <a:bodyPr wrap="square" lIns="0" tIns="0" rIns="0" bIns="0" anchor="t">
+          <a:bodyPr wrap="square" anchor="t" lIns="0" rIns="0" tIns="0" bIns="0">
             <a:spAutoFit/>
           </a:bodyPr>
           <a:lstStyle/>
@@ -13899,7 +13521,6 @@
           <a:lstStyle/>
           <a:p>
             <a:pPr algn="ctr"/>
-            <a:endParaRPr/>
           </a:p>
         </p:txBody>
       </p:sp>
@@ -13920,7 +13541,7 @@
           <a:noFill/>
         </p:spPr>
         <p:txBody>
-          <a:bodyPr wrap="square" lIns="0" tIns="0" rIns="0" bIns="0" anchor="ctr">
+          <a:bodyPr wrap="square" anchor="ctr" lIns="0" rIns="0" tIns="0" bIns="0">
             <a:spAutoFit/>
           </a:bodyPr>
           <a:lstStyle/>
@@ -14184,7 +13805,6 @@
           <a:lstStyle/>
           <a:p>
             <a:pPr algn="ctr"/>
-            <a:endParaRPr/>
           </a:p>
         </p:txBody>
       </p:sp>
@@ -14205,7 +13825,7 @@
           <a:noFill/>
         </p:spPr>
         <p:txBody>
-          <a:bodyPr wrap="square" lIns="0" tIns="0" rIns="0" bIns="0" anchor="t">
+          <a:bodyPr wrap="square" anchor="t" lIns="0" rIns="0" tIns="0" bIns="0">
             <a:spAutoFit/>
           </a:bodyPr>
           <a:lstStyle/>
@@ -14248,7 +13868,7 @@
           <a:noFill/>
         </p:spPr>
         <p:txBody>
-          <a:bodyPr wrap="square" lIns="0" tIns="0" rIns="0" bIns="0" anchor="t">
+          <a:bodyPr wrap="square" anchor="t" lIns="0" rIns="0" tIns="0" bIns="0">
             <a:spAutoFit/>
           </a:bodyPr>
           <a:lstStyle/>
@@ -14275,7 +13895,7 @@
 </file>
 
 <file path=ppt/slides/slide7.xml><?xml version="1.0" encoding="utf-8"?>
-<p:sld xmlns:a="http://schemas.openxmlformats.org/drawingml/2006/main" xmlns:r="http://schemas.openxmlformats.org/officeDocument/2006/relationships" xmlns:p="http://schemas.openxmlformats.org/presentationml/2006/main">
+<p:sld xmlns:a="http://schemas.openxmlformats.org/drawingml/2006/main" xmlns:p="http://schemas.openxmlformats.org/presentationml/2006/main" xmlns:r="http://schemas.openxmlformats.org/officeDocument/2006/relationships">
   <p:cSld>
     <p:bg>
       <p:bgPr>
@@ -14291,14 +13911,7 @@
         <p:cNvGrpSpPr/>
         <p:nvPr/>
       </p:nvGrpSpPr>
-      <p:grpSpPr>
-        <a:xfrm>
-          <a:off x="0" y="0"/>
-          <a:ext cx="0" cy="0"/>
-          <a:chOff x="0" y="0"/>
-          <a:chExt cx="0" cy="0"/>
-        </a:xfrm>
-      </p:grpSpPr>
+      <p:grpSpPr/>
       <p:sp>
         <p:nvSpPr>
           <p:cNvPr id="2" name="TextBox 1"/>
@@ -14316,7 +13929,7 @@
           <a:noFill/>
         </p:spPr>
         <p:txBody>
-          <a:bodyPr wrap="square" lIns="0" tIns="0" rIns="0" bIns="0" anchor="t">
+          <a:bodyPr wrap="square" anchor="t" lIns="0" rIns="0" tIns="0" bIns="0">
             <a:spAutoFit/>
           </a:bodyPr>
           <a:lstStyle/>
@@ -14390,7 +14003,6 @@
           <a:lstStyle/>
           <a:p>
             <a:pPr algn="ctr"/>
-            <a:endParaRPr/>
           </a:p>
         </p:txBody>
       </p:sp>
@@ -14411,7 +14023,7 @@
           <a:noFill/>
         </p:spPr>
         <p:txBody>
-          <a:bodyPr wrap="square" lIns="0" tIns="0" rIns="0" bIns="0" anchor="ctr">
+          <a:bodyPr wrap="square" anchor="ctr" lIns="0" rIns="0" tIns="0" bIns="0">
             <a:spAutoFit/>
           </a:bodyPr>
           <a:lstStyle/>
@@ -14613,7 +14225,6 @@
           <a:lstStyle/>
           <a:p>
             <a:pPr algn="ctr"/>
-            <a:endParaRPr/>
           </a:p>
         </p:txBody>
       </p:sp>
@@ -14634,7 +14245,7 @@
           <a:noFill/>
         </p:spPr>
         <p:txBody>
-          <a:bodyPr wrap="square" lIns="0" tIns="0" rIns="0" bIns="0" anchor="t">
+          <a:bodyPr wrap="square" anchor="t" lIns="0" rIns="0" tIns="0" bIns="0">
             <a:spAutoFit/>
           </a:bodyPr>
           <a:lstStyle/>
@@ -14677,7 +14288,7 @@
           <a:noFill/>
         </p:spPr>
         <p:txBody>
-          <a:bodyPr wrap="square" lIns="0" tIns="0" rIns="0" bIns="0" anchor="t">
+          <a:bodyPr wrap="square" anchor="t" lIns="0" rIns="0" tIns="0" bIns="0">
             <a:spAutoFit/>
           </a:bodyPr>
           <a:lstStyle/>
@@ -14704,7 +14315,7 @@
 </file>
 
 <file path=ppt/slides/slide8.xml><?xml version="1.0" encoding="utf-8"?>
-<p:sld xmlns:a="http://schemas.openxmlformats.org/drawingml/2006/main" xmlns:r="http://schemas.openxmlformats.org/officeDocument/2006/relationships" xmlns:p="http://schemas.openxmlformats.org/presentationml/2006/main">
+<p:sld xmlns:a="http://schemas.openxmlformats.org/drawingml/2006/main" xmlns:p="http://schemas.openxmlformats.org/presentationml/2006/main" xmlns:r="http://schemas.openxmlformats.org/officeDocument/2006/relationships">
   <p:cSld>
     <p:bg>
       <p:bgPr>
@@ -14720,14 +14331,7 @@
         <p:cNvGrpSpPr/>
         <p:nvPr/>
       </p:nvGrpSpPr>
-      <p:grpSpPr>
-        <a:xfrm>
-          <a:off x="0" y="0"/>
-          <a:ext cx="0" cy="0"/>
-          <a:chOff x="0" y="0"/>
-          <a:chExt cx="0" cy="0"/>
-        </a:xfrm>
-      </p:grpSpPr>
+      <p:grpSpPr/>
       <p:sp>
         <p:nvSpPr>
           <p:cNvPr id="2" name="TextBox 1"/>
@@ -14745,7 +14349,7 @@
           <a:noFill/>
         </p:spPr>
         <p:txBody>
-          <a:bodyPr wrap="square" lIns="0" tIns="0" rIns="0" bIns="0" anchor="t">
+          <a:bodyPr wrap="square" anchor="t" lIns="0" rIns="0" tIns="0" bIns="0">
             <a:spAutoFit/>
           </a:bodyPr>
           <a:lstStyle/>
@@ -14803,7 +14407,6 @@
           <a:lstStyle/>
           <a:p>
             <a:pPr algn="ctr"/>
-            <a:endParaRPr/>
           </a:p>
         </p:txBody>
       </p:sp>
@@ -14824,7 +14427,7 @@
           <a:noFill/>
         </p:spPr>
         <p:txBody>
-          <a:bodyPr wrap="square" lIns="0" tIns="0" rIns="0" bIns="0" anchor="ctr">
+          <a:bodyPr wrap="square" anchor="ctr" lIns="0" rIns="0" tIns="0" bIns="0">
             <a:spAutoFit/>
           </a:bodyPr>
           <a:lstStyle/>
@@ -14995,7 +14598,6 @@
           <a:lstStyle/>
           <a:p>
             <a:pPr algn="ctr"/>
-            <a:endParaRPr/>
           </a:p>
         </p:txBody>
       </p:sp>
@@ -15016,7 +14618,7 @@
           <a:noFill/>
         </p:spPr>
         <p:txBody>
-          <a:bodyPr wrap="square" lIns="0" tIns="0" rIns="0" bIns="0" anchor="t">
+          <a:bodyPr wrap="square" anchor="t" lIns="0" rIns="0" tIns="0" bIns="0">
             <a:spAutoFit/>
           </a:bodyPr>
           <a:lstStyle/>
@@ -15059,7 +14661,7 @@
           <a:noFill/>
         </p:spPr>
         <p:txBody>
-          <a:bodyPr wrap="square" lIns="0" tIns="0" rIns="0" bIns="0" anchor="t">
+          <a:bodyPr wrap="square" anchor="t" lIns="0" rIns="0" tIns="0" bIns="0">
             <a:spAutoFit/>
           </a:bodyPr>
           <a:lstStyle/>
@@ -15086,7 +14688,7 @@
 </file>
 
 <file path=ppt/slides/slide9.xml><?xml version="1.0" encoding="utf-8"?>
-<p:sld xmlns:a="http://schemas.openxmlformats.org/drawingml/2006/main" xmlns:r="http://schemas.openxmlformats.org/officeDocument/2006/relationships" xmlns:p="http://schemas.openxmlformats.org/presentationml/2006/main">
+<p:sld xmlns:a="http://schemas.openxmlformats.org/drawingml/2006/main" xmlns:p="http://schemas.openxmlformats.org/presentationml/2006/main" xmlns:r="http://schemas.openxmlformats.org/officeDocument/2006/relationships">
   <p:cSld>
     <p:bg>
       <p:bgPr>
@@ -15102,14 +14704,7 @@
         <p:cNvGrpSpPr/>
         <p:nvPr/>
       </p:nvGrpSpPr>
-      <p:grpSpPr>
-        <a:xfrm>
-          <a:off x="0" y="0"/>
-          <a:ext cx="0" cy="0"/>
-          <a:chOff x="0" y="0"/>
-          <a:chExt cx="0" cy="0"/>
-        </a:xfrm>
-      </p:grpSpPr>
+      <p:grpSpPr/>
       <p:sp>
         <p:nvSpPr>
           <p:cNvPr id="2" name="Rectangle 1"/>
@@ -15151,7 +14746,6 @@
           <a:lstStyle/>
           <a:p>
             <a:pPr algn="ctr"/>
-            <a:endParaRPr/>
           </a:p>
         </p:txBody>
       </p:sp>
@@ -15225,7 +14819,7 @@
           <a:noFill/>
         </p:spPr>
         <p:txBody>
-          <a:bodyPr wrap="square" lIns="0" tIns="0" rIns="0" bIns="0" anchor="ctr">
+          <a:bodyPr wrap="square" anchor="ctr" lIns="0" rIns="0" tIns="0" bIns="0">
             <a:spAutoFit/>
           </a:bodyPr>
           <a:lstStyle/>
@@ -15251,7 +14845,7 @@
         <p:spPr>
           <a:xfrm>
             <a:off x="658368" y="1554480"/>
-            <a:ext cx="10881360" cy="3726918"/>
+            <a:ext cx="10881360" cy="4297680"/>
           </a:xfrm>
           <a:prstGeom prst="rect">
             <a:avLst/>
@@ -15259,7 +14853,7 @@
           <a:noFill/>
         </p:spPr>
         <p:txBody>
-          <a:bodyPr wrap="square" lIns="0" tIns="0" rIns="0" bIns="0" anchor="t">
+          <a:bodyPr wrap="square" anchor="t" lIns="0" rIns="0" tIns="0" bIns="0">
             <a:spAutoFit/>
           </a:bodyPr>
           <a:lstStyle/>
@@ -15276,7 +14870,7 @@
               </a:spcAft>
             </a:pPr>
             <a:r>
-              <a:rPr sz="2000" b="1" i="0" dirty="0">
+              <a:rPr sz="1700" b="1" i="0">
                 <a:solidFill>
                   <a:srgbClr val="EDAB0C"/>
                 </a:solidFill>
@@ -15285,7 +14879,7 @@
               <a:t>■  </a:t>
             </a:r>
             <a:r>
-              <a:rPr sz="2000" b="0" i="0" dirty="0">
+              <a:rPr sz="1700" b="0" i="0">
                 <a:solidFill>
                   <a:srgbClr val="2A2929"/>
                 </a:solidFill>
@@ -15307,7 +14901,7 @@
               </a:spcAft>
             </a:pPr>
             <a:r>
-              <a:rPr sz="2000" b="1" i="0" dirty="0">
+              <a:rPr sz="1700" b="1" i="0">
                 <a:solidFill>
                   <a:srgbClr val="EDAB0C"/>
                 </a:solidFill>
@@ -15316,7 +14910,7 @@
               <a:t>■  </a:t>
             </a:r>
             <a:r>
-              <a:rPr sz="2000" b="0" i="0" dirty="0">
+              <a:rPr sz="1700" b="0" i="0">
                 <a:solidFill>
                   <a:srgbClr val="2A2929"/>
                 </a:solidFill>
@@ -15338,7 +14932,7 @@
               </a:spcAft>
             </a:pPr>
             <a:r>
-              <a:rPr b="0" i="0" dirty="0">
+              <a:rPr sz="1400" b="0" i="0">
                 <a:solidFill>
                   <a:srgbClr val="7A7A7A"/>
                 </a:solidFill>
@@ -15347,7 +14941,7 @@
               <a:t>–  </a:t>
             </a:r>
             <a:r>
-              <a:rPr b="0" i="0" dirty="0">
+              <a:rPr sz="1400" b="0" i="0">
                 <a:solidFill>
                   <a:srgbClr val="2A2929"/>
                 </a:solidFill>
@@ -15369,7 +14963,7 @@
               </a:spcAft>
             </a:pPr>
             <a:r>
-              <a:rPr b="0" i="0" dirty="0">
+              <a:rPr sz="1400" b="0" i="0">
                 <a:solidFill>
                   <a:srgbClr val="7A7A7A"/>
                 </a:solidFill>
@@ -15378,7 +14972,7 @@
               <a:t>–  </a:t>
             </a:r>
             <a:r>
-              <a:rPr b="0" i="0" dirty="0">
+              <a:rPr sz="1400" b="0" i="0">
                 <a:solidFill>
                   <a:srgbClr val="2A2929"/>
                 </a:solidFill>
@@ -15400,7 +14994,7 @@
               </a:spcAft>
             </a:pPr>
             <a:r>
-              <a:rPr b="0" i="0" dirty="0">
+              <a:rPr sz="1400" b="0" i="0">
                 <a:solidFill>
                   <a:srgbClr val="7A7A7A"/>
                 </a:solidFill>
@@ -15409,7 +15003,7 @@
               <a:t>–  </a:t>
             </a:r>
             <a:r>
-              <a:rPr b="0" i="0" dirty="0">
+              <a:rPr sz="1400" b="0" i="0">
                 <a:solidFill>
                   <a:srgbClr val="2A2929"/>
                 </a:solidFill>
@@ -15431,7 +15025,7 @@
               </a:spcAft>
             </a:pPr>
             <a:r>
-              <a:rPr b="0" i="0" dirty="0">
+              <a:rPr sz="1400" b="0" i="0">
                 <a:solidFill>
                   <a:srgbClr val="7A7A7A"/>
                 </a:solidFill>
@@ -15440,7 +15034,7 @@
               <a:t>–  </a:t>
             </a:r>
             <a:r>
-              <a:rPr b="0" i="0" dirty="0">
+              <a:rPr sz="1400" b="0" i="0">
                 <a:solidFill>
                   <a:srgbClr val="2A2929"/>
                 </a:solidFill>
@@ -15462,7 +15056,7 @@
               </a:spcAft>
             </a:pPr>
             <a:r>
-              <a:rPr sz="2000" b="1" i="0" dirty="0">
+              <a:rPr sz="1700" b="1" i="0">
                 <a:solidFill>
                   <a:srgbClr val="EDAB0C"/>
                 </a:solidFill>
@@ -15471,7 +15065,7 @@
               <a:t>■  </a:t>
             </a:r>
             <a:r>
-              <a:rPr sz="2000" b="0" i="0" dirty="0">
+              <a:rPr sz="1700" b="0" i="0">
                 <a:solidFill>
                   <a:srgbClr val="2A2929"/>
                 </a:solidFill>
@@ -15493,7 +15087,7 @@
               </a:spcAft>
             </a:pPr>
             <a:r>
-              <a:rPr sz="2000" b="1" i="0" dirty="0">
+              <a:rPr sz="1700" b="1" i="0">
                 <a:solidFill>
                   <a:srgbClr val="EDAB0C"/>
                 </a:solidFill>
@@ -15502,7 +15096,7 @@
               <a:t>■  </a:t>
             </a:r>
             <a:r>
-              <a:rPr sz="2000" b="0" i="0" dirty="0">
+              <a:rPr sz="1700" b="0" i="0">
                 <a:solidFill>
                   <a:srgbClr val="2A2929"/>
                 </a:solidFill>
@@ -15556,7 +15150,6 @@
           <a:lstStyle/>
           <a:p>
             <a:pPr algn="ctr"/>
-            <a:endParaRPr/>
           </a:p>
         </p:txBody>
       </p:sp>
@@ -15577,7 +15170,7 @@
           <a:noFill/>
         </p:spPr>
         <p:txBody>
-          <a:bodyPr wrap="square" lIns="0" tIns="0" rIns="0" bIns="0" anchor="ctr">
+          <a:bodyPr wrap="square" anchor="ctr" lIns="0" rIns="0" tIns="0" bIns="0">
             <a:spAutoFit/>
           </a:bodyPr>
           <a:lstStyle/>
@@ -15635,7 +15228,6 @@
           <a:lstStyle/>
           <a:p>
             <a:pPr algn="ctr"/>
-            <a:endParaRPr/>
           </a:p>
         </p:txBody>
       </p:sp>
@@ -15656,7 +15248,7 @@
           <a:noFill/>
         </p:spPr>
         <p:txBody>
-          <a:bodyPr wrap="square" lIns="0" tIns="0" rIns="0" bIns="0" anchor="t">
+          <a:bodyPr wrap="square" anchor="t" lIns="0" rIns="0" tIns="0" bIns="0">
             <a:spAutoFit/>
           </a:bodyPr>
           <a:lstStyle/>
@@ -15699,7 +15291,7 @@
           <a:noFill/>
         </p:spPr>
         <p:txBody>
-          <a:bodyPr wrap="square" lIns="0" tIns="0" rIns="0" bIns="0" anchor="t">
+          <a:bodyPr wrap="square" anchor="t" lIns="0" rIns="0" tIns="0" bIns="0">
             <a:spAutoFit/>
           </a:bodyPr>
           <a:lstStyle/>
@@ -16056,44 +15648,44 @@
         <a:sysClr val="window" lastClr="FFFFFF"/>
       </a:lt1>
       <a:dk2>
-        <a:srgbClr val="0E2841"/>
+        <a:srgbClr val="1F497D"/>
       </a:dk2>
       <a:lt2>
-        <a:srgbClr val="E8E8E8"/>
+        <a:srgbClr val="EEECE1"/>
       </a:lt2>
       <a:accent1>
-        <a:srgbClr val="156082"/>
+        <a:srgbClr val="4F81BD"/>
       </a:accent1>
       <a:accent2>
-        <a:srgbClr val="E97132"/>
+        <a:srgbClr val="C0504D"/>
       </a:accent2>
       <a:accent3>
-        <a:srgbClr val="196B24"/>
+        <a:srgbClr val="9BBB59"/>
       </a:accent3>
       <a:accent4>
-        <a:srgbClr val="0F9ED5"/>
+        <a:srgbClr val="8064A2"/>
       </a:accent4>
       <a:accent5>
-        <a:srgbClr val="A02B93"/>
+        <a:srgbClr val="4BACC6"/>
       </a:accent5>
       <a:accent6>
-        <a:srgbClr val="4EA72E"/>
+        <a:srgbClr val="F79646"/>
       </a:accent6>
       <a:hlink>
-        <a:srgbClr val="467886"/>
+        <a:srgbClr val="0000FF"/>
       </a:hlink>
       <a:folHlink>
-        <a:srgbClr val="96607D"/>
+        <a:srgbClr val="800080"/>
       </a:folHlink>
     </a:clrScheme>
     <a:fontScheme name="Office">
       <a:majorFont>
-        <a:latin typeface="Aptos Display" panose="02110004020202020204"/>
+        <a:latin typeface="Calibri"/>
         <a:ea typeface=""/>
         <a:cs typeface=""/>
-        <a:font script="Jpan" typeface="游ゴシック Light"/>
+        <a:font script="Jpan" typeface="ＭＳ Ｐゴシック"/>
         <a:font script="Hang" typeface="맑은 고딕"/>
-        <a:font script="Hans" typeface="等线 Light"/>
+        <a:font script="Hans" typeface="宋体"/>
         <a:font script="Hant" typeface="新細明體"/>
         <a:font script="Arab" typeface="Times New Roman"/>
         <a:font script="Hebr" typeface="Times New Roman"/>
@@ -16121,31 +15713,14 @@
         <a:font script="Viet" typeface="Times New Roman"/>
         <a:font script="Uigh" typeface="Microsoft Uighur"/>
         <a:font script="Geor" typeface="Sylfaen"/>
-        <a:font script="Armn" typeface="Arial"/>
-        <a:font script="Bugi" typeface="Leelawadee UI"/>
-        <a:font script="Bopo" typeface="Microsoft JhengHei"/>
-        <a:font script="Java" typeface="Javanese Text"/>
-        <a:font script="Lisu" typeface="Segoe UI"/>
-        <a:font script="Mymr" typeface="Myanmar Text"/>
-        <a:font script="Nkoo" typeface="Ebrima"/>
-        <a:font script="Olck" typeface="Nirmala UI"/>
-        <a:font script="Osma" typeface="Ebrima"/>
-        <a:font script="Phag" typeface="Phagspa"/>
-        <a:font script="Syrn" typeface="Estrangelo Edessa"/>
-        <a:font script="Syrj" typeface="Estrangelo Edessa"/>
-        <a:font script="Syre" typeface="Estrangelo Edessa"/>
-        <a:font script="Sora" typeface="Nirmala UI"/>
-        <a:font script="Tale" typeface="Microsoft Tai Le"/>
-        <a:font script="Talu" typeface="Microsoft New Tai Lue"/>
-        <a:font script="Tfng" typeface="Ebrima"/>
       </a:majorFont>
       <a:minorFont>
-        <a:latin typeface="Aptos" panose="02110004020202020204"/>
+        <a:latin typeface="Calibri"/>
         <a:ea typeface=""/>
         <a:cs typeface=""/>
-        <a:font script="Jpan" typeface="游ゴシック"/>
+        <a:font script="Jpan" typeface="ＭＳ Ｐゴシック"/>
         <a:font script="Hang" typeface="맑은 고딕"/>
-        <a:font script="Hans" typeface="等线"/>
+        <a:font script="Hans" typeface="宋体"/>
         <a:font script="Hant" typeface="新細明體"/>
         <a:font script="Arab" typeface="Arial"/>
         <a:font script="Hebr" typeface="Arial"/>
@@ -16173,23 +15748,6 @@
         <a:font script="Viet" typeface="Arial"/>
         <a:font script="Uigh" typeface="Microsoft Uighur"/>
         <a:font script="Geor" typeface="Sylfaen"/>
-        <a:font script="Armn" typeface="Arial"/>
-        <a:font script="Bugi" typeface="Leelawadee UI"/>
-        <a:font script="Bopo" typeface="Microsoft JhengHei"/>
-        <a:font script="Java" typeface="Javanese Text"/>
-        <a:font script="Lisu" typeface="Segoe UI"/>
-        <a:font script="Mymr" typeface="Myanmar Text"/>
-        <a:font script="Nkoo" typeface="Ebrima"/>
-        <a:font script="Olck" typeface="Nirmala UI"/>
-        <a:font script="Osma" typeface="Ebrima"/>
-        <a:font script="Phag" typeface="Phagspa"/>
-        <a:font script="Syrn" typeface="Estrangelo Edessa"/>
-        <a:font script="Syrj" typeface="Estrangelo Edessa"/>
-        <a:font script="Syre" typeface="Estrangelo Edessa"/>
-        <a:font script="Sora" typeface="Nirmala UI"/>
-        <a:font script="Tale" typeface="Microsoft Tai Le"/>
-        <a:font script="Talu" typeface="Microsoft New Tai Lue"/>
-        <a:font script="Tfng" typeface="Ebrima"/>
       </a:minorFont>
     </a:fontScheme>
     <a:fmtScheme name="Office">
@@ -16201,136 +15759,180 @@
           <a:gsLst>
             <a:gs pos="0">
               <a:schemeClr val="phClr">
-                <a:lumMod val="110000"/>
-                <a:satMod val="105000"/>
-                <a:tint val="67000"/>
+                <a:tint val="50000"/>
+                <a:satMod val="300000"/>
               </a:schemeClr>
             </a:gs>
-            <a:gs pos="50000">
+            <a:gs pos="35000">
               <a:schemeClr val="phClr">
-                <a:lumMod val="105000"/>
-                <a:satMod val="103000"/>
-                <a:tint val="73000"/>
+                <a:tint val="37000"/>
+                <a:satMod val="300000"/>
               </a:schemeClr>
             </a:gs>
             <a:gs pos="100000">
               <a:schemeClr val="phClr">
-                <a:lumMod val="105000"/>
-                <a:satMod val="109000"/>
-                <a:tint val="81000"/>
+                <a:tint val="15000"/>
+                <a:satMod val="350000"/>
               </a:schemeClr>
             </a:gs>
           </a:gsLst>
-          <a:lin ang="5400000" scaled="0"/>
+          <a:lin ang="16200000" scaled="1"/>
         </a:gradFill>
         <a:gradFill rotWithShape="1">
           <a:gsLst>
             <a:gs pos="0">
               <a:schemeClr val="phClr">
-                <a:satMod val="103000"/>
-                <a:lumMod val="102000"/>
-                <a:tint val="94000"/>
-              </a:schemeClr>
-            </a:gs>
-            <a:gs pos="50000">
-              <a:schemeClr val="phClr">
-                <a:satMod val="110000"/>
-                <a:lumMod val="100000"/>
+                <a:tint val="100000"/>
                 <a:shade val="100000"/>
+                <a:satMod val="130000"/>
               </a:schemeClr>
             </a:gs>
             <a:gs pos="100000">
               <a:schemeClr val="phClr">
-                <a:lumMod val="99000"/>
-                <a:satMod val="120000"/>
-                <a:shade val="78000"/>
+                <a:tint val="50000"/>
+                <a:shade val="100000"/>
+                <a:satMod val="350000"/>
               </a:schemeClr>
             </a:gs>
           </a:gsLst>
-          <a:lin ang="5400000" scaled="0"/>
+          <a:lin ang="16200000" scaled="0"/>
         </a:gradFill>
       </a:fillStyleLst>
       <a:lnStyleLst>
-        <a:ln w="12700" cap="flat" cmpd="sng" algn="ctr">
+        <a:ln w="9525" cap="flat" cmpd="sng" algn="ctr">
           <a:solidFill>
-            <a:schemeClr val="phClr"/>
+            <a:schemeClr val="phClr">
+              <a:shade val="95000"/>
+              <a:satMod val="105000"/>
+            </a:schemeClr>
           </a:solidFill>
           <a:prstDash val="solid"/>
-          <a:miter lim="800000"/>
-        </a:ln>
-        <a:ln w="19050" cap="flat" cmpd="sng" algn="ctr">
-          <a:solidFill>
-            <a:schemeClr val="phClr"/>
-          </a:solidFill>
-          <a:prstDash val="solid"/>
-          <a:miter lim="800000"/>
         </a:ln>
         <a:ln w="25400" cap="flat" cmpd="sng" algn="ctr">
           <a:solidFill>
             <a:schemeClr val="phClr"/>
           </a:solidFill>
           <a:prstDash val="solid"/>
-          <a:miter lim="800000"/>
+        </a:ln>
+        <a:ln w="38100" cap="flat" cmpd="sng" algn="ctr">
+          <a:solidFill>
+            <a:schemeClr val="phClr"/>
+          </a:solidFill>
+          <a:prstDash val="solid"/>
         </a:ln>
       </a:lnStyleLst>
       <a:effectStyleLst>
         <a:effectStyle>
-          <a:effectLst/>
-        </a:effectStyle>
-        <a:effectStyle>
-          <a:effectLst/>
+          <a:effectLst>
+            <a:outerShdw blurRad="40000" dist="20000" dir="5400000" rotWithShape="0">
+              <a:srgbClr val="000000">
+                <a:alpha val="38000"/>
+              </a:srgbClr>
+            </a:outerShdw>
+          </a:effectLst>
         </a:effectStyle>
         <a:effectStyle>
           <a:effectLst>
-            <a:outerShdw blurRad="57150" dist="19050" dir="5400000" algn="ctr" rotWithShape="0">
+            <a:outerShdw blurRad="40000" dist="23000" dir="5400000" rotWithShape="0">
               <a:srgbClr val="000000">
-                <a:alpha val="63000"/>
+                <a:alpha val="35000"/>
               </a:srgbClr>
             </a:outerShdw>
           </a:effectLst>
+        </a:effectStyle>
+        <a:effectStyle>
+          <a:effectLst>
+            <a:outerShdw blurRad="40000" dist="23000" dir="5400000" rotWithShape="0">
+              <a:srgbClr val="000000">
+                <a:alpha val="35000"/>
+              </a:srgbClr>
+            </a:outerShdw>
+          </a:effectLst>
+          <a:scene3d>
+            <a:camera prst="orthographicFront">
+              <a:rot lat="0" lon="0" rev="0"/>
+            </a:camera>
+            <a:lightRig rig="threePt" dir="t">
+              <a:rot lat="0" lon="0" rev="1200000"/>
+            </a:lightRig>
+          </a:scene3d>
+          <a:sp3d>
+            <a:bevelT w="63500" h="25400"/>
+          </a:sp3d>
         </a:effectStyle>
       </a:effectStyleLst>
       <a:bgFillStyleLst>
         <a:solidFill>
           <a:schemeClr val="phClr"/>
         </a:solidFill>
-        <a:solidFill>
-          <a:schemeClr val="phClr">
-            <a:tint val="95000"/>
-            <a:satMod val="170000"/>
-          </a:schemeClr>
-        </a:solidFill>
         <a:gradFill rotWithShape="1">
           <a:gsLst>
             <a:gs pos="0">
               <a:schemeClr val="phClr">
-                <a:tint val="93000"/>
-                <a:satMod val="150000"/>
-                <a:shade val="98000"/>
-                <a:lumMod val="102000"/>
+                <a:tint val="40000"/>
+                <a:satMod val="350000"/>
               </a:schemeClr>
             </a:gs>
-            <a:gs pos="50000">
+            <a:gs pos="40000">
               <a:schemeClr val="phClr">
-                <a:tint val="98000"/>
-                <a:satMod val="130000"/>
-                <a:shade val="90000"/>
-                <a:lumMod val="103000"/>
+                <a:tint val="45000"/>
+                <a:shade val="99000"/>
+                <a:satMod val="350000"/>
               </a:schemeClr>
             </a:gs>
             <a:gs pos="100000">
               <a:schemeClr val="phClr">
-                <a:shade val="63000"/>
-                <a:satMod val="120000"/>
+                <a:shade val="20000"/>
+                <a:satMod val="255000"/>
               </a:schemeClr>
             </a:gs>
           </a:gsLst>
-          <a:lin ang="5400000" scaled="0"/>
+          <a:path path="circle">
+            <a:fillToRect l="50000" t="-80000" r="50000" b="180000"/>
+          </a:path>
+        </a:gradFill>
+        <a:gradFill rotWithShape="1">
+          <a:gsLst>
+            <a:gs pos="0">
+              <a:schemeClr val="phClr">
+                <a:tint val="80000"/>
+                <a:satMod val="300000"/>
+              </a:schemeClr>
+            </a:gs>
+            <a:gs pos="100000">
+              <a:schemeClr val="phClr">
+                <a:shade val="30000"/>
+                <a:satMod val="200000"/>
+              </a:schemeClr>
+            </a:gs>
+          </a:gsLst>
+          <a:path path="circle">
+            <a:fillToRect l="50000" t="50000" r="50000" b="50000"/>
+          </a:path>
         </a:gradFill>
       </a:bgFillStyleLst>
     </a:fmtScheme>
   </a:themeElements>
   <a:objectDefaults>
+    <a:spDef>
+      <a:spPr/>
+      <a:bodyPr/>
+      <a:lstStyle/>
+      <a:style>
+        <a:lnRef idx="1">
+          <a:schemeClr val="accent1"/>
+        </a:lnRef>
+        <a:fillRef idx="3">
+          <a:schemeClr val="accent1"/>
+        </a:fillRef>
+        <a:effectRef idx="2">
+          <a:schemeClr val="accent1"/>
+        </a:effectRef>
+        <a:fontRef idx="minor">
+          <a:schemeClr val="lt1"/>
+        </a:fontRef>
+      </a:style>
+    </a:spDef>
     <a:lnDef>
       <a:spPr/>
       <a:bodyPr/>
@@ -16352,10 +15954,5 @@
     </a:lnDef>
   </a:objectDefaults>
   <a:extraClrSchemeLst/>
-  <a:extLst>
-    <a:ext uri="{05A4C25C-085E-4340-85A3-A5531E510DB2}">
-      <thm15:themeFamily xmlns:thm15="http://schemas.microsoft.com/office/thememl/2012/main" name="Office Theme" id="{2E142A2C-CD16-42D6-873A-C26D2A0506FA}" vid="{1BDDFF52-6CD6-40A5-AB3C-68EB2F1E4D0A}"/>
-    </a:ext>
-  </a:extLst>
 </a:theme>
 </file>